--- a/生成AIの追加学習による問題.pptx
+++ b/生成AIの追加学習による問題.pptx
@@ -45,21 +45,21 @@
     <p:sldId id="326" r:id="rId33"/>
     <p:sldId id="299" r:id="rId34"/>
     <p:sldId id="302" r:id="rId35"/>
-    <p:sldId id="303" r:id="rId36"/>
-    <p:sldId id="308" r:id="rId37"/>
-    <p:sldId id="309" r:id="rId38"/>
-    <p:sldId id="311" r:id="rId39"/>
-    <p:sldId id="312" r:id="rId40"/>
-    <p:sldId id="313" r:id="rId41"/>
-    <p:sldId id="314" r:id="rId42"/>
-    <p:sldId id="315" r:id="rId43"/>
-    <p:sldId id="316" r:id="rId44"/>
-    <p:sldId id="317" r:id="rId45"/>
-    <p:sldId id="319" r:id="rId46"/>
-    <p:sldId id="320" r:id="rId47"/>
-    <p:sldId id="321" r:id="rId48"/>
-    <p:sldId id="322" r:id="rId49"/>
-    <p:sldId id="323" r:id="rId50"/>
+    <p:sldId id="308" r:id="rId36"/>
+    <p:sldId id="309" r:id="rId37"/>
+    <p:sldId id="311" r:id="rId38"/>
+    <p:sldId id="312" r:id="rId39"/>
+    <p:sldId id="313" r:id="rId40"/>
+    <p:sldId id="314" r:id="rId41"/>
+    <p:sldId id="315" r:id="rId42"/>
+    <p:sldId id="316" r:id="rId43"/>
+    <p:sldId id="317" r:id="rId44"/>
+    <p:sldId id="319" r:id="rId45"/>
+    <p:sldId id="320" r:id="rId46"/>
+    <p:sldId id="321" r:id="rId47"/>
+    <p:sldId id="322" r:id="rId48"/>
+    <p:sldId id="323" r:id="rId49"/>
+    <p:sldId id="331" r:id="rId50"/>
     <p:sldId id="284" r:id="rId51"/>
   </p:sldIdLst>
   <p:sldSz cx="12192000" cy="6858000"/>
@@ -162,6 +162,9 @@
   <p:extLst>
     <p:ext uri="{EFAFB233-063F-42B5-8137-9DF3F51BA10A}">
       <p15:sldGuideLst xmlns:p15="http://schemas.microsoft.com/office/powerpoint/2012/main"/>
+    </p:ext>
+    <p:ext uri="{2D200454-40CA-4A62-9FC3-DE9A4176ACB9}">
+      <p15:notesGuideLst xmlns:p15="http://schemas.microsoft.com/office/powerpoint/2012/main"/>
     </p:ext>
   </p:extLst>
 </p:presentation>
@@ -2006,7 +2009,7 @@
             </a:r>
             <a:r>
               <a:rPr kumimoji="1" lang="ja-JP" altLang="en-US" dirty="0"/>
-              <a:t>の汎化を考える上で重要な側面であるという先行研究を踏まえたものです。</a:t>
+              <a:t>の性能を考える上で重要な側面であるという先行研究を踏まえたものです。</a:t>
             </a:r>
           </a:p>
           <a:p>
@@ -2135,7 +2138,19 @@
           <a:p>
             <a:r>
               <a:rPr kumimoji="1" lang="ja-JP" altLang="en-US" dirty="0"/>
-              <a:t>次に、構成的汎化に関する先行研究を紹介します。</a:t>
+              <a:t>次に、</a:t>
+            </a:r>
+            <a:r>
+              <a:rPr kumimoji="1" lang="en-US" altLang="ja-JP" dirty="0" err="1"/>
+              <a:t>composeitional</a:t>
+            </a:r>
+            <a:r>
+              <a:rPr kumimoji="1" lang="en-US" altLang="ja-JP" dirty="0"/>
+              <a:t> generalization</a:t>
+            </a:r>
+            <a:r>
+              <a:rPr kumimoji="1" lang="ja-JP" altLang="en-US" dirty="0"/>
+              <a:t>に関する先行研究を紹介します。</a:t>
             </a:r>
           </a:p>
           <a:p>
@@ -2350,7 +2365,7 @@
           <a:p>
             <a:r>
               <a:rPr kumimoji="1" lang="ja-JP" altLang="en-US" dirty="0"/>
-              <a:t>つまり、個々の処理については学習している状態で、それらを学習時とは異なる組み合わせで使う問題に対して、</a:t>
+              <a:t>個々の処理については学習している状態で、それらを学習時とは異なる組み合わせで使う問題に対して、</a:t>
             </a:r>
             <a:r>
               <a:rPr kumimoji="1" lang="en-US" altLang="ja-JP" dirty="0"/>
@@ -2375,15 +2390,7 @@
             </a:r>
             <a:r>
               <a:rPr kumimoji="1" lang="ja-JP" altLang="en-US" dirty="0"/>
-              <a:t>では、</a:t>
-            </a:r>
-            <a:r>
-              <a:rPr kumimoji="1" lang="en-US" altLang="ja-JP" dirty="0"/>
-              <a:t>SFT</a:t>
-            </a:r>
-            <a:r>
-              <a:rPr kumimoji="1" lang="ja-JP" altLang="en-US" dirty="0"/>
-              <a:t>における教師データの違いが、この能力の獲得にどのような影響を与えるのかを明らかにします。</a:t>
+              <a:t>では、教師データの違いが、この能力の獲得にどのような影響を与えるのかを明らかにします。</a:t>
             </a:r>
           </a:p>
           <a:p>
@@ -6438,7 +6445,7 @@
             </a:r>
             <a:r>
               <a:rPr kumimoji="1" lang="ja-JP" altLang="en-US" dirty="0"/>
-              <a:t>：複数の単純な指示を組み合わせた複雑な指示への、</a:t>
+              <a:t>：複数の処理を組み合わせた指示への対応能力に着目し、複合的な指示で</a:t>
             </a:r>
             <a:r>
               <a:rPr kumimoji="1" lang="en-US" altLang="ja-JP" dirty="0"/>
@@ -6446,32 +6453,16 @@
             </a:r>
             <a:r>
               <a:rPr kumimoji="1" lang="ja-JP" altLang="en-US" dirty="0"/>
-              <a:t>の汎化能力を</a:t>
-            </a:r>
-            <a:r>
-              <a:rPr kumimoji="1" lang="en-US" altLang="ja-JP" dirty="0"/>
-              <a:t>SFT</a:t>
-            </a:r>
-            <a:r>
-              <a:rPr kumimoji="1" lang="ja-JP" altLang="en-US" dirty="0"/>
-              <a:t>によって検証した研究</a:t>
+              <a:t>を追加学習・評価した研究。</a:t>
             </a:r>
             <a:endParaRPr kumimoji="1" lang="en-US" altLang="ja-JP" dirty="0"/>
           </a:p>
           <a:p>
             <a:pPr lvl="1"/>
             <a:r>
-              <a:rPr kumimoji="1" lang="en-US" altLang="ja-JP" dirty="0"/>
-              <a:t>SFT</a:t>
-            </a:r>
-            <a:r>
-              <a:rPr kumimoji="1" lang="ja-JP" altLang="en-US" dirty="0"/>
-              <a:t>による学習によって、学習した単純な指示を組み合わせた複雑な指示への汎化が可能</a:t>
-            </a:r>
-            <a:endParaRPr kumimoji="1" lang="en-US" altLang="ja-JP" dirty="0"/>
-          </a:p>
-          <a:p>
-            <a:pPr lvl="1"/>
+              <a:rPr kumimoji="1" lang="ja-JP" altLang="en-US" dirty="0"/>
+              <a:t>複雑な指示で学習すると単純な指示にも対応できる一方、単純な指示から複雑な指示への対応は難しいことが示された。</a:t>
+            </a:r>
             <a:endParaRPr kumimoji="1" lang="en-US" altLang="ja-JP" dirty="0"/>
           </a:p>
           <a:p>
@@ -6485,28 +6476,25 @@
             </a:r>
             <a:r>
               <a:rPr kumimoji="1" lang="ja-JP" altLang="en-US" dirty="0"/>
-              <a:t>：複数の処理を組み合わせた問題を</a:t>
+              <a:t>：複数の処理が必要な指示に着目し、処理の順序を含むデータで</a:t>
             </a:r>
             <a:r>
               <a:rPr kumimoji="1" lang="en-US" altLang="ja-JP" dirty="0"/>
-              <a:t>SFT</a:t>
-            </a:r>
-            <a:r>
-              <a:rPr kumimoji="1" lang="ja-JP" altLang="en-US" dirty="0"/>
-              <a:t>し、学習時よりも長い処理の組み合わせへの汎化を検証した研究</a:t>
+              <a:t>LLM</a:t>
+            </a:r>
+            <a:r>
+              <a:rPr kumimoji="1" lang="ja-JP" altLang="en-US" dirty="0"/>
+              <a:t>を追加学習した研究。</a:t>
             </a:r>
             <a:endParaRPr kumimoji="1" lang="en-US" altLang="ja-JP" dirty="0"/>
           </a:p>
           <a:p>
             <a:pPr lvl="1"/>
             <a:r>
-              <a:rPr kumimoji="1" lang="en-US" altLang="ja-JP" dirty="0"/>
-              <a:t>SFT</a:t>
-            </a:r>
-            <a:r>
-              <a:rPr kumimoji="1" lang="ja-JP" altLang="en-US" dirty="0"/>
-              <a:t>による学習によって、学習時よりも長い処理の組み合わせへの汎化が可能</a:t>
-            </a:r>
+              <a:rPr kumimoji="1" lang="ja-JP" altLang="en-US" dirty="0"/>
+              <a:t>処理の順序を含むデータで追加学習することで、複雑な指示や未知の問題への対応能力が向上した。</a:t>
+            </a:r>
+            <a:endParaRPr kumimoji="1" lang="en-US" altLang="ja-JP" dirty="0"/>
           </a:p>
         </p:txBody>
       </p:sp>
@@ -9958,7 +9946,7 @@
             <a:pPr lvl="1"/>
             <a:r>
               <a:rPr lang="ja-JP" altLang="en-US" dirty="0"/>
-              <a:t>全部で</a:t>
+              <a:t>全体で</a:t>
             </a:r>
             <a:r>
               <a:rPr lang="en-US" altLang="ja-JP" dirty="0"/>
@@ -10020,7 +10008,7 @@
             <a:pPr lvl="1"/>
             <a:r>
               <a:rPr lang="ja-JP" altLang="en-US" dirty="0"/>
-              <a:t>全部の問題が</a:t>
+              <a:t>全ての問題が</a:t>
             </a:r>
             <a:r>
               <a:rPr lang="en-US" altLang="ja-JP" dirty="0"/>
@@ -10036,7 +10024,7 @@
             <a:pPr lvl="1"/>
             <a:r>
               <a:rPr lang="ja-JP" altLang="en-US" dirty="0"/>
-              <a:t>全部で</a:t>
+              <a:t>全体で</a:t>
             </a:r>
             <a:r>
               <a:rPr lang="en-US" altLang="ja-JP" dirty="0"/>
@@ -10806,35 +10794,22 @@
               <a:rPr lang="ja-JP" altLang="en-US" dirty="0"/>
               <a:t>問題解決能力の評価実験</a:t>
             </a:r>
-            <a:r>
-              <a:rPr lang="en-US" altLang="ja-JP" dirty="0">
-                <a:solidFill>
-                  <a:srgbClr val="FF0000"/>
-                </a:solidFill>
-              </a:rPr>
+            <a:br>
+              <a:rPr lang="en-US" altLang="ja-JP" dirty="0"/>
+            </a:br>
+            <a:r>
+              <a:rPr lang="en-US" altLang="ja-JP" dirty="0"/>
               <a:t>(</a:t>
             </a:r>
             <a:r>
-              <a:rPr lang="ja-JP" altLang="en-US" dirty="0">
-                <a:solidFill>
-                  <a:srgbClr val="FF0000"/>
-                </a:solidFill>
-              </a:rPr>
-              <a:t>やり直し中</a:t>
-            </a:r>
-            <a:r>
-              <a:rPr lang="en-US" altLang="ja-JP" dirty="0">
-                <a:solidFill>
-                  <a:srgbClr val="FF0000"/>
-                </a:solidFill>
-              </a:rPr>
+              <a:rPr lang="ja-JP" altLang="en-US" dirty="0"/>
+              <a:t>やり直しが必要</a:t>
+            </a:r>
+            <a:r>
+              <a:rPr lang="en-US" altLang="ja-JP" dirty="0"/>
               <a:t>)</a:t>
             </a:r>
-            <a:endParaRPr kumimoji="1" lang="ja-JP" altLang="en-US" dirty="0">
-              <a:solidFill>
-                <a:srgbClr val="FF0000"/>
-              </a:solidFill>
-            </a:endParaRPr>
+            <a:endParaRPr kumimoji="1" lang="ja-JP" altLang="en-US" dirty="0"/>
           </a:p>
         </p:txBody>
       </p:sp>
@@ -10915,14 +10890,14 @@
           <p:nvPr>
             <p:extLst>
               <p:ext uri="{D42A27DB-BD31-4B8C-83A1-F6EECF244321}">
-                <p14:modId xmlns:p14="http://schemas.microsoft.com/office/powerpoint/2010/main" val="2133641995"/>
+                <p14:modId xmlns:p14="http://schemas.microsoft.com/office/powerpoint/2010/main" val="3305267878"/>
               </p:ext>
             </p:extLst>
           </p:nvPr>
         </p:nvGraphicFramePr>
         <p:xfrm>
           <a:off x="838200" y="1583169"/>
-          <a:ext cx="10515600" cy="4351337"/>
+          <a:ext cx="10515600" cy="4351338"/>
         </p:xfrm>
         <a:graphic>
           <a:graphicData uri="http://schemas.openxmlformats.org/drawingml/2006/table">
@@ -10960,7 +10935,7 @@
                   </a:extLst>
                 </a:gridCol>
               </a:tblGrid>
-              <a:tr h="1811409">
+              <a:tr h="1450446">
                 <a:tc>
                   <a:txBody>
                     <a:bodyPr/>
@@ -11026,7 +11001,7 @@
                   </a:ext>
                 </a:extLst>
               </a:tr>
-              <a:tr h="1269964">
+              <a:tr h="1450446">
                 <a:tc>
                   <a:txBody>
                     <a:bodyPr/>
@@ -11167,7 +11142,7 @@
                   </a:ext>
                 </a:extLst>
               </a:tr>
-              <a:tr h="1269964">
+              <a:tr h="1450446">
                 <a:tc>
                   <a:txBody>
                     <a:bodyPr/>
@@ -14211,7 +14186,7 @@
           <p:nvPr>
             <p:extLst>
               <p:ext uri="{D42A27DB-BD31-4B8C-83A1-F6EECF244321}">
-                <p14:modId xmlns:p14="http://schemas.microsoft.com/office/powerpoint/2010/main" val="3813870932"/>
+                <p14:modId xmlns:p14="http://schemas.microsoft.com/office/powerpoint/2010/main" val="2017600749"/>
               </p:ext>
             </p:extLst>
           </p:nvPr>
@@ -14312,6 +14287,24 @@
                     <a:lstStyle/>
                     <a:p>
                       <a:pPr algn="ctr"/>
+                      <a:r>
+                        <a:rPr kumimoji="1" lang="ja-JP" altLang="en-US" dirty="0"/>
+                        <a:t>通常終了＋正解</a:t>
+                      </a:r>
+                    </a:p>
+                  </a:txBody>
+                  <a:tcPr anchor="ctr"/>
+                </a:tc>
+                <a:tc>
+                  <a:txBody>
+                    <a:bodyPr/>
+                    <a:lstStyle/>
+                    <a:p>
+                      <a:pPr algn="ctr"/>
+                      <a:r>
+                        <a:rPr kumimoji="1" lang="en-US" altLang="ja-JP" dirty="0"/>
+                        <a:t>254</a:t>
+                      </a:r>
                       <a:endParaRPr kumimoji="1" lang="ja-JP" altLang="en-US" dirty="0"/>
                     </a:p>
                   </a:txBody>
@@ -14323,17 +14316,10 @@
                     <a:lstStyle/>
                     <a:p>
                       <a:pPr algn="ctr"/>
-                      <a:endParaRPr kumimoji="1" lang="ja-JP" altLang="en-US" dirty="0"/>
-                    </a:p>
-                  </a:txBody>
-                  <a:tcPr anchor="ctr"/>
-                </a:tc>
-                <a:tc>
-                  <a:txBody>
-                    <a:bodyPr/>
-                    <a:lstStyle/>
-                    <a:p>
-                      <a:pPr algn="ctr"/>
+                      <a:r>
+                        <a:rPr kumimoji="1" lang="en-US" altLang="ja-JP" dirty="0"/>
+                        <a:t>38</a:t>
+                      </a:r>
                       <a:endParaRPr kumimoji="1" lang="ja-JP" altLang="en-US" dirty="0"/>
                     </a:p>
                   </a:txBody>
@@ -14352,6 +14338,24 @@
                     <a:lstStyle/>
                     <a:p>
                       <a:pPr algn="ctr"/>
+                      <a:r>
+                        <a:rPr kumimoji="1" lang="ja-JP" altLang="en-US" dirty="0"/>
+                        <a:t>通常終了＋不正解</a:t>
+                      </a:r>
+                    </a:p>
+                  </a:txBody>
+                  <a:tcPr anchor="ctr"/>
+                </a:tc>
+                <a:tc>
+                  <a:txBody>
+                    <a:bodyPr/>
+                    <a:lstStyle/>
+                    <a:p>
+                      <a:pPr algn="ctr"/>
+                      <a:r>
+                        <a:rPr kumimoji="1" lang="en-US" altLang="ja-JP" dirty="0"/>
+                        <a:t>3</a:t>
+                      </a:r>
                       <a:endParaRPr kumimoji="1" lang="ja-JP" altLang="en-US" dirty="0"/>
                     </a:p>
                   </a:txBody>
@@ -14363,17 +14367,10 @@
                     <a:lstStyle/>
                     <a:p>
                       <a:pPr algn="ctr"/>
-                      <a:endParaRPr kumimoji="1" lang="ja-JP" altLang="en-US" dirty="0"/>
-                    </a:p>
-                  </a:txBody>
-                  <a:tcPr anchor="ctr"/>
-                </a:tc>
-                <a:tc>
-                  <a:txBody>
-                    <a:bodyPr/>
-                    <a:lstStyle/>
-                    <a:p>
-                      <a:pPr algn="ctr"/>
+                      <a:r>
+                        <a:rPr kumimoji="1" lang="en-US" altLang="ja-JP" dirty="0"/>
+                        <a:t>1</a:t>
+                      </a:r>
                       <a:endParaRPr kumimoji="1" lang="ja-JP" altLang="en-US" dirty="0"/>
                     </a:p>
                   </a:txBody>
@@ -14394,7 +14391,7 @@
                       <a:pPr algn="ctr"/>
                       <a:r>
                         <a:rPr kumimoji="1" lang="ja-JP" altLang="en-US" dirty="0"/>
-                        <a:t>トークン上限に到達正解</a:t>
+                        <a:t>トークン上限に到達＋正解</a:t>
                       </a:r>
                     </a:p>
                   </a:txBody>
@@ -14408,7 +14405,7 @@
                       <a:pPr algn="ctr"/>
                       <a:r>
                         <a:rPr kumimoji="1" lang="en-US" altLang="ja-JP" dirty="0"/>
-                        <a:t>38</a:t>
+                        <a:t>13</a:t>
                       </a:r>
                       <a:endParaRPr kumimoji="1" lang="ja-JP" altLang="en-US" dirty="0"/>
                     </a:p>
@@ -14445,7 +14442,7 @@
                       <a:pPr algn="ctr"/>
                       <a:r>
                         <a:rPr kumimoji="1" lang="ja-JP" altLang="en-US" dirty="0"/>
-                        <a:t>不正解</a:t>
+                        <a:t>トークン上限に到達＋不正解</a:t>
                       </a:r>
                     </a:p>
                   </a:txBody>
@@ -14458,16 +14455,8 @@
                     <a:p>
                       <a:pPr algn="ctr"/>
                       <a:r>
-                        <a:rPr kumimoji="1" lang="en-US" altLang="ja-JP" sz="1800" b="0" i="0" kern="1200" dirty="0">
-                          <a:solidFill>
-                            <a:schemeClr val="dk1"/>
-                          </a:solidFill>
-                          <a:effectLst/>
-                          <a:latin typeface="+mn-lt"/>
-                          <a:ea typeface="+mn-ea"/>
-                          <a:cs typeface="+mn-cs"/>
-                        </a:rPr>
-                        <a:t>1</a:t>
+                        <a:rPr kumimoji="1" lang="en-US" altLang="ja-JP" dirty="0"/>
+                        <a:t>430</a:t>
                       </a:r>
                       <a:endParaRPr kumimoji="1" lang="ja-JP" altLang="en-US" dirty="0"/>
                     </a:p>
@@ -14552,7 +14541,7 @@
           <a:p>
             <a:r>
               <a:rPr lang="ja-JP" altLang="en-US" dirty="0"/>
-              <a:t>分析できること</a:t>
+              <a:t>分析と考察</a:t>
             </a:r>
             <a:endParaRPr kumimoji="1" lang="ja-JP" altLang="en-US" dirty="0"/>
           </a:p>
@@ -14586,22 +14575,6 @@
             <a:endParaRPr kumimoji="1" lang="en-US" altLang="ja-JP" dirty="0"/>
           </a:p>
           <a:p>
-            <a:r>
-              <a:rPr kumimoji="1" lang="ja-JP" altLang="en-US" dirty="0"/>
-              <a:t>推論過程を確認</a:t>
-            </a:r>
-            <a:endParaRPr kumimoji="1" lang="en-US" altLang="ja-JP" dirty="0"/>
-          </a:p>
-          <a:p>
-            <a:pPr lvl="1"/>
-            <a:r>
-              <a:rPr lang="ja-JP" altLang="en-US" dirty="0"/>
-              <a:t>トークンの上限に到達した</a:t>
-            </a:r>
-            <a:r>
-              <a:rPr kumimoji="1" lang="ja-JP" altLang="en-US" dirty="0"/>
-              <a:t>事例では、複数の仮説を繰り返し検討し、ルールを確定できないまま推論が長大化する傾向が見られた。</a:t>
-            </a:r>
             <a:endParaRPr kumimoji="1" lang="en-US" altLang="ja-JP" dirty="0"/>
           </a:p>
           <a:p>
@@ -14733,13 +14706,35 @@
         </p:nvSpPr>
         <p:spPr>
           <a:xfrm>
-            <a:off x="838200" y="1825625"/>
+            <a:off x="838200" y="1374559"/>
             <a:ext cx="10515600" cy="4108881"/>
           </a:xfrm>
         </p:spPr>
         <p:txBody>
           <a:bodyPr/>
           <a:lstStyle/>
+          <a:p>
+            <a:r>
+              <a:rPr lang="ja-JP" altLang="en-US" dirty="0"/>
+              <a:t>答えのみを学習させることで、テストデータその</a:t>
+            </a:r>
+            <a:r>
+              <a:rPr lang="en-US" altLang="ja-JP" dirty="0"/>
+              <a:t>1</a:t>
+            </a:r>
+            <a:r>
+              <a:rPr lang="ja-JP" altLang="en-US" dirty="0"/>
+              <a:t>だけでなくテストデータその</a:t>
+            </a:r>
+            <a:r>
+              <a:rPr lang="en-US" altLang="ja-JP" dirty="0"/>
+              <a:t>2</a:t>
+            </a:r>
+            <a:r>
+              <a:rPr lang="ja-JP" altLang="en-US" dirty="0"/>
+              <a:t>の正解率も大きく向上した</a:t>
+            </a:r>
+          </a:p>
           <a:p>
             <a:endParaRPr kumimoji="1" lang="ja-JP" altLang="en-US" dirty="0"/>
           </a:p>
@@ -14774,12 +14769,83 @@
           </a:p>
         </p:txBody>
       </p:sp>
+      <p:sp>
+        <p:nvSpPr>
+          <p:cNvPr id="7" name="テキスト ボックス 6">
+            <a:extLst>
+              <a:ext uri="{FF2B5EF4-FFF2-40B4-BE49-F238E27FC236}">
+                <a16:creationId xmlns:a16="http://schemas.microsoft.com/office/drawing/2014/main" id="{B16EF27F-99F3-788A-BE6D-AC717960A93F}"/>
+              </a:ext>
+            </a:extLst>
+          </p:cNvPr>
+          <p:cNvSpPr txBox="1"/>
+          <p:nvPr/>
+        </p:nvSpPr>
+        <p:spPr>
+          <a:xfrm>
+            <a:off x="838200" y="6169709"/>
+            <a:ext cx="10017999" cy="646331"/>
+          </a:xfrm>
+          <a:prstGeom prst="rect">
+            <a:avLst/>
+          </a:prstGeom>
+          <a:noFill/>
+        </p:spPr>
+        <p:txBody>
+          <a:bodyPr wrap="square">
+            <a:spAutoFit/>
+          </a:bodyPr>
+          <a:lstStyle/>
+          <a:p>
+            <a:r>
+              <a:rPr kumimoji="1" lang="ja-JP" altLang="en-US" sz="1800" dirty="0"/>
+              <a:t>テストデータその</a:t>
+            </a:r>
+            <a:r>
+              <a:rPr kumimoji="1" lang="en-US" altLang="ja-JP" sz="1800" dirty="0"/>
+              <a:t>1</a:t>
+            </a:r>
+            <a:r>
+              <a:rPr kumimoji="1" lang="ja-JP" altLang="en-US" sz="1800" dirty="0"/>
+              <a:t>：</a:t>
+            </a:r>
+            <a:r>
+              <a:rPr lang="ja-JP" altLang="en-US" sz="1800" dirty="0"/>
+              <a:t>訓練用のデータの問題と同じルール</a:t>
+            </a:r>
+            <a:endParaRPr lang="en-US" altLang="ja-JP" sz="1800" dirty="0"/>
+          </a:p>
+          <a:p>
+            <a:r>
+              <a:rPr lang="ja-JP" altLang="en-US" dirty="0"/>
+              <a:t>テストデータその</a:t>
+            </a:r>
+            <a:r>
+              <a:rPr lang="en-US" altLang="ja-JP" dirty="0"/>
+              <a:t>2</a:t>
+            </a:r>
+            <a:r>
+              <a:rPr lang="ja-JP" altLang="en-US" dirty="0"/>
+              <a:t>：</a:t>
+            </a:r>
+            <a:r>
+              <a:rPr lang="ja-JP" altLang="ja-JP" dirty="0"/>
+              <a:t>処理単体としては同じだけど</a:t>
+            </a:r>
+            <a:r>
+              <a:rPr lang="ja-JP" altLang="en-US" dirty="0"/>
+              <a:t>訓練用のデータでは出なかった組み合わせ</a:t>
+            </a:r>
+            <a:endParaRPr lang="en-US" altLang="ja-JP" dirty="0"/>
+          </a:p>
+        </p:txBody>
+      </p:sp>
       <p:graphicFrame>
         <p:nvGraphicFramePr>
-          <p:cNvPr id="6" name="表 5">
-            <a:extLst>
-              <a:ext uri="{FF2B5EF4-FFF2-40B4-BE49-F238E27FC236}">
-                <a16:creationId xmlns:a16="http://schemas.microsoft.com/office/drawing/2014/main" id="{3A78D084-DC3E-2D90-A751-9C56E958BFE0}"/>
+          <p:cNvPr id="8" name="表 7">
+            <a:extLst>
+              <a:ext uri="{FF2B5EF4-FFF2-40B4-BE49-F238E27FC236}">
+                <a16:creationId xmlns:a16="http://schemas.microsoft.com/office/drawing/2014/main" id="{740E485A-FD0A-755C-CA11-6D70F92B8071}"/>
               </a:ext>
             </a:extLst>
           </p:cNvPr>
@@ -14789,14 +14855,14 @@
           <p:nvPr>
             <p:extLst>
               <p:ext uri="{D42A27DB-BD31-4B8C-83A1-F6EECF244321}">
-                <p14:modId xmlns:p14="http://schemas.microsoft.com/office/powerpoint/2010/main" val="2982130330"/>
+                <p14:modId xmlns:p14="http://schemas.microsoft.com/office/powerpoint/2010/main" val="4204827249"/>
               </p:ext>
             </p:extLst>
           </p:nvPr>
         </p:nvGraphicFramePr>
         <p:xfrm>
-          <a:off x="838200" y="1583169"/>
-          <a:ext cx="10515600" cy="4351338"/>
+          <a:off x="838200" y="2255520"/>
+          <a:ext cx="10515600" cy="3914187"/>
         </p:xfrm>
         <a:graphic>
           <a:graphicData uri="http://schemas.openxmlformats.org/drawingml/2006/table">
@@ -14834,7 +14900,7 @@
                   </a:extLst>
                 </a:gridCol>
               </a:tblGrid>
-              <a:tr h="1450446">
+              <a:tr h="1304729">
                 <a:tc>
                   <a:txBody>
                     <a:bodyPr/>
@@ -14900,7 +14966,7 @@
                   </a:ext>
                 </a:extLst>
               </a:tr>
-              <a:tr h="1450446">
+              <a:tr h="1304729">
                 <a:tc>
                   <a:txBody>
                     <a:bodyPr/>
@@ -14943,18 +15009,14 @@
                       <a:pPr algn="ctr"/>
                       <a:r>
                         <a:rPr kumimoji="1" lang="en-US" altLang="ja-JP" sz="2100" dirty="0"/>
-                        <a:t>277/680</a:t>
+                        <a:t>267/700</a:t>
                       </a:r>
                     </a:p>
                     <a:p>
                       <a:pPr algn="ctr"/>
                       <a:r>
-                        <a:rPr kumimoji="1" lang="ja-JP" altLang="en-US" sz="2100" dirty="0"/>
-                        <a:t>約</a:t>
-                      </a:r>
-                      <a:r>
                         <a:rPr kumimoji="1" lang="en-US" altLang="ja-JP" sz="2100" dirty="0"/>
-                        <a:t>40</a:t>
+                        <a:t>38.1</a:t>
                       </a:r>
                       <a:r>
                         <a:rPr kumimoji="1" lang="ja-JP" altLang="en-US" sz="2100" dirty="0"/>
@@ -14971,22 +15033,30 @@
                     <a:p>
                       <a:pPr algn="ctr"/>
                       <a:r>
-                        <a:rPr kumimoji="1" lang="en-US" altLang="ja-JP" sz="2100" dirty="0"/>
-                        <a:t>484/680</a:t>
+                        <a:rPr kumimoji="1" lang="en-US" altLang="ja-JP" sz="2100" dirty="0">
+                          <a:solidFill>
+                            <a:srgbClr val="FF0000"/>
+                          </a:solidFill>
+                        </a:rPr>
+                        <a:t>469/700</a:t>
                       </a:r>
                     </a:p>
                     <a:p>
                       <a:pPr algn="ctr"/>
                       <a:r>
-                        <a:rPr kumimoji="1" lang="ja-JP" altLang="en-US" sz="2100" dirty="0"/>
-                        <a:t>約</a:t>
+                        <a:rPr kumimoji="1" lang="en-US" altLang="ja-JP" sz="2100" dirty="0">
+                          <a:solidFill>
+                            <a:srgbClr val="FF0000"/>
+                          </a:solidFill>
+                        </a:rPr>
+                        <a:t>67</a:t>
                       </a:r>
                       <a:r>
-                        <a:rPr kumimoji="1" lang="en-US" altLang="ja-JP" sz="2100" dirty="0"/>
-                        <a:t>71</a:t>
-                      </a:r>
-                      <a:r>
-                        <a:rPr kumimoji="1" lang="ja-JP" altLang="en-US" sz="2100" dirty="0"/>
+                        <a:rPr kumimoji="1" lang="ja-JP" altLang="en-US" sz="2100" dirty="0">
+                          <a:solidFill>
+                            <a:srgbClr val="FF0000"/>
+                          </a:solidFill>
+                        </a:rPr>
                         <a:t>％</a:t>
                       </a:r>
                     </a:p>
@@ -15000,7 +15070,7 @@
                     <a:p>
                       <a:pPr algn="ctr"/>
                       <a:r>
-                        <a:rPr kumimoji="1" lang="ja-JP" altLang="ja-JP" sz="2100" b="0" i="0" kern="1200" dirty="0">
+                        <a:rPr kumimoji="1" lang="en-US" altLang="ja-JP" sz="2100" b="0" i="0" kern="1200" dirty="0">
                           <a:solidFill>
                             <a:schemeClr val="dk1"/>
                           </a:solidFill>
@@ -15009,8 +15079,11 @@
                           <a:ea typeface="+mn-ea"/>
                           <a:cs typeface="+mn-cs"/>
                         </a:rPr>
-                        <a:t>548</a:t>
+                        <a:t>563/700</a:t>
                       </a:r>
+                    </a:p>
+                    <a:p>
+                      <a:pPr algn="ctr"/>
                       <a:r>
                         <a:rPr kumimoji="1" lang="en-US" altLang="ja-JP" sz="2100" b="0" i="0" kern="1200" dirty="0">
                           <a:solidFill>
@@ -15021,34 +15094,7 @@
                           <a:ea typeface="+mn-ea"/>
                           <a:cs typeface="+mn-cs"/>
                         </a:rPr>
-                        <a:t>/680</a:t>
-                      </a:r>
-                    </a:p>
-                    <a:p>
-                      <a:pPr algn="ctr"/>
-                      <a:r>
-                        <a:rPr kumimoji="1" lang="ja-JP" altLang="en-US" sz="2100" b="0" i="0" kern="1200" dirty="0">
-                          <a:solidFill>
-                            <a:schemeClr val="dk1"/>
-                          </a:solidFill>
-                          <a:effectLst/>
-                          <a:latin typeface="+mn-lt"/>
-                          <a:ea typeface="+mn-ea"/>
-                          <a:cs typeface="+mn-cs"/>
-                        </a:rPr>
-                        <a:t>約</a:t>
-                      </a:r>
-                      <a:r>
-                        <a:rPr kumimoji="1" lang="en-US" altLang="ja-JP" sz="2100" b="0" i="0" kern="1200" dirty="0">
-                          <a:solidFill>
-                            <a:schemeClr val="dk1"/>
-                          </a:solidFill>
-                          <a:effectLst/>
-                          <a:latin typeface="+mn-lt"/>
-                          <a:ea typeface="+mn-ea"/>
-                          <a:cs typeface="+mn-cs"/>
-                        </a:rPr>
-                        <a:t>80</a:t>
+                        <a:t>80.4</a:t>
                       </a:r>
                       <a:r>
                         <a:rPr kumimoji="1" lang="ja-JP" altLang="en-US" sz="2100" b="0" i="0" kern="1200" dirty="0">
@@ -15073,7 +15119,7 @@
                   </a:ext>
                 </a:extLst>
               </a:tr>
-              <a:tr h="1450446">
+              <a:tr h="1304729">
                 <a:tc>
                   <a:txBody>
                     <a:bodyPr/>
@@ -15115,31 +15161,15 @@
                     <a:p>
                       <a:pPr algn="ctr"/>
                       <a:r>
-                        <a:rPr kumimoji="1" lang="ja-JP" altLang="ja-JP" sz="2100" b="0" i="0" kern="1200" dirty="0">
-                          <a:solidFill>
-                            <a:schemeClr val="dk1"/>
-                          </a:solidFill>
-                          <a:effectLst/>
-                          <a:latin typeface="+mn-lt"/>
-                          <a:ea typeface="+mn-ea"/>
-                          <a:cs typeface="+mn-cs"/>
-                        </a:rPr>
-                        <a:t>67</a:t>
-                      </a:r>
-                      <a:r>
                         <a:rPr kumimoji="1" lang="en-US" altLang="ja-JP" sz="2100" dirty="0"/>
-                        <a:t>/480</a:t>
+                        <a:t>44/450</a:t>
                       </a:r>
                     </a:p>
                     <a:p>
                       <a:pPr algn="ctr"/>
                       <a:r>
-                        <a:rPr kumimoji="1" lang="ja-JP" altLang="en-US" sz="2100" dirty="0"/>
-                        <a:t>約</a:t>
-                      </a:r>
-                      <a:r>
                         <a:rPr kumimoji="1" lang="en-US" altLang="ja-JP" sz="2100" dirty="0"/>
-                        <a:t>13</a:t>
+                        <a:t>9.7</a:t>
                       </a:r>
                       <a:r>
                         <a:rPr kumimoji="1" lang="ja-JP" altLang="en-US" sz="2100" dirty="0"/>
@@ -15156,22 +15186,30 @@
                     <a:p>
                       <a:pPr algn="ctr"/>
                       <a:r>
-                        <a:rPr kumimoji="1" lang="en-US" altLang="ja-JP" sz="2100" dirty="0"/>
-                        <a:t>201/480</a:t>
+                        <a:rPr kumimoji="1" lang="en-US" altLang="ja-JP" sz="2100" dirty="0">
+                          <a:solidFill>
+                            <a:srgbClr val="FF0000"/>
+                          </a:solidFill>
+                        </a:rPr>
+                        <a:t>179/450</a:t>
                       </a:r>
                     </a:p>
                     <a:p>
                       <a:pPr algn="ctr"/>
                       <a:r>
-                        <a:rPr kumimoji="1" lang="ja-JP" altLang="en-US" sz="2100" dirty="0"/>
-                        <a:t>約</a:t>
+                        <a:rPr kumimoji="1" lang="en-US" altLang="ja-JP" sz="2100" dirty="0">
+                          <a:solidFill>
+                            <a:srgbClr val="FF0000"/>
+                          </a:solidFill>
+                        </a:rPr>
+                        <a:t>39.7</a:t>
                       </a:r>
                       <a:r>
-                        <a:rPr kumimoji="1" lang="en-US" altLang="ja-JP" sz="2100" dirty="0"/>
-                        <a:t>41</a:t>
-                      </a:r>
-                      <a:r>
-                        <a:rPr kumimoji="1" lang="ja-JP" altLang="en-US" sz="2100" dirty="0"/>
+                        <a:rPr kumimoji="1" lang="ja-JP" altLang="en-US" sz="2100" dirty="0">
+                          <a:solidFill>
+                            <a:srgbClr val="FF0000"/>
+                          </a:solidFill>
+                        </a:rPr>
                         <a:t>％</a:t>
                       </a:r>
                     </a:p>
@@ -15185,7 +15223,7 @@
                     <a:p>
                       <a:pPr algn="ctr"/>
                       <a:r>
-                        <a:rPr kumimoji="1" lang="ja-JP" altLang="ja-JP" sz="2100" b="0" i="0" kern="1200" dirty="0">
+                        <a:rPr kumimoji="1" lang="en-US" altLang="ja-JP" sz="2100" b="0" i="0" kern="1200" dirty="0">
                           <a:solidFill>
                             <a:schemeClr val="dk1"/>
                           </a:solidFill>
@@ -15194,8 +15232,11 @@
                           <a:ea typeface="+mn-ea"/>
                           <a:cs typeface="+mn-cs"/>
                         </a:rPr>
-                        <a:t>98</a:t>
+                        <a:t>80/450</a:t>
                       </a:r>
+                    </a:p>
+                    <a:p>
+                      <a:pPr algn="ctr"/>
                       <a:r>
                         <a:rPr kumimoji="1" lang="en-US" altLang="ja-JP" sz="2100" b="0" i="0" kern="1200" dirty="0">
                           <a:solidFill>
@@ -15206,34 +15247,7 @@
                           <a:ea typeface="+mn-ea"/>
                           <a:cs typeface="+mn-cs"/>
                         </a:rPr>
-                        <a:t>/480</a:t>
-                      </a:r>
-                    </a:p>
-                    <a:p>
-                      <a:pPr algn="ctr"/>
-                      <a:r>
-                        <a:rPr kumimoji="1" lang="ja-JP" altLang="en-US" sz="2100" b="0" i="0" kern="1200" dirty="0">
-                          <a:solidFill>
-                            <a:schemeClr val="dk1"/>
-                          </a:solidFill>
-                          <a:effectLst/>
-                          <a:latin typeface="+mn-lt"/>
-                          <a:ea typeface="+mn-ea"/>
-                          <a:cs typeface="+mn-cs"/>
-                        </a:rPr>
-                        <a:t>約</a:t>
-                      </a:r>
-                      <a:r>
-                        <a:rPr kumimoji="1" lang="en-US" altLang="ja-JP" sz="2100" b="0" i="0" kern="1200" dirty="0">
-                          <a:solidFill>
-                            <a:schemeClr val="dk1"/>
-                          </a:solidFill>
-                          <a:effectLst/>
-                          <a:latin typeface="+mn-lt"/>
-                          <a:ea typeface="+mn-ea"/>
-                          <a:cs typeface="+mn-cs"/>
-                        </a:rPr>
-                        <a:t>20</a:t>
+                        <a:t>17.7</a:t>
                       </a:r>
                       <a:r>
                         <a:rPr kumimoji="1" lang="ja-JP" altLang="en-US" sz="2100" b="0" i="0" kern="1200" dirty="0">
@@ -15262,77 +15276,6 @@
           </a:graphicData>
         </a:graphic>
       </p:graphicFrame>
-      <p:sp>
-        <p:nvSpPr>
-          <p:cNvPr id="7" name="テキスト ボックス 6">
-            <a:extLst>
-              <a:ext uri="{FF2B5EF4-FFF2-40B4-BE49-F238E27FC236}">
-                <a16:creationId xmlns:a16="http://schemas.microsoft.com/office/drawing/2014/main" id="{B16EF27F-99F3-788A-BE6D-AC717960A93F}"/>
-              </a:ext>
-            </a:extLst>
-          </p:cNvPr>
-          <p:cNvSpPr txBox="1"/>
-          <p:nvPr/>
-        </p:nvSpPr>
-        <p:spPr>
-          <a:xfrm>
-            <a:off x="838200" y="6169709"/>
-            <a:ext cx="10017999" cy="646331"/>
-          </a:xfrm>
-          <a:prstGeom prst="rect">
-            <a:avLst/>
-          </a:prstGeom>
-          <a:noFill/>
-        </p:spPr>
-        <p:txBody>
-          <a:bodyPr wrap="square">
-            <a:spAutoFit/>
-          </a:bodyPr>
-          <a:lstStyle/>
-          <a:p>
-            <a:r>
-              <a:rPr kumimoji="1" lang="ja-JP" altLang="en-US" sz="1800" dirty="0"/>
-              <a:t>テストデータその</a:t>
-            </a:r>
-            <a:r>
-              <a:rPr kumimoji="1" lang="en-US" altLang="ja-JP" sz="1800" dirty="0"/>
-              <a:t>1</a:t>
-            </a:r>
-            <a:r>
-              <a:rPr kumimoji="1" lang="ja-JP" altLang="en-US" sz="1800" dirty="0"/>
-              <a:t>：</a:t>
-            </a:r>
-            <a:r>
-              <a:rPr lang="ja-JP" altLang="en-US" sz="1800" dirty="0"/>
-              <a:t>訓練用のデータの問題と同じルール</a:t>
-            </a:r>
-            <a:endParaRPr lang="en-US" altLang="ja-JP" sz="1800" dirty="0"/>
-          </a:p>
-          <a:p>
-            <a:r>
-              <a:rPr lang="ja-JP" altLang="en-US" dirty="0"/>
-              <a:t>テストデータその</a:t>
-            </a:r>
-            <a:r>
-              <a:rPr lang="en-US" altLang="ja-JP" dirty="0"/>
-              <a:t>2</a:t>
-            </a:r>
-            <a:r>
-              <a:rPr lang="ja-JP" altLang="en-US" dirty="0"/>
-              <a:t>：</a:t>
-            </a:r>
-            <a:r>
-              <a:rPr lang="ja-JP" altLang="ja-JP" dirty="0"/>
-              <a:t>処理単体としては同じだけど</a:t>
-            </a:r>
-            <a:r>
-              <a:rPr lang="ja-JP" altLang="en-US" dirty="0"/>
-              <a:t>訓練用のデータでは出なかった組み合わせ</a:t>
-            </a:r>
-            <a:endParaRPr lang="en-US" altLang="ja-JP" dirty="0"/>
-          </a:p>
-        </p:txBody>
-      </p:sp>
     </p:spTree>
     <p:extLst>
       <p:ext uri="{BB962C8B-B14F-4D97-AF65-F5344CB8AC3E}">
@@ -15368,7 +15311,7 @@
           <p:cNvPr id="2" name="タイトル 1">
             <a:extLst>
               <a:ext uri="{FF2B5EF4-FFF2-40B4-BE49-F238E27FC236}">
-                <a16:creationId xmlns:a16="http://schemas.microsoft.com/office/drawing/2014/main" id="{CD563CB8-538E-9EF2-043E-56B0C385C19E}"/>
+                <a16:creationId xmlns:a16="http://schemas.microsoft.com/office/drawing/2014/main" id="{A1A8955F-0692-9D88-021C-3573EB69FC6C}"/>
               </a:ext>
             </a:extLst>
           </p:cNvPr>
@@ -15381,65 +15324,98 @@
         </p:nvSpPr>
         <p:spPr/>
         <p:txBody>
+          <a:bodyPr>
+            <a:normAutofit/>
+          </a:bodyPr>
+          <a:lstStyle/>
+          <a:p>
+            <a:r>
+              <a:rPr lang="ja-JP" altLang="en-US" dirty="0"/>
+              <a:t>答え＋処理過程の</a:t>
+            </a:r>
+            <a:r>
+              <a:rPr lang="en-US" altLang="ja-JP" dirty="0"/>
+              <a:t>SFT</a:t>
+            </a:r>
+            <a:r>
+              <a:rPr lang="ja-JP" altLang="en-US" dirty="0"/>
+              <a:t>の分析</a:t>
+            </a:r>
+            <a:br>
+              <a:rPr lang="en-US" altLang="ja-JP" dirty="0"/>
+            </a:br>
+            <a:r>
+              <a:rPr lang="ja-JP" altLang="en-US" dirty="0"/>
+              <a:t>珍しい事例</a:t>
+            </a:r>
+            <a:endParaRPr kumimoji="1" lang="ja-JP" altLang="en-US" dirty="0"/>
+          </a:p>
+        </p:txBody>
+      </p:sp>
+      <p:sp>
+        <p:nvSpPr>
+          <p:cNvPr id="3" name="コンテンツ プレースホルダー 2">
+            <a:extLst>
+              <a:ext uri="{FF2B5EF4-FFF2-40B4-BE49-F238E27FC236}">
+                <a16:creationId xmlns:a16="http://schemas.microsoft.com/office/drawing/2014/main" id="{48F8B874-D2E5-BBC3-D5EB-7E35884B07FD}"/>
+              </a:ext>
+            </a:extLst>
+          </p:cNvPr>
+          <p:cNvSpPr>
+            <a:spLocks noGrp="1"/>
+          </p:cNvSpPr>
+          <p:nvPr>
+            <p:ph idx="1"/>
+          </p:nvPr>
+        </p:nvSpPr>
+        <p:spPr/>
+        <p:txBody>
           <a:bodyPr/>
           <a:lstStyle/>
           <a:p>
             <a:r>
-              <a:rPr kumimoji="1" lang="ja-JP" altLang="en-US" dirty="0"/>
-              <a:t>分析できること</a:t>
-            </a:r>
-          </a:p>
-        </p:txBody>
-      </p:sp>
-      <p:sp>
-        <p:nvSpPr>
-          <p:cNvPr id="3" name="コンテンツ プレースホルダー 2">
-            <a:extLst>
-              <a:ext uri="{FF2B5EF4-FFF2-40B4-BE49-F238E27FC236}">
-                <a16:creationId xmlns:a16="http://schemas.microsoft.com/office/drawing/2014/main" id="{C5A069E9-49F2-A50A-C2B1-0932A202A91D}"/>
-              </a:ext>
-            </a:extLst>
-          </p:cNvPr>
-          <p:cNvSpPr>
-            <a:spLocks noGrp="1"/>
-          </p:cNvSpPr>
-          <p:nvPr>
-            <p:ph idx="1"/>
-          </p:nvPr>
-        </p:nvSpPr>
-        <p:spPr/>
-        <p:txBody>
-          <a:bodyPr/>
-          <a:lstStyle/>
-          <a:p>
-            <a:r>
-              <a:rPr kumimoji="1" lang="ja-JP" altLang="en-US" dirty="0"/>
-              <a:t>答えのみを学習させることで、</a:t>
-            </a:r>
-            <a:r>
               <a:rPr lang="ja-JP" altLang="en-US" dirty="0"/>
-              <a:t>テストデータその</a:t>
+              <a:t>処理の順序が関係ない問題の内、</a:t>
             </a:r>
             <a:r>
               <a:rPr lang="en-US" altLang="ja-JP" dirty="0"/>
-              <a:t>1</a:t>
-            </a:r>
-            <a:r>
-              <a:rPr kumimoji="1" lang="ja-JP" altLang="en-US" dirty="0"/>
-              <a:t>だけでなく</a:t>
+              <a:t>7</a:t>
             </a:r>
             <a:r>
               <a:rPr lang="ja-JP" altLang="en-US" dirty="0"/>
-              <a:t>テストデータその</a:t>
-            </a:r>
+              <a:t>例だけ学習時に教えていない順序を適用</a:t>
+            </a:r>
+            <a:endParaRPr kumimoji="1" lang="en-US" altLang="ja-JP" dirty="0"/>
+          </a:p>
+          <a:p>
+            <a:pPr lvl="1"/>
             <a:r>
               <a:rPr lang="en-US" altLang="ja-JP" dirty="0"/>
-              <a:t>2</a:t>
-            </a:r>
-            <a:r>
-              <a:rPr kumimoji="1" lang="ja-JP" altLang="en-US" dirty="0"/>
-              <a:t>の正解率も大きく向上した</a:t>
-            </a:r>
+              <a:t>7</a:t>
+            </a:r>
+            <a:r>
+              <a:rPr lang="ja-JP" altLang="en-US" dirty="0"/>
+              <a:t>例中</a:t>
+            </a:r>
+            <a:r>
+              <a:rPr lang="en-US" altLang="ja-JP" dirty="0"/>
+              <a:t>6</a:t>
+            </a:r>
+            <a:r>
+              <a:rPr lang="ja-JP" altLang="en-US" dirty="0"/>
+              <a:t>例が最終的な回答まで合っていた。</a:t>
+            </a:r>
+            <a:endParaRPr lang="en-US" altLang="ja-JP" dirty="0"/>
+          </a:p>
+          <a:p>
+            <a:endParaRPr lang="en-US" altLang="ja-JP" dirty="0"/>
+          </a:p>
+          <a:p>
+            <a:r>
+              <a:rPr lang="ja-JP" altLang="ja-JP" dirty="0"/>
+              <a:t>学習時に与えられた処理順序の単純な再現だけでは説明できない出力が確認された</a:t>
+            </a:r>
+            <a:endParaRPr lang="en-US" altLang="ja-JP" dirty="0"/>
           </a:p>
         </p:txBody>
       </p:sp>
@@ -15448,7 +15424,7 @@
           <p:cNvPr id="4" name="スライド番号プレースホルダー 3">
             <a:extLst>
               <a:ext uri="{FF2B5EF4-FFF2-40B4-BE49-F238E27FC236}">
-                <a16:creationId xmlns:a16="http://schemas.microsoft.com/office/drawing/2014/main" id="{0CF76C9C-540E-E99B-E311-B25D00ED33DB}"/>
+                <a16:creationId xmlns:a16="http://schemas.microsoft.com/office/drawing/2014/main" id="{76BB1565-D6C7-D64C-7FA1-C47E6995DED9}"/>
               </a:ext>
             </a:extLst>
           </p:cNvPr>
@@ -15475,7 +15451,7 @@
     </p:spTree>
     <p:extLst>
       <p:ext uri="{BB962C8B-B14F-4D97-AF65-F5344CB8AC3E}">
-        <p14:creationId xmlns:p14="http://schemas.microsoft.com/office/powerpoint/2010/main" val="3865649838"/>
+        <p14:creationId xmlns:p14="http://schemas.microsoft.com/office/powerpoint/2010/main" val="2474344463"/>
       </p:ext>
     </p:extLst>
   </p:cSld>
@@ -15507,7 +15483,7 @@
           <p:cNvPr id="2" name="タイトル 1">
             <a:extLst>
               <a:ext uri="{FF2B5EF4-FFF2-40B4-BE49-F238E27FC236}">
-                <a16:creationId xmlns:a16="http://schemas.microsoft.com/office/drawing/2014/main" id="{A1A8955F-0692-9D88-021C-3573EB69FC6C}"/>
+                <a16:creationId xmlns:a16="http://schemas.microsoft.com/office/drawing/2014/main" id="{12CDF5E8-C1FA-5CA7-FC1E-00606DD71FAD}"/>
               </a:ext>
             </a:extLst>
           </p:cNvPr>
@@ -15520,9 +15496,7 @@
         </p:nvSpPr>
         <p:spPr/>
         <p:txBody>
-          <a:bodyPr>
-            <a:normAutofit/>
-          </a:bodyPr>
+          <a:bodyPr/>
           <a:lstStyle/>
           <a:p>
             <a:r>
@@ -15541,86 +15515,72 @@
               <a:rPr lang="en-US" altLang="ja-JP" dirty="0"/>
             </a:br>
             <a:r>
+              <a:rPr lang="ja-JP" altLang="en-US" dirty="0"/>
+              <a:t>珍しい事例</a:t>
+            </a:r>
+            <a:endParaRPr kumimoji="1" lang="ja-JP" altLang="en-US" dirty="0"/>
+          </a:p>
+        </p:txBody>
+      </p:sp>
+      <p:sp>
+        <p:nvSpPr>
+          <p:cNvPr id="3" name="コンテンツ プレースホルダー 2">
+            <a:extLst>
+              <a:ext uri="{FF2B5EF4-FFF2-40B4-BE49-F238E27FC236}">
+                <a16:creationId xmlns:a16="http://schemas.microsoft.com/office/drawing/2014/main" id="{E2EC9FD6-FE96-F5EF-0F7F-7DCFB2009033}"/>
+              </a:ext>
+            </a:extLst>
+          </p:cNvPr>
+          <p:cNvSpPr>
+            <a:spLocks noGrp="1"/>
+          </p:cNvSpPr>
+          <p:nvPr>
+            <p:ph idx="1"/>
+          </p:nvPr>
+        </p:nvSpPr>
+        <p:spPr/>
+        <p:txBody>
+          <a:bodyPr/>
+          <a:lstStyle/>
+          <a:p>
+            <a:r>
               <a:rPr lang="ja-JP" altLang="ja-JP" dirty="0"/>
-              <a:t>学習時に提示していない処理順序の適用</a:t>
-            </a:r>
+              <a:t>問題を解くために、モデルが学習データに存在しない処理を自発的に生成してしまう</a:t>
+            </a:r>
+            <a:endParaRPr lang="en-US" altLang="ja-JP" dirty="0"/>
+          </a:p>
+          <a:p>
+            <a:endParaRPr kumimoji="1" lang="en-US" altLang="ja-JP" dirty="0"/>
+          </a:p>
+          <a:p>
+            <a:r>
+              <a:rPr lang="ja-JP" altLang="en-US" dirty="0"/>
+              <a:t>処理単体として学習データではそもそも教えてない処理を生成してるものが</a:t>
+            </a:r>
+            <a:r>
+              <a:rPr lang="en-US" altLang="ja-JP" dirty="0"/>
+              <a:t>2</a:t>
+            </a:r>
+            <a:r>
+              <a:rPr lang="ja-JP" altLang="en-US" dirty="0"/>
+              <a:t>例存在した</a:t>
+            </a:r>
+            <a:endParaRPr lang="en-US" altLang="ja-JP" dirty="0"/>
+          </a:p>
+          <a:p>
+            <a:endParaRPr lang="en-US" altLang="ja-JP" dirty="0"/>
+          </a:p>
+          <a:p>
             <a:endParaRPr kumimoji="1" lang="ja-JP" altLang="en-US" dirty="0"/>
           </a:p>
         </p:txBody>
       </p:sp>
       <p:sp>
         <p:nvSpPr>
-          <p:cNvPr id="3" name="コンテンツ プレースホルダー 2">
-            <a:extLst>
-              <a:ext uri="{FF2B5EF4-FFF2-40B4-BE49-F238E27FC236}">
-                <a16:creationId xmlns:a16="http://schemas.microsoft.com/office/drawing/2014/main" id="{48F8B874-D2E5-BBC3-D5EB-7E35884B07FD}"/>
-              </a:ext>
-            </a:extLst>
-          </p:cNvPr>
-          <p:cNvSpPr>
-            <a:spLocks noGrp="1"/>
-          </p:cNvSpPr>
-          <p:nvPr>
-            <p:ph idx="1"/>
-          </p:nvPr>
-        </p:nvSpPr>
-        <p:spPr/>
-        <p:txBody>
-          <a:bodyPr/>
-          <a:lstStyle/>
-          <a:p>
-            <a:r>
-              <a:rPr lang="ja-JP" altLang="en-US" dirty="0"/>
-              <a:t>処理の順序が関係ない問題の内、</a:t>
-            </a:r>
-            <a:r>
-              <a:rPr lang="en-US" altLang="ja-JP" dirty="0"/>
-              <a:t>7</a:t>
-            </a:r>
-            <a:r>
-              <a:rPr lang="ja-JP" altLang="en-US" dirty="0"/>
-              <a:t>例だけ学習時に教えていない順序を適用</a:t>
-            </a:r>
-            <a:endParaRPr kumimoji="1" lang="en-US" altLang="ja-JP" dirty="0"/>
-          </a:p>
-          <a:p>
-            <a:pPr lvl="1"/>
-            <a:r>
-              <a:rPr lang="en-US" altLang="ja-JP" dirty="0"/>
-              <a:t>7</a:t>
-            </a:r>
-            <a:r>
-              <a:rPr lang="ja-JP" altLang="en-US" dirty="0"/>
-              <a:t>例中</a:t>
-            </a:r>
-            <a:r>
-              <a:rPr lang="en-US" altLang="ja-JP" dirty="0"/>
-              <a:t>6</a:t>
-            </a:r>
-            <a:r>
-              <a:rPr lang="ja-JP" altLang="en-US" dirty="0"/>
-              <a:t>例が最終的な回答まで合っていた。</a:t>
-            </a:r>
-            <a:endParaRPr lang="en-US" altLang="ja-JP" dirty="0"/>
-          </a:p>
-          <a:p>
-            <a:endParaRPr lang="en-US" altLang="ja-JP" dirty="0"/>
-          </a:p>
-          <a:p>
-            <a:r>
-              <a:rPr lang="ja-JP" altLang="ja-JP" dirty="0"/>
-              <a:t>学習時に与えられた処理順序の単純な再現だけでは説明できない出力が確認された</a:t>
-            </a:r>
-            <a:endParaRPr lang="en-US" altLang="ja-JP" dirty="0"/>
-          </a:p>
-        </p:txBody>
-      </p:sp>
-      <p:sp>
-        <p:nvSpPr>
           <p:cNvPr id="4" name="スライド番号プレースホルダー 3">
             <a:extLst>
               <a:ext uri="{FF2B5EF4-FFF2-40B4-BE49-F238E27FC236}">
-                <a16:creationId xmlns:a16="http://schemas.microsoft.com/office/drawing/2014/main" id="{76BB1565-D6C7-D64C-7FA1-C47E6995DED9}"/>
+                <a16:creationId xmlns:a16="http://schemas.microsoft.com/office/drawing/2014/main" id="{D46D4B86-F39C-20B1-C581-7B5E07F236BE}"/>
               </a:ext>
             </a:extLst>
           </p:cNvPr>
@@ -15647,7 +15607,7 @@
     </p:spTree>
     <p:extLst>
       <p:ext uri="{BB962C8B-B14F-4D97-AF65-F5344CB8AC3E}">
-        <p14:creationId xmlns:p14="http://schemas.microsoft.com/office/powerpoint/2010/main" val="2474344463"/>
+        <p14:creationId xmlns:p14="http://schemas.microsoft.com/office/powerpoint/2010/main" val="794349261"/>
       </p:ext>
     </p:extLst>
   </p:cSld>
@@ -15679,7 +15639,7 @@
           <p:cNvPr id="2" name="タイトル 1">
             <a:extLst>
               <a:ext uri="{FF2B5EF4-FFF2-40B4-BE49-F238E27FC236}">
-                <a16:creationId xmlns:a16="http://schemas.microsoft.com/office/drawing/2014/main" id="{12CDF5E8-C1FA-5CA7-FC1E-00606DD71FAD}"/>
+                <a16:creationId xmlns:a16="http://schemas.microsoft.com/office/drawing/2014/main" id="{C4C0C567-A8E0-180C-C545-A8E6827D0017}"/>
               </a:ext>
             </a:extLst>
           </p:cNvPr>
@@ -15712,7 +15672,11 @@
             </a:br>
             <a:r>
               <a:rPr lang="ja-JP" altLang="en-US" dirty="0"/>
-              <a:t>珍しい事例</a:t>
+              <a:t>テストデータその</a:t>
+            </a:r>
+            <a:r>
+              <a:rPr lang="en-US" altLang="ja-JP" dirty="0"/>
+              <a:t>1</a:t>
             </a:r>
             <a:endParaRPr kumimoji="1" lang="ja-JP" altLang="en-US" dirty="0"/>
           </a:p>
@@ -15723,7 +15687,7 @@
           <p:cNvPr id="3" name="コンテンツ プレースホルダー 2">
             <a:extLst>
               <a:ext uri="{FF2B5EF4-FFF2-40B4-BE49-F238E27FC236}">
-                <a16:creationId xmlns:a16="http://schemas.microsoft.com/office/drawing/2014/main" id="{E2EC9FD6-FE96-F5EF-0F7F-7DCFB2009033}"/>
+                <a16:creationId xmlns:a16="http://schemas.microsoft.com/office/drawing/2014/main" id="{5D9A55D6-7BDC-E221-9586-98AE5C2A732B}"/>
               </a:ext>
             </a:extLst>
           </p:cNvPr>
@@ -15740,40 +15704,41 @@
           <a:lstStyle/>
           <a:p>
             <a:r>
-              <a:rPr lang="ja-JP" altLang="ja-JP" dirty="0"/>
-              <a:t>問題を解くために、モデルが学習データに存在しない処理を自発的に生成してしまう</a:t>
+              <a:rPr kumimoji="1" lang="ja-JP" altLang="en-US" dirty="0"/>
+              <a:t>正しいルール</a:t>
+            </a:r>
+            <a:r>
+              <a:rPr kumimoji="1" lang="en-US" altLang="ja-JP" dirty="0"/>
+              <a:t>(</a:t>
+            </a:r>
+            <a:r>
+              <a:rPr kumimoji="1" lang="ja-JP" altLang="en-US" dirty="0"/>
+              <a:t>訓練用データ内で使用しているルール名</a:t>
+            </a:r>
+            <a:r>
+              <a:rPr kumimoji="1" lang="en-US" altLang="ja-JP" dirty="0"/>
+              <a:t>)</a:t>
+            </a:r>
+            <a:r>
+              <a:rPr kumimoji="1" lang="ja-JP" altLang="en-US" dirty="0"/>
+              <a:t>を選べていたか</a:t>
             </a:r>
             <a:endParaRPr lang="en-US" altLang="ja-JP" dirty="0"/>
           </a:p>
           <a:p>
-            <a:endParaRPr kumimoji="1" lang="en-US" altLang="ja-JP" dirty="0"/>
-          </a:p>
-          <a:p>
+            <a:pPr lvl="1"/>
             <a:r>
               <a:rPr lang="ja-JP" altLang="en-US" dirty="0"/>
-              <a:t>処理単体として学習データではそもそも教えてない処理を生成してるものが</a:t>
+              <a:t>関係ない問題の内、学習時に教えていない順序で処理をした</a:t>
             </a:r>
             <a:r>
               <a:rPr lang="en-US" altLang="ja-JP" dirty="0"/>
-              <a:t>2</a:t>
+              <a:t>7</a:t>
             </a:r>
             <a:r>
               <a:rPr lang="ja-JP" altLang="en-US" dirty="0"/>
-              <a:t>例存在した</a:t>
-            </a:r>
-            <a:endParaRPr lang="en-US" altLang="ja-JP" dirty="0"/>
-          </a:p>
-          <a:p>
-            <a:endParaRPr lang="en-US" altLang="ja-JP" dirty="0"/>
-          </a:p>
-          <a:p>
-            <a:r>
-              <a:rPr lang="ja-JP" altLang="en-US" dirty="0"/>
-              <a:t>実際に、どんな処理をしているか確認したが、どのような処理なのかわからなかった</a:t>
-            </a:r>
-            <a:endParaRPr lang="en-US" altLang="ja-JP" dirty="0"/>
-          </a:p>
-          <a:p>
+              <a:t>例を除く</a:t>
+            </a:r>
             <a:endParaRPr kumimoji="1" lang="ja-JP" altLang="en-US" dirty="0"/>
           </a:p>
         </p:txBody>
@@ -15783,7 +15748,7 @@
           <p:cNvPr id="4" name="スライド番号プレースホルダー 3">
             <a:extLst>
               <a:ext uri="{FF2B5EF4-FFF2-40B4-BE49-F238E27FC236}">
-                <a16:creationId xmlns:a16="http://schemas.microsoft.com/office/drawing/2014/main" id="{D46D4B86-F39C-20B1-C581-7B5E07F236BE}"/>
+                <a16:creationId xmlns:a16="http://schemas.microsoft.com/office/drawing/2014/main" id="{9560F741-8262-D35A-6020-176468344617}"/>
               </a:ext>
             </a:extLst>
           </p:cNvPr>
@@ -15807,130 +15772,6 @@
           </a:p>
         </p:txBody>
       </p:sp>
-    </p:spTree>
-    <p:extLst>
-      <p:ext uri="{BB962C8B-B14F-4D97-AF65-F5344CB8AC3E}">
-        <p14:creationId xmlns:p14="http://schemas.microsoft.com/office/powerpoint/2010/main" val="794349261"/>
-      </p:ext>
-    </p:extLst>
-  </p:cSld>
-  <p:clrMapOvr>
-    <a:masterClrMapping/>
-  </p:clrMapOvr>
-</p:sld>
-</file>
-
-<file path=ppt/slides/slide38.xml><?xml version="1.0" encoding="utf-8"?>
-<p:sld xmlns:a="http://schemas.openxmlformats.org/drawingml/2006/main" xmlns:r="http://schemas.openxmlformats.org/officeDocument/2006/relationships" xmlns:p="http://schemas.openxmlformats.org/presentationml/2006/main">
-  <p:cSld>
-    <p:spTree>
-      <p:nvGrpSpPr>
-        <p:cNvPr id="1" name=""/>
-        <p:cNvGrpSpPr/>
-        <p:nvPr/>
-      </p:nvGrpSpPr>
-      <p:grpSpPr>
-        <a:xfrm>
-          <a:off x="0" y="0"/>
-          <a:ext cx="0" cy="0"/>
-          <a:chOff x="0" y="0"/>
-          <a:chExt cx="0" cy="0"/>
-        </a:xfrm>
-      </p:grpSpPr>
-      <p:sp>
-        <p:nvSpPr>
-          <p:cNvPr id="2" name="タイトル 1">
-            <a:extLst>
-              <a:ext uri="{FF2B5EF4-FFF2-40B4-BE49-F238E27FC236}">
-                <a16:creationId xmlns:a16="http://schemas.microsoft.com/office/drawing/2014/main" id="{C4C0C567-A8E0-180C-C545-A8E6827D0017}"/>
-              </a:ext>
-            </a:extLst>
-          </p:cNvPr>
-          <p:cNvSpPr>
-            <a:spLocks noGrp="1"/>
-          </p:cNvSpPr>
-          <p:nvPr>
-            <p:ph type="title"/>
-          </p:nvPr>
-        </p:nvSpPr>
-        <p:spPr/>
-        <p:txBody>
-          <a:bodyPr/>
-          <a:lstStyle/>
-          <a:p>
-            <a:r>
-              <a:rPr lang="ja-JP" altLang="en-US" dirty="0"/>
-              <a:t>答え＋処理過程の</a:t>
-            </a:r>
-            <a:r>
-              <a:rPr lang="en-US" altLang="ja-JP" dirty="0"/>
-              <a:t>SFT</a:t>
-            </a:r>
-            <a:r>
-              <a:rPr lang="ja-JP" altLang="en-US" dirty="0"/>
-              <a:t>の分析</a:t>
-            </a:r>
-            <a:endParaRPr kumimoji="1" lang="ja-JP" altLang="en-US" dirty="0"/>
-          </a:p>
-        </p:txBody>
-      </p:sp>
-      <p:sp>
-        <p:nvSpPr>
-          <p:cNvPr id="3" name="コンテンツ プレースホルダー 2">
-            <a:extLst>
-              <a:ext uri="{FF2B5EF4-FFF2-40B4-BE49-F238E27FC236}">
-                <a16:creationId xmlns:a16="http://schemas.microsoft.com/office/drawing/2014/main" id="{5D9A55D6-7BDC-E221-9586-98AE5C2A732B}"/>
-              </a:ext>
-            </a:extLst>
-          </p:cNvPr>
-          <p:cNvSpPr>
-            <a:spLocks noGrp="1"/>
-          </p:cNvSpPr>
-          <p:nvPr>
-            <p:ph idx="1"/>
-          </p:nvPr>
-        </p:nvSpPr>
-        <p:spPr/>
-        <p:txBody>
-          <a:bodyPr/>
-          <a:lstStyle/>
-          <a:p>
-            <a:r>
-              <a:rPr kumimoji="1" lang="ja-JP" altLang="en-US" dirty="0"/>
-              <a:t>正しいルールを選べていたか</a:t>
-            </a:r>
-          </a:p>
-        </p:txBody>
-      </p:sp>
-      <p:sp>
-        <p:nvSpPr>
-          <p:cNvPr id="4" name="スライド番号プレースホルダー 3">
-            <a:extLst>
-              <a:ext uri="{FF2B5EF4-FFF2-40B4-BE49-F238E27FC236}">
-                <a16:creationId xmlns:a16="http://schemas.microsoft.com/office/drawing/2014/main" id="{9560F741-8262-D35A-6020-176468344617}"/>
-              </a:ext>
-            </a:extLst>
-          </p:cNvPr>
-          <p:cNvSpPr>
-            <a:spLocks noGrp="1"/>
-          </p:cNvSpPr>
-          <p:nvPr>
-            <p:ph type="sldNum" sz="quarter" idx="12"/>
-          </p:nvPr>
-        </p:nvSpPr>
-        <p:spPr/>
-        <p:txBody>
-          <a:bodyPr/>
-          <a:lstStyle/>
-          <a:p>
-            <a:fld id="{10649E7B-FC1B-418B-9B6A-00859DB1DEE8}" type="slidenum">
-              <a:rPr kumimoji="1" lang="ja-JP" altLang="en-US" smtClean="0"/>
-              <a:t>38</a:t>
-            </a:fld>
-            <a:endParaRPr kumimoji="1" lang="ja-JP" altLang="en-US"/>
-          </a:p>
-        </p:txBody>
-      </p:sp>
       <p:graphicFrame>
         <p:nvGraphicFramePr>
           <p:cNvPr id="6" name="表 5">
@@ -15946,14 +15787,14 @@
           <p:nvPr>
             <p:extLst>
               <p:ext uri="{D42A27DB-BD31-4B8C-83A1-F6EECF244321}">
-                <p14:modId xmlns:p14="http://schemas.microsoft.com/office/powerpoint/2010/main" val="3948162798"/>
+                <p14:modId xmlns:p14="http://schemas.microsoft.com/office/powerpoint/2010/main" val="2176279908"/>
               </p:ext>
             </p:extLst>
           </p:nvPr>
         </p:nvGraphicFramePr>
         <p:xfrm>
-          <a:off x="1769818" y="2528408"/>
-          <a:ext cx="8652364" cy="3387576"/>
+          <a:off x="1769818" y="3097649"/>
+          <a:ext cx="8652364" cy="3258701"/>
         </p:xfrm>
         <a:graphic>
           <a:graphicData uri="http://schemas.openxmlformats.org/drawingml/2006/table">
@@ -15991,7 +15832,7 @@
                   </a:extLst>
                 </a:gridCol>
               </a:tblGrid>
-              <a:tr h="846894">
+              <a:tr h="718019">
                 <a:tc>
                   <a:txBody>
                     <a:bodyPr/>
@@ -16085,11 +15926,31 @@
                           <a:ea typeface="+mn-ea"/>
                           <a:cs typeface="+mn-cs"/>
                         </a:rPr>
-                        <a:t>527</a:t>
+                        <a:t>52</a:t>
+                      </a:r>
+                      <a:r>
+                        <a:rPr kumimoji="1" lang="en-US" altLang="ja-JP" sz="1800" b="0" i="0" kern="1200" dirty="0">
+                          <a:solidFill>
+                            <a:schemeClr val="dk1"/>
+                          </a:solidFill>
+                          <a:effectLst/>
+                          <a:latin typeface="+mn-lt"/>
+                          <a:ea typeface="+mn-ea"/>
+                          <a:cs typeface="+mn-cs"/>
+                        </a:rPr>
+                        <a:t>1</a:t>
                       </a:r>
                       <a:r>
                         <a:rPr lang="ja-JP" altLang="ja-JP" dirty="0"/>
-                        <a:t>(75.3%)</a:t>
+                        <a:t>(75.</a:t>
+                      </a:r>
+                      <a:r>
+                        <a:rPr lang="en-US" altLang="ja-JP" dirty="0"/>
+                        <a:t>2</a:t>
+                      </a:r>
+                      <a:r>
+                        <a:rPr lang="ja-JP" altLang="ja-JP" dirty="0"/>
+                        <a:t>%)</a:t>
                       </a:r>
                       <a:endParaRPr kumimoji="1" lang="ja-JP" altLang="en-US" dirty="0"/>
                     </a:p>
@@ -16112,7 +15973,7 @@
                           <a:ea typeface="+mn-ea"/>
                           <a:cs typeface="+mn-cs"/>
                         </a:rPr>
-                        <a:t>27</a:t>
+                        <a:t>2</a:t>
                       </a:r>
                       <a:r>
                         <a:rPr kumimoji="1" lang="en-US" altLang="ja-JP" sz="1800" b="0" i="0" kern="1200" dirty="0">
@@ -16124,7 +15985,7 @@
                           <a:ea typeface="+mn-ea"/>
                           <a:cs typeface="+mn-cs"/>
                         </a:rPr>
-                        <a:t>(3.9%)</a:t>
+                        <a:t>6(3.8%)</a:t>
                       </a:r>
                       <a:endParaRPr kumimoji="1" lang="ja-JP" altLang="en-US" dirty="0"/>
                     </a:p>
@@ -16175,7 +16036,7 @@
                     <a:p>
                       <a:pPr algn="ctr"/>
                       <a:r>
-                        <a:rPr kumimoji="1" lang="ja-JP" altLang="ja-JP" sz="1800" b="0" i="0" kern="1200">
+                        <a:rPr kumimoji="1" lang="ja-JP" altLang="ja-JP" sz="1800" b="0" i="0" kern="1200" dirty="0">
                           <a:solidFill>
                             <a:schemeClr val="dk1"/>
                           </a:solidFill>
@@ -16187,7 +16048,7 @@
                         <a:t>36</a:t>
                       </a:r>
                       <a:r>
-                        <a:rPr kumimoji="1" lang="en-US" altLang="ja-JP" sz="1800" b="0" i="0" kern="1200">
+                        <a:rPr kumimoji="1" lang="en-US" altLang="ja-JP" sz="1800" b="0" i="0" kern="1200" dirty="0">
                           <a:solidFill>
                             <a:schemeClr val="dk1"/>
                           </a:solidFill>
@@ -16196,7 +16057,7 @@
                           <a:ea typeface="+mn-ea"/>
                           <a:cs typeface="+mn-cs"/>
                         </a:rPr>
-                        <a:t>(5.1%)</a:t>
+                        <a:t>(5.2%)</a:t>
                       </a:r>
                       <a:endParaRPr kumimoji="1" lang="ja-JP" altLang="en-US" dirty="0"/>
                     </a:p>
@@ -16231,7 +16092,7 @@
                           <a:ea typeface="+mn-ea"/>
                           <a:cs typeface="+mn-cs"/>
                         </a:rPr>
-                        <a:t>(15.7%)</a:t>
+                        <a:t>(15.9%)</a:t>
                       </a:r>
                       <a:endParaRPr kumimoji="1" lang="ja-JP" altLang="en-US" dirty="0"/>
                     </a:p>
@@ -16317,7 +16178,7 @@
                       <a:pPr algn="ctr"/>
                       <a:r>
                         <a:rPr kumimoji="1" lang="en-US" altLang="ja-JP" dirty="0"/>
-                        <a:t>700</a:t>
+                        <a:t>693</a:t>
                       </a:r>
                       <a:endParaRPr kumimoji="1" lang="ja-JP" altLang="en-US" dirty="0"/>
                     </a:p>
@@ -16347,6 +16208,157 @@
 </p:sld>
 </file>
 
+<file path=ppt/slides/slide38.xml><?xml version="1.0" encoding="utf-8"?>
+<p:sld xmlns:a="http://schemas.openxmlformats.org/drawingml/2006/main" xmlns:r="http://schemas.openxmlformats.org/officeDocument/2006/relationships" xmlns:p="http://schemas.openxmlformats.org/presentationml/2006/main">
+  <p:cSld>
+    <p:spTree>
+      <p:nvGrpSpPr>
+        <p:cNvPr id="1" name=""/>
+        <p:cNvGrpSpPr/>
+        <p:nvPr/>
+      </p:nvGrpSpPr>
+      <p:grpSpPr>
+        <a:xfrm>
+          <a:off x="0" y="0"/>
+          <a:ext cx="0" cy="0"/>
+          <a:chOff x="0" y="0"/>
+          <a:chExt cx="0" cy="0"/>
+        </a:xfrm>
+      </p:grpSpPr>
+      <p:sp>
+        <p:nvSpPr>
+          <p:cNvPr id="2" name="タイトル 1">
+            <a:extLst>
+              <a:ext uri="{FF2B5EF4-FFF2-40B4-BE49-F238E27FC236}">
+                <a16:creationId xmlns:a16="http://schemas.microsoft.com/office/drawing/2014/main" id="{0589F8C4-790E-DA25-F18F-0151736C88F0}"/>
+              </a:ext>
+            </a:extLst>
+          </p:cNvPr>
+          <p:cNvSpPr>
+            <a:spLocks noGrp="1"/>
+          </p:cNvSpPr>
+          <p:nvPr>
+            <p:ph type="title"/>
+          </p:nvPr>
+        </p:nvSpPr>
+        <p:spPr/>
+        <p:txBody>
+          <a:bodyPr/>
+          <a:lstStyle/>
+          <a:p>
+            <a:r>
+              <a:rPr lang="ja-JP" altLang="en-US" dirty="0"/>
+              <a:t>答え＋処理過程の</a:t>
+            </a:r>
+            <a:r>
+              <a:rPr lang="en-US" altLang="ja-JP" dirty="0"/>
+              <a:t>SFT</a:t>
+            </a:r>
+            <a:r>
+              <a:rPr lang="ja-JP" altLang="en-US" dirty="0"/>
+              <a:t>の分析</a:t>
+            </a:r>
+            <a:endParaRPr kumimoji="1" lang="ja-JP" altLang="en-US" dirty="0"/>
+          </a:p>
+        </p:txBody>
+      </p:sp>
+      <p:sp>
+        <p:nvSpPr>
+          <p:cNvPr id="3" name="コンテンツ プレースホルダー 2">
+            <a:extLst>
+              <a:ext uri="{FF2B5EF4-FFF2-40B4-BE49-F238E27FC236}">
+                <a16:creationId xmlns:a16="http://schemas.microsoft.com/office/drawing/2014/main" id="{8A999B23-2CC5-1E9C-C725-1D21BF5C2283}"/>
+              </a:ext>
+            </a:extLst>
+          </p:cNvPr>
+          <p:cNvSpPr>
+            <a:spLocks noGrp="1"/>
+          </p:cNvSpPr>
+          <p:nvPr>
+            <p:ph idx="1"/>
+          </p:nvPr>
+        </p:nvSpPr>
+        <p:spPr/>
+        <p:txBody>
+          <a:bodyPr/>
+          <a:lstStyle/>
+          <a:p>
+            <a:r>
+              <a:rPr kumimoji="1" lang="ja-JP" altLang="en-US" dirty="0"/>
+              <a:t>正しいルール選択 → 正解：</a:t>
+            </a:r>
+            <a:r>
+              <a:rPr kumimoji="1" lang="en-US" altLang="ja-JP" dirty="0"/>
+              <a:t>521 / 554 = 94%</a:t>
+            </a:r>
+          </a:p>
+          <a:p>
+            <a:r>
+              <a:rPr kumimoji="1" lang="ja-JP" altLang="en-US" dirty="0"/>
+              <a:t>誤ったルール選択 → 正解：</a:t>
+            </a:r>
+            <a:r>
+              <a:rPr kumimoji="1" lang="en-US" altLang="ja-JP" dirty="0"/>
+              <a:t>36 / 146 = 24.7% </a:t>
+            </a:r>
+          </a:p>
+          <a:p>
+            <a:r>
+              <a:rPr kumimoji="1" lang="ja-JP" altLang="en-US" dirty="0"/>
+              <a:t>ルール選択が正しい場合、その後の処理も高い確率で正しく行えている</a:t>
+            </a:r>
+            <a:endParaRPr kumimoji="1" lang="en-US" altLang="ja-JP" dirty="0"/>
+          </a:p>
+          <a:p>
+            <a:r>
+              <a:rPr kumimoji="1" lang="ja-JP" altLang="en-US" dirty="0"/>
+              <a:t>不正解の主な要因は、ルール選択の段階での誤りである</a:t>
+            </a:r>
+          </a:p>
+        </p:txBody>
+      </p:sp>
+      <p:sp>
+        <p:nvSpPr>
+          <p:cNvPr id="4" name="スライド番号プレースホルダー 3">
+            <a:extLst>
+              <a:ext uri="{FF2B5EF4-FFF2-40B4-BE49-F238E27FC236}">
+                <a16:creationId xmlns:a16="http://schemas.microsoft.com/office/drawing/2014/main" id="{9F24E83E-3BA5-7139-9BB3-C802C509A05A}"/>
+              </a:ext>
+            </a:extLst>
+          </p:cNvPr>
+          <p:cNvSpPr>
+            <a:spLocks noGrp="1"/>
+          </p:cNvSpPr>
+          <p:nvPr>
+            <p:ph type="sldNum" sz="quarter" idx="12"/>
+          </p:nvPr>
+        </p:nvSpPr>
+        <p:spPr/>
+        <p:txBody>
+          <a:bodyPr/>
+          <a:lstStyle/>
+          <a:p>
+            <a:fld id="{10649E7B-FC1B-418B-9B6A-00859DB1DEE8}" type="slidenum">
+              <a:rPr kumimoji="1" lang="ja-JP" altLang="en-US" smtClean="0"/>
+              <a:t>38</a:t>
+            </a:fld>
+            <a:endParaRPr kumimoji="1" lang="ja-JP" altLang="en-US"/>
+          </a:p>
+        </p:txBody>
+      </p:sp>
+    </p:spTree>
+    <p:extLst>
+      <p:ext uri="{BB962C8B-B14F-4D97-AF65-F5344CB8AC3E}">
+        <p14:creationId xmlns:p14="http://schemas.microsoft.com/office/powerpoint/2010/main" val="314349459"/>
+      </p:ext>
+    </p:extLst>
+  </p:cSld>
+  <p:clrMapOvr>
+    <a:masterClrMapping/>
+  </p:clrMapOvr>
+</p:sld>
+</file>
+
 <file path=ppt/slides/slide39.xml><?xml version="1.0" encoding="utf-8"?>
 <p:sld xmlns:a="http://schemas.openxmlformats.org/drawingml/2006/main" xmlns:r="http://schemas.openxmlformats.org/officeDocument/2006/relationships" xmlns:p="http://schemas.openxmlformats.org/presentationml/2006/main">
   <p:cSld>
@@ -16369,7 +16381,7 @@
           <p:cNvPr id="2" name="タイトル 1">
             <a:extLst>
               <a:ext uri="{FF2B5EF4-FFF2-40B4-BE49-F238E27FC236}">
-                <a16:creationId xmlns:a16="http://schemas.microsoft.com/office/drawing/2014/main" id="{0589F8C4-790E-DA25-F18F-0151736C88F0}"/>
+                <a16:creationId xmlns:a16="http://schemas.microsoft.com/office/drawing/2014/main" id="{DD0CA0B9-152F-4E7F-9FE6-6C8870A3FD33}"/>
               </a:ext>
             </a:extLst>
           </p:cNvPr>
@@ -16406,7 +16418,7 @@
           <p:cNvPr id="3" name="コンテンツ プレースホルダー 2">
             <a:extLst>
               <a:ext uri="{FF2B5EF4-FFF2-40B4-BE49-F238E27FC236}">
-                <a16:creationId xmlns:a16="http://schemas.microsoft.com/office/drawing/2014/main" id="{8A999B23-2CC5-1E9C-C725-1D21BF5C2283}"/>
+                <a16:creationId xmlns:a16="http://schemas.microsoft.com/office/drawing/2014/main" id="{E0A0084C-C382-0FE8-1752-F213B021860F}"/>
               </a:ext>
             </a:extLst>
           </p:cNvPr>
@@ -16424,35 +16436,25 @@
           <a:p>
             <a:r>
               <a:rPr kumimoji="1" lang="ja-JP" altLang="en-US" dirty="0"/>
-              <a:t>正しいルール選択 → 正解：</a:t>
-            </a:r>
-            <a:r>
-              <a:rPr kumimoji="1" lang="en-US" altLang="ja-JP" dirty="0"/>
-              <a:t>527 / 554 = 95.1%</a:t>
-            </a:r>
-          </a:p>
-          <a:p>
-            <a:r>
-              <a:rPr kumimoji="1" lang="ja-JP" altLang="en-US" dirty="0"/>
-              <a:t>誤ったルール選択 → 正解：</a:t>
-            </a:r>
-            <a:r>
-              <a:rPr kumimoji="1" lang="en-US" altLang="ja-JP" dirty="0"/>
-              <a:t>36 / 146 = 24.7% </a:t>
-            </a:r>
-          </a:p>
-          <a:p>
-            <a:r>
-              <a:rPr kumimoji="1" lang="ja-JP" altLang="en-US" dirty="0"/>
-              <a:t>ルール選択が正しい場合、その後の処理も高い確率で正しく行えている</a:t>
+              <a:t>ルールを正しく適用できていたか</a:t>
             </a:r>
             <a:endParaRPr kumimoji="1" lang="en-US" altLang="ja-JP" dirty="0"/>
           </a:p>
           <a:p>
-            <a:r>
-              <a:rPr kumimoji="1" lang="ja-JP" altLang="en-US" dirty="0"/>
-              <a:t>不正解の主な要因は、ルール選択の段階での誤りである</a:t>
-            </a:r>
+            <a:pPr lvl="1"/>
+            <a:r>
+              <a:rPr lang="ja-JP" altLang="en-US" dirty="0"/>
+              <a:t>学習データではそもそも教えてない処理を生成してる</a:t>
+            </a:r>
+            <a:r>
+              <a:rPr lang="en-US" altLang="ja-JP" dirty="0"/>
+              <a:t>2</a:t>
+            </a:r>
+            <a:r>
+              <a:rPr lang="ja-JP" altLang="en-US" dirty="0"/>
+              <a:t>例を除く</a:t>
+            </a:r>
+            <a:endParaRPr kumimoji="1" lang="ja-JP" altLang="en-US" dirty="0"/>
           </a:p>
         </p:txBody>
       </p:sp>
@@ -16461,7 +16463,7 @@
           <p:cNvPr id="4" name="スライド番号プレースホルダー 3">
             <a:extLst>
               <a:ext uri="{FF2B5EF4-FFF2-40B4-BE49-F238E27FC236}">
-                <a16:creationId xmlns:a16="http://schemas.microsoft.com/office/drawing/2014/main" id="{9F24E83E-3BA5-7139-9BB3-C802C509A05A}"/>
+                <a16:creationId xmlns:a16="http://schemas.microsoft.com/office/drawing/2014/main" id="{AD6EA617-1E79-3605-BA3E-B9EBD3885963}"/>
               </a:ext>
             </a:extLst>
           </p:cNvPr>
@@ -16485,386 +16487,6 @@
           </a:p>
         </p:txBody>
       </p:sp>
-    </p:spTree>
-    <p:extLst>
-      <p:ext uri="{BB962C8B-B14F-4D97-AF65-F5344CB8AC3E}">
-        <p14:creationId xmlns:p14="http://schemas.microsoft.com/office/powerpoint/2010/main" val="314349459"/>
-      </p:ext>
-    </p:extLst>
-  </p:cSld>
-  <p:clrMapOvr>
-    <a:masterClrMapping/>
-  </p:clrMapOvr>
-</p:sld>
-</file>
-
-<file path=ppt/slides/slide4.xml><?xml version="1.0" encoding="utf-8"?>
-<p:sld xmlns:a="http://schemas.openxmlformats.org/drawingml/2006/main" xmlns:r="http://schemas.openxmlformats.org/officeDocument/2006/relationships" xmlns:p="http://schemas.openxmlformats.org/presentationml/2006/main">
-  <p:cSld>
-    <p:spTree>
-      <p:nvGrpSpPr>
-        <p:cNvPr id="1" name=""/>
-        <p:cNvGrpSpPr/>
-        <p:nvPr/>
-      </p:nvGrpSpPr>
-      <p:grpSpPr>
-        <a:xfrm>
-          <a:off x="0" y="0"/>
-          <a:ext cx="0" cy="0"/>
-          <a:chOff x="0" y="0"/>
-          <a:chExt cx="0" cy="0"/>
-        </a:xfrm>
-      </p:grpSpPr>
-      <p:sp>
-        <p:nvSpPr>
-          <p:cNvPr id="2" name="タイトル 1">
-            <a:extLst>
-              <a:ext uri="{FF2B5EF4-FFF2-40B4-BE49-F238E27FC236}">
-                <a16:creationId xmlns:a16="http://schemas.microsoft.com/office/drawing/2014/main" id="{EFD152E5-FF1D-0A46-290D-9A34D61E20F9}"/>
-              </a:ext>
-            </a:extLst>
-          </p:cNvPr>
-          <p:cNvSpPr>
-            <a:spLocks noGrp="1"/>
-          </p:cNvSpPr>
-          <p:nvPr>
-            <p:ph type="title"/>
-          </p:nvPr>
-        </p:nvSpPr>
-        <p:spPr/>
-        <p:txBody>
-          <a:bodyPr/>
-          <a:lstStyle/>
-          <a:p>
-            <a:r>
-              <a:rPr lang="ja-JP" altLang="en-US" dirty="0"/>
-              <a:t>用語の解説</a:t>
-            </a:r>
-            <a:endParaRPr kumimoji="1" lang="ja-JP" altLang="en-US" dirty="0"/>
-          </a:p>
-        </p:txBody>
-      </p:sp>
-      <p:sp>
-        <p:nvSpPr>
-          <p:cNvPr id="3" name="コンテンツ プレースホルダー 2">
-            <a:extLst>
-              <a:ext uri="{FF2B5EF4-FFF2-40B4-BE49-F238E27FC236}">
-                <a16:creationId xmlns:a16="http://schemas.microsoft.com/office/drawing/2014/main" id="{60D3A0ED-B975-D9E5-73F6-B5040D83D1A5}"/>
-              </a:ext>
-            </a:extLst>
-          </p:cNvPr>
-          <p:cNvSpPr>
-            <a:spLocks noGrp="1"/>
-          </p:cNvSpPr>
-          <p:nvPr>
-            <p:ph idx="1"/>
-          </p:nvPr>
-        </p:nvSpPr>
-        <p:spPr/>
-        <p:txBody>
-          <a:bodyPr>
-            <a:normAutofit/>
-          </a:bodyPr>
-          <a:lstStyle/>
-          <a:p>
-            <a:r>
-              <a:rPr lang="ja-JP" altLang="en-US" dirty="0"/>
-              <a:t>生成</a:t>
-            </a:r>
-            <a:r>
-              <a:rPr lang="en-US" altLang="ja-JP" dirty="0"/>
-              <a:t>AI</a:t>
-            </a:r>
-          </a:p>
-          <a:p>
-            <a:pPr lvl="1"/>
-            <a:r>
-              <a:rPr lang="ja-JP" altLang="en-US" dirty="0"/>
-              <a:t>ユーザの指示に基づき、文章・画像・プログラムコードなどの新しいコンテンツを生成する</a:t>
-            </a:r>
-            <a:r>
-              <a:rPr lang="en-US" altLang="ja-JP" dirty="0"/>
-              <a:t>AI</a:t>
-            </a:r>
-            <a:r>
-              <a:rPr lang="en-US" altLang="ja-JP" baseline="30000" dirty="0"/>
-              <a:t>1</a:t>
-            </a:r>
-          </a:p>
-          <a:p>
-            <a:endParaRPr lang="en-US" altLang="ja-JP" baseline="30000" dirty="0"/>
-          </a:p>
-          <a:p>
-            <a:r>
-              <a:rPr lang="en-US" altLang="ja-JP" dirty="0"/>
-              <a:t>LLM(</a:t>
-            </a:r>
-            <a:r>
-              <a:rPr lang="ja-JP" altLang="en-US" dirty="0"/>
-              <a:t>大規模言語モデル</a:t>
-            </a:r>
-            <a:r>
-              <a:rPr lang="en-US" altLang="ja-JP" dirty="0"/>
-              <a:t>)</a:t>
-            </a:r>
-          </a:p>
-          <a:p>
-            <a:pPr lvl="1"/>
-            <a:r>
-              <a:rPr lang="ja-JP" altLang="en-US" dirty="0"/>
-              <a:t>生成</a:t>
-            </a:r>
-            <a:r>
-              <a:rPr lang="en-US" altLang="ja-JP" dirty="0"/>
-              <a:t>AI</a:t>
-            </a:r>
-            <a:r>
-              <a:rPr lang="ja-JP" altLang="en-US" dirty="0"/>
-              <a:t>の中でも、主に「言語」を扱うモデル</a:t>
-            </a:r>
-            <a:endParaRPr lang="en-US" altLang="ja-JP" dirty="0"/>
-          </a:p>
-          <a:p>
-            <a:pPr lvl="1"/>
-            <a:r>
-              <a:rPr lang="ja-JP" altLang="en-US" dirty="0"/>
-              <a:t>大量のデータで事前学習された、大規模な言語モデル</a:t>
-            </a:r>
-            <a:r>
-              <a:rPr lang="en-US" altLang="ja-JP" baseline="30000" dirty="0"/>
-              <a:t>2</a:t>
-            </a:r>
-          </a:p>
-        </p:txBody>
-      </p:sp>
-      <p:sp>
-        <p:nvSpPr>
-          <p:cNvPr id="5" name="スライド番号プレースホルダー 4">
-            <a:extLst>
-              <a:ext uri="{FF2B5EF4-FFF2-40B4-BE49-F238E27FC236}">
-                <a16:creationId xmlns:a16="http://schemas.microsoft.com/office/drawing/2014/main" id="{8B99BE1C-0773-C3D6-9793-540B41CED105}"/>
-              </a:ext>
-            </a:extLst>
-          </p:cNvPr>
-          <p:cNvSpPr>
-            <a:spLocks noGrp="1"/>
-          </p:cNvSpPr>
-          <p:nvPr>
-            <p:ph type="sldNum" sz="quarter" idx="12"/>
-          </p:nvPr>
-        </p:nvSpPr>
-        <p:spPr/>
-        <p:txBody>
-          <a:bodyPr/>
-          <a:lstStyle/>
-          <a:p>
-            <a:fld id="{10649E7B-FC1B-418B-9B6A-00859DB1DEE8}" type="slidenum">
-              <a:rPr kumimoji="1" lang="ja-JP" altLang="en-US" smtClean="0"/>
-              <a:t>4</a:t>
-            </a:fld>
-            <a:endParaRPr kumimoji="1" lang="ja-JP" altLang="en-US" dirty="0"/>
-          </a:p>
-        </p:txBody>
-      </p:sp>
-      <p:sp>
-        <p:nvSpPr>
-          <p:cNvPr id="6" name="フッター プレースホルダー 5">
-            <a:extLst>
-              <a:ext uri="{FF2B5EF4-FFF2-40B4-BE49-F238E27FC236}">
-                <a16:creationId xmlns:a16="http://schemas.microsoft.com/office/drawing/2014/main" id="{D7C39388-F272-0374-8C4A-880189C87223}"/>
-              </a:ext>
-            </a:extLst>
-          </p:cNvPr>
-          <p:cNvSpPr>
-            <a:spLocks noGrp="1"/>
-          </p:cNvSpPr>
-          <p:nvPr>
-            <p:ph type="ftr" sz="quarter" idx="11"/>
-          </p:nvPr>
-        </p:nvSpPr>
-        <p:spPr>
-          <a:xfrm>
-            <a:off x="183572" y="5977803"/>
-            <a:ext cx="11824855" cy="757094"/>
-          </a:xfrm>
-        </p:spPr>
-        <p:txBody>
-          <a:bodyPr/>
-          <a:lstStyle/>
-          <a:p>
-            <a:pPr marL="228600" indent="-228600">
-              <a:buAutoNum type="arabicPeriod"/>
-            </a:pPr>
-            <a:endParaRPr kumimoji="1" lang="en-US" altLang="ja-JP" dirty="0"/>
-          </a:p>
-          <a:p>
-            <a:pPr marL="228600" indent="-228600">
-              <a:buAutoNum type="arabicPeriod"/>
-            </a:pPr>
-            <a:endParaRPr kumimoji="1" lang="en-US" altLang="ja-JP" dirty="0"/>
-          </a:p>
-          <a:p>
-            <a:pPr marL="228600" indent="-228600">
-              <a:buAutoNum type="arabicPeriod"/>
-            </a:pPr>
-            <a:r>
-              <a:rPr lang="ja-JP" altLang="ja-JP" dirty="0"/>
-              <a:t>Banh, L., &amp; Strobel, G. (2023). Generative artificial intelligence. </a:t>
-            </a:r>
-            <a:r>
-              <a:rPr lang="ja-JP" altLang="ja-JP" i="1" dirty="0"/>
-              <a:t>Electronic markets</a:t>
-            </a:r>
-            <a:r>
-              <a:rPr lang="ja-JP" altLang="ja-JP" dirty="0"/>
-              <a:t>, </a:t>
-            </a:r>
-            <a:r>
-              <a:rPr lang="ja-JP" altLang="ja-JP" i="1" dirty="0"/>
-              <a:t>33</a:t>
-            </a:r>
-            <a:r>
-              <a:rPr lang="ja-JP" altLang="ja-JP" dirty="0"/>
-              <a:t>(1), 63.</a:t>
-            </a:r>
-            <a:endParaRPr lang="en-US" altLang="ja-JP" dirty="0"/>
-          </a:p>
-          <a:p>
-            <a:pPr marL="228600" indent="-228600">
-              <a:buAutoNum type="arabicPeriod"/>
-            </a:pPr>
-            <a:r>
-              <a:rPr lang="ja-JP" altLang="ja-JP" dirty="0"/>
-              <a:t>Lopez-Lira, A. (2024). Can ChatGPT forecast stock price movements?.</a:t>
-            </a:r>
-            <a:endParaRPr kumimoji="1" lang="en-US" altLang="ja-JP" dirty="0"/>
-          </a:p>
-        </p:txBody>
-      </p:sp>
-    </p:spTree>
-    <p:extLst>
-      <p:ext uri="{BB962C8B-B14F-4D97-AF65-F5344CB8AC3E}">
-        <p14:creationId xmlns:p14="http://schemas.microsoft.com/office/powerpoint/2010/main" val="2632587778"/>
-      </p:ext>
-    </p:extLst>
-  </p:cSld>
-  <p:clrMapOvr>
-    <a:masterClrMapping/>
-  </p:clrMapOvr>
-</p:sld>
-</file>
-
-<file path=ppt/slides/slide40.xml><?xml version="1.0" encoding="utf-8"?>
-<p:sld xmlns:a="http://schemas.openxmlformats.org/drawingml/2006/main" xmlns:r="http://schemas.openxmlformats.org/officeDocument/2006/relationships" xmlns:p="http://schemas.openxmlformats.org/presentationml/2006/main">
-  <p:cSld>
-    <p:spTree>
-      <p:nvGrpSpPr>
-        <p:cNvPr id="1" name=""/>
-        <p:cNvGrpSpPr/>
-        <p:nvPr/>
-      </p:nvGrpSpPr>
-      <p:grpSpPr>
-        <a:xfrm>
-          <a:off x="0" y="0"/>
-          <a:ext cx="0" cy="0"/>
-          <a:chOff x="0" y="0"/>
-          <a:chExt cx="0" cy="0"/>
-        </a:xfrm>
-      </p:grpSpPr>
-      <p:sp>
-        <p:nvSpPr>
-          <p:cNvPr id="2" name="タイトル 1">
-            <a:extLst>
-              <a:ext uri="{FF2B5EF4-FFF2-40B4-BE49-F238E27FC236}">
-                <a16:creationId xmlns:a16="http://schemas.microsoft.com/office/drawing/2014/main" id="{DD0CA0B9-152F-4E7F-9FE6-6C8870A3FD33}"/>
-              </a:ext>
-            </a:extLst>
-          </p:cNvPr>
-          <p:cNvSpPr>
-            <a:spLocks noGrp="1"/>
-          </p:cNvSpPr>
-          <p:nvPr>
-            <p:ph type="title"/>
-          </p:nvPr>
-        </p:nvSpPr>
-        <p:spPr/>
-        <p:txBody>
-          <a:bodyPr/>
-          <a:lstStyle/>
-          <a:p>
-            <a:r>
-              <a:rPr lang="ja-JP" altLang="en-US" dirty="0"/>
-              <a:t>答え＋処理過程の</a:t>
-            </a:r>
-            <a:r>
-              <a:rPr lang="en-US" altLang="ja-JP" dirty="0"/>
-              <a:t>SFT</a:t>
-            </a:r>
-            <a:r>
-              <a:rPr lang="ja-JP" altLang="en-US" dirty="0"/>
-              <a:t>の分析</a:t>
-            </a:r>
-            <a:endParaRPr kumimoji="1" lang="ja-JP" altLang="en-US" dirty="0"/>
-          </a:p>
-        </p:txBody>
-      </p:sp>
-      <p:sp>
-        <p:nvSpPr>
-          <p:cNvPr id="3" name="コンテンツ プレースホルダー 2">
-            <a:extLst>
-              <a:ext uri="{FF2B5EF4-FFF2-40B4-BE49-F238E27FC236}">
-                <a16:creationId xmlns:a16="http://schemas.microsoft.com/office/drawing/2014/main" id="{E0A0084C-C382-0FE8-1752-F213B021860F}"/>
-              </a:ext>
-            </a:extLst>
-          </p:cNvPr>
-          <p:cNvSpPr>
-            <a:spLocks noGrp="1"/>
-          </p:cNvSpPr>
-          <p:nvPr>
-            <p:ph idx="1"/>
-          </p:nvPr>
-        </p:nvSpPr>
-        <p:spPr/>
-        <p:txBody>
-          <a:bodyPr/>
-          <a:lstStyle/>
-          <a:p>
-            <a:r>
-              <a:rPr kumimoji="1" lang="ja-JP" altLang="en-US" dirty="0"/>
-              <a:t>ルールを正しく適用できていたか</a:t>
-            </a:r>
-          </a:p>
-        </p:txBody>
-      </p:sp>
-      <p:sp>
-        <p:nvSpPr>
-          <p:cNvPr id="4" name="スライド番号プレースホルダー 3">
-            <a:extLst>
-              <a:ext uri="{FF2B5EF4-FFF2-40B4-BE49-F238E27FC236}">
-                <a16:creationId xmlns:a16="http://schemas.microsoft.com/office/drawing/2014/main" id="{AD6EA617-1E79-3605-BA3E-B9EBD3885963}"/>
-              </a:ext>
-            </a:extLst>
-          </p:cNvPr>
-          <p:cNvSpPr>
-            <a:spLocks noGrp="1"/>
-          </p:cNvSpPr>
-          <p:nvPr>
-            <p:ph type="sldNum" sz="quarter" idx="12"/>
-          </p:nvPr>
-        </p:nvSpPr>
-        <p:spPr/>
-        <p:txBody>
-          <a:bodyPr/>
-          <a:lstStyle/>
-          <a:p>
-            <a:fld id="{10649E7B-FC1B-418B-9B6A-00859DB1DEE8}" type="slidenum">
-              <a:rPr kumimoji="1" lang="ja-JP" altLang="en-US" smtClean="0"/>
-              <a:t>40</a:t>
-            </a:fld>
-            <a:endParaRPr kumimoji="1" lang="ja-JP" altLang="en-US"/>
-          </a:p>
-        </p:txBody>
-      </p:sp>
       <p:graphicFrame>
         <p:nvGraphicFramePr>
           <p:cNvPr id="6" name="表 5">
@@ -16880,13 +16502,13 @@
           <p:nvPr>
             <p:extLst>
               <p:ext uri="{D42A27DB-BD31-4B8C-83A1-F6EECF244321}">
-                <p14:modId xmlns:p14="http://schemas.microsoft.com/office/powerpoint/2010/main" val="1198021242"/>
+                <p14:modId xmlns:p14="http://schemas.microsoft.com/office/powerpoint/2010/main" val="4131230018"/>
               </p:ext>
             </p:extLst>
           </p:nvPr>
         </p:nvGraphicFramePr>
         <p:xfrm>
-          <a:off x="2032000" y="2597562"/>
+          <a:off x="2032000" y="3052561"/>
           <a:ext cx="8128000" cy="3214096"/>
         </p:xfrm>
         <a:graphic>
@@ -17006,7 +16628,18 @@
                     <a:lstStyle/>
                     <a:p>
                       <a:pPr algn="ctr"/>
-                      <a:endParaRPr kumimoji="1" lang="ja-JP" altLang="en-US"/>
+                      <a:r>
+                        <a:rPr kumimoji="1" lang="en-US" altLang="ja-JP" dirty="0"/>
+                        <a:t>520</a:t>
+                      </a:r>
+                    </a:p>
+                    <a:p>
+                      <a:pPr algn="ctr"/>
+                      <a:r>
+                        <a:rPr lang="ja-JP" altLang="ja-JP" dirty="0"/>
+                        <a:t>(74.5%)</a:t>
+                      </a:r>
+                      <a:endParaRPr kumimoji="1" lang="ja-JP" altLang="en-US" dirty="0"/>
                     </a:p>
                   </a:txBody>
                   <a:tcPr anchor="ctr"/>
@@ -17017,7 +16650,18 @@
                     <a:lstStyle/>
                     <a:p>
                       <a:pPr algn="ctr"/>
-                      <a:endParaRPr kumimoji="1" lang="ja-JP" altLang="en-US"/>
+                      <a:r>
+                        <a:rPr kumimoji="1" lang="en-US" altLang="ja-JP" dirty="0"/>
+                        <a:t>46</a:t>
+                      </a:r>
+                    </a:p>
+                    <a:p>
+                      <a:pPr algn="ctr"/>
+                      <a:r>
+                        <a:rPr lang="ja-JP" altLang="ja-JP" dirty="0"/>
+                        <a:t>(6.6%)</a:t>
+                      </a:r>
+                      <a:endParaRPr kumimoji="1" lang="ja-JP" altLang="en-US" dirty="0"/>
                     </a:p>
                   </a:txBody>
                   <a:tcPr anchor="ctr"/>
@@ -17028,7 +16672,18 @@
                     <a:lstStyle/>
                     <a:p>
                       <a:pPr algn="ctr"/>
-                      <a:endParaRPr kumimoji="1" lang="ja-JP" altLang="en-US"/>
+                      <a:r>
+                        <a:rPr kumimoji="1" lang="en-US" altLang="ja-JP" dirty="0"/>
+                        <a:t>566</a:t>
+                      </a:r>
+                    </a:p>
+                    <a:p>
+                      <a:pPr algn="ctr"/>
+                      <a:r>
+                        <a:rPr kumimoji="1" lang="en-US" altLang="ja-JP" dirty="0"/>
+                        <a:t>(81.1%)</a:t>
+                      </a:r>
+                      <a:endParaRPr kumimoji="1" lang="ja-JP" altLang="en-US" dirty="0"/>
                     </a:p>
                   </a:txBody>
                   <a:tcPr anchor="ctr"/>
@@ -17048,7 +16703,7 @@
                       <a:pPr algn="ctr"/>
                       <a:r>
                         <a:rPr kumimoji="1" lang="ja-JP" altLang="en-US" dirty="0"/>
-                        <a:t>正しいルール適用</a:t>
+                        <a:t>誤ったルール適用</a:t>
                       </a:r>
                     </a:p>
                   </a:txBody>
@@ -17060,7 +16715,15 @@
                     <a:lstStyle/>
                     <a:p>
                       <a:pPr algn="ctr"/>
-                      <a:endParaRPr kumimoji="1" lang="ja-JP" altLang="en-US"/>
+                      <a:r>
+                        <a:rPr kumimoji="1" lang="en-US" altLang="ja-JP" dirty="0"/>
+                        <a:t>42</a:t>
+                      </a:r>
+                      <a:r>
+                        <a:rPr lang="ja-JP" altLang="ja-JP" dirty="0"/>
+                        <a:t>(6%)</a:t>
+                      </a:r>
+                      <a:endParaRPr kumimoji="1" lang="ja-JP" altLang="en-US" dirty="0"/>
                     </a:p>
                   </a:txBody>
                   <a:tcPr anchor="ctr"/>
@@ -17071,7 +16734,15 @@
                     <a:lstStyle/>
                     <a:p>
                       <a:pPr algn="ctr"/>
-                      <a:endParaRPr kumimoji="1" lang="ja-JP" altLang="en-US"/>
+                      <a:r>
+                        <a:rPr kumimoji="1" lang="en-US" altLang="ja-JP" dirty="0"/>
+                        <a:t>90</a:t>
+                      </a:r>
+                      <a:r>
+                        <a:rPr lang="ja-JP" altLang="ja-JP" dirty="0"/>
+                        <a:t>(12.9%)</a:t>
+                      </a:r>
+                      <a:endParaRPr kumimoji="1" lang="ja-JP" altLang="en-US" dirty="0"/>
                     </a:p>
                   </a:txBody>
                   <a:tcPr anchor="ctr"/>
@@ -17082,7 +16753,11 @@
                     <a:lstStyle/>
                     <a:p>
                       <a:pPr algn="ctr"/>
-                      <a:endParaRPr kumimoji="1" lang="ja-JP" altLang="en-US"/>
+                      <a:r>
+                        <a:rPr kumimoji="1" lang="en-US" altLang="ja-JP" dirty="0"/>
+                        <a:t>132 (18.9%)</a:t>
+                      </a:r>
+                      <a:endParaRPr kumimoji="1" lang="ja-JP" altLang="en-US" dirty="0"/>
                     </a:p>
                   </a:txBody>
                   <a:tcPr anchor="ctr"/>
@@ -17114,7 +16789,11 @@
                     <a:lstStyle/>
                     <a:p>
                       <a:pPr algn="ctr"/>
-                      <a:endParaRPr kumimoji="1" lang="ja-JP" altLang="en-US"/>
+                      <a:r>
+                        <a:rPr kumimoji="1" lang="en-US" altLang="ja-JP" dirty="0"/>
+                        <a:t>562 (80.5%)</a:t>
+                      </a:r>
+                      <a:endParaRPr kumimoji="1" lang="ja-JP" altLang="en-US" dirty="0"/>
                     </a:p>
                   </a:txBody>
                   <a:tcPr anchor="ctr"/>
@@ -17125,7 +16804,11 @@
                     <a:lstStyle/>
                     <a:p>
                       <a:pPr algn="ctr"/>
-                      <a:endParaRPr kumimoji="1" lang="ja-JP" altLang="en-US"/>
+                      <a:r>
+                        <a:rPr kumimoji="1" lang="en-US" altLang="ja-JP" dirty="0"/>
+                        <a:t>136 (19.5%)</a:t>
+                      </a:r>
+                      <a:endParaRPr kumimoji="1" lang="ja-JP" altLang="en-US" dirty="0"/>
                     </a:p>
                   </a:txBody>
                   <a:tcPr anchor="ctr"/>
@@ -17168,7 +16851,7 @@
 </p:sld>
 </file>
 
-<file path=ppt/slides/slide41.xml><?xml version="1.0" encoding="utf-8"?>
+<file path=ppt/slides/slide4.xml><?xml version="1.0" encoding="utf-8"?>
 <p:sld xmlns:a="http://schemas.openxmlformats.org/drawingml/2006/main" xmlns:r="http://schemas.openxmlformats.org/officeDocument/2006/relationships" xmlns:p="http://schemas.openxmlformats.org/presentationml/2006/main">
   <p:cSld>
     <p:spTree>
@@ -17190,6 +16873,262 @@
           <p:cNvPr id="2" name="タイトル 1">
             <a:extLst>
               <a:ext uri="{FF2B5EF4-FFF2-40B4-BE49-F238E27FC236}">
+                <a16:creationId xmlns:a16="http://schemas.microsoft.com/office/drawing/2014/main" id="{EFD152E5-FF1D-0A46-290D-9A34D61E20F9}"/>
+              </a:ext>
+            </a:extLst>
+          </p:cNvPr>
+          <p:cNvSpPr>
+            <a:spLocks noGrp="1"/>
+          </p:cNvSpPr>
+          <p:nvPr>
+            <p:ph type="title"/>
+          </p:nvPr>
+        </p:nvSpPr>
+        <p:spPr/>
+        <p:txBody>
+          <a:bodyPr/>
+          <a:lstStyle/>
+          <a:p>
+            <a:r>
+              <a:rPr lang="ja-JP" altLang="en-US" dirty="0"/>
+              <a:t>用語の解説</a:t>
+            </a:r>
+            <a:endParaRPr kumimoji="1" lang="ja-JP" altLang="en-US" dirty="0"/>
+          </a:p>
+        </p:txBody>
+      </p:sp>
+      <p:sp>
+        <p:nvSpPr>
+          <p:cNvPr id="3" name="コンテンツ プレースホルダー 2">
+            <a:extLst>
+              <a:ext uri="{FF2B5EF4-FFF2-40B4-BE49-F238E27FC236}">
+                <a16:creationId xmlns:a16="http://schemas.microsoft.com/office/drawing/2014/main" id="{60D3A0ED-B975-D9E5-73F6-B5040D83D1A5}"/>
+              </a:ext>
+            </a:extLst>
+          </p:cNvPr>
+          <p:cNvSpPr>
+            <a:spLocks noGrp="1"/>
+          </p:cNvSpPr>
+          <p:nvPr>
+            <p:ph idx="1"/>
+          </p:nvPr>
+        </p:nvSpPr>
+        <p:spPr/>
+        <p:txBody>
+          <a:bodyPr>
+            <a:normAutofit/>
+          </a:bodyPr>
+          <a:lstStyle/>
+          <a:p>
+            <a:r>
+              <a:rPr lang="ja-JP" altLang="en-US" dirty="0"/>
+              <a:t>生成</a:t>
+            </a:r>
+            <a:r>
+              <a:rPr lang="en-US" altLang="ja-JP" dirty="0"/>
+              <a:t>AI</a:t>
+            </a:r>
+          </a:p>
+          <a:p>
+            <a:pPr lvl="1"/>
+            <a:r>
+              <a:rPr lang="ja-JP" altLang="en-US" dirty="0"/>
+              <a:t>ユーザの指示に基づき、文章・画像・プログラムコードなどの新しいコンテンツを生成する</a:t>
+            </a:r>
+            <a:r>
+              <a:rPr lang="en-US" altLang="ja-JP" dirty="0"/>
+              <a:t>AI</a:t>
+            </a:r>
+            <a:r>
+              <a:rPr lang="en-US" altLang="ja-JP" baseline="30000" dirty="0"/>
+              <a:t>1</a:t>
+            </a:r>
+          </a:p>
+          <a:p>
+            <a:endParaRPr lang="en-US" altLang="ja-JP" baseline="30000" dirty="0"/>
+          </a:p>
+          <a:p>
+            <a:r>
+              <a:rPr lang="en-US" altLang="ja-JP" dirty="0"/>
+              <a:t>LLM(</a:t>
+            </a:r>
+            <a:r>
+              <a:rPr lang="ja-JP" altLang="en-US" dirty="0"/>
+              <a:t>大規模言語モデル</a:t>
+            </a:r>
+            <a:r>
+              <a:rPr lang="en-US" altLang="ja-JP" dirty="0"/>
+              <a:t>)</a:t>
+            </a:r>
+          </a:p>
+          <a:p>
+            <a:pPr lvl="1"/>
+            <a:r>
+              <a:rPr lang="ja-JP" altLang="en-US" dirty="0"/>
+              <a:t>生成</a:t>
+            </a:r>
+            <a:r>
+              <a:rPr lang="en-US" altLang="ja-JP" dirty="0"/>
+              <a:t>AI</a:t>
+            </a:r>
+            <a:r>
+              <a:rPr lang="ja-JP" altLang="en-US" dirty="0"/>
+              <a:t>の中でも、主に「言語」を扱うモデル</a:t>
+            </a:r>
+            <a:endParaRPr lang="en-US" altLang="ja-JP" dirty="0"/>
+          </a:p>
+          <a:p>
+            <a:pPr lvl="1"/>
+            <a:r>
+              <a:rPr lang="ja-JP" altLang="en-US" dirty="0"/>
+              <a:t>大量のデータで事前学習された、大規模な言語モデル</a:t>
+            </a:r>
+            <a:r>
+              <a:rPr lang="en-US" altLang="ja-JP" baseline="30000" dirty="0"/>
+              <a:t>2</a:t>
+            </a:r>
+          </a:p>
+        </p:txBody>
+      </p:sp>
+      <p:sp>
+        <p:nvSpPr>
+          <p:cNvPr id="5" name="スライド番号プレースホルダー 4">
+            <a:extLst>
+              <a:ext uri="{FF2B5EF4-FFF2-40B4-BE49-F238E27FC236}">
+                <a16:creationId xmlns:a16="http://schemas.microsoft.com/office/drawing/2014/main" id="{8B99BE1C-0773-C3D6-9793-540B41CED105}"/>
+              </a:ext>
+            </a:extLst>
+          </p:cNvPr>
+          <p:cNvSpPr>
+            <a:spLocks noGrp="1"/>
+          </p:cNvSpPr>
+          <p:nvPr>
+            <p:ph type="sldNum" sz="quarter" idx="12"/>
+          </p:nvPr>
+        </p:nvSpPr>
+        <p:spPr/>
+        <p:txBody>
+          <a:bodyPr/>
+          <a:lstStyle/>
+          <a:p>
+            <a:fld id="{10649E7B-FC1B-418B-9B6A-00859DB1DEE8}" type="slidenum">
+              <a:rPr kumimoji="1" lang="ja-JP" altLang="en-US" smtClean="0"/>
+              <a:t>4</a:t>
+            </a:fld>
+            <a:endParaRPr kumimoji="1" lang="ja-JP" altLang="en-US" dirty="0"/>
+          </a:p>
+        </p:txBody>
+      </p:sp>
+      <p:sp>
+        <p:nvSpPr>
+          <p:cNvPr id="6" name="フッター プレースホルダー 5">
+            <a:extLst>
+              <a:ext uri="{FF2B5EF4-FFF2-40B4-BE49-F238E27FC236}">
+                <a16:creationId xmlns:a16="http://schemas.microsoft.com/office/drawing/2014/main" id="{D7C39388-F272-0374-8C4A-880189C87223}"/>
+              </a:ext>
+            </a:extLst>
+          </p:cNvPr>
+          <p:cNvSpPr>
+            <a:spLocks noGrp="1"/>
+          </p:cNvSpPr>
+          <p:nvPr>
+            <p:ph type="ftr" sz="quarter" idx="11"/>
+          </p:nvPr>
+        </p:nvSpPr>
+        <p:spPr>
+          <a:xfrm>
+            <a:off x="183572" y="5977803"/>
+            <a:ext cx="11824855" cy="757094"/>
+          </a:xfrm>
+        </p:spPr>
+        <p:txBody>
+          <a:bodyPr/>
+          <a:lstStyle/>
+          <a:p>
+            <a:pPr marL="228600" indent="-228600">
+              <a:buAutoNum type="arabicPeriod"/>
+            </a:pPr>
+            <a:endParaRPr kumimoji="1" lang="en-US" altLang="ja-JP" dirty="0"/>
+          </a:p>
+          <a:p>
+            <a:pPr marL="228600" indent="-228600">
+              <a:buAutoNum type="arabicPeriod"/>
+            </a:pPr>
+            <a:endParaRPr kumimoji="1" lang="en-US" altLang="ja-JP" dirty="0"/>
+          </a:p>
+          <a:p>
+            <a:pPr marL="228600" indent="-228600">
+              <a:buAutoNum type="arabicPeriod"/>
+            </a:pPr>
+            <a:r>
+              <a:rPr lang="ja-JP" altLang="ja-JP" dirty="0"/>
+              <a:t>Banh, L., &amp; Strobel, G. (2023). Generative artificial intelligence. </a:t>
+            </a:r>
+            <a:r>
+              <a:rPr lang="ja-JP" altLang="ja-JP" i="1" dirty="0"/>
+              <a:t>Electronic markets</a:t>
+            </a:r>
+            <a:r>
+              <a:rPr lang="ja-JP" altLang="ja-JP" dirty="0"/>
+              <a:t>, </a:t>
+            </a:r>
+            <a:r>
+              <a:rPr lang="ja-JP" altLang="ja-JP" i="1" dirty="0"/>
+              <a:t>33</a:t>
+            </a:r>
+            <a:r>
+              <a:rPr lang="ja-JP" altLang="ja-JP" dirty="0"/>
+              <a:t>(1), 63.</a:t>
+            </a:r>
+            <a:endParaRPr lang="en-US" altLang="ja-JP" dirty="0"/>
+          </a:p>
+          <a:p>
+            <a:pPr marL="228600" indent="-228600">
+              <a:buAutoNum type="arabicPeriod"/>
+            </a:pPr>
+            <a:r>
+              <a:rPr lang="ja-JP" altLang="ja-JP" dirty="0"/>
+              <a:t>Lopez-Lira, A. (2024). Can ChatGPT forecast stock price movements?.</a:t>
+            </a:r>
+            <a:endParaRPr kumimoji="1" lang="en-US" altLang="ja-JP" dirty="0"/>
+          </a:p>
+        </p:txBody>
+      </p:sp>
+    </p:spTree>
+    <p:extLst>
+      <p:ext uri="{BB962C8B-B14F-4D97-AF65-F5344CB8AC3E}">
+        <p14:creationId xmlns:p14="http://schemas.microsoft.com/office/powerpoint/2010/main" val="2632587778"/>
+      </p:ext>
+    </p:extLst>
+  </p:cSld>
+  <p:clrMapOvr>
+    <a:masterClrMapping/>
+  </p:clrMapOvr>
+</p:sld>
+</file>
+
+<file path=ppt/slides/slide40.xml><?xml version="1.0" encoding="utf-8"?>
+<p:sld xmlns:a="http://schemas.openxmlformats.org/drawingml/2006/main" xmlns:r="http://schemas.openxmlformats.org/officeDocument/2006/relationships" xmlns:p="http://schemas.openxmlformats.org/presentationml/2006/main">
+  <p:cSld>
+    <p:spTree>
+      <p:nvGrpSpPr>
+        <p:cNvPr id="1" name=""/>
+        <p:cNvGrpSpPr/>
+        <p:nvPr/>
+      </p:nvGrpSpPr>
+      <p:grpSpPr>
+        <a:xfrm>
+          <a:off x="0" y="0"/>
+          <a:ext cx="0" cy="0"/>
+          <a:chOff x="0" y="0"/>
+          <a:chExt cx="0" cy="0"/>
+        </a:xfrm>
+      </p:grpSpPr>
+      <p:sp>
+        <p:nvSpPr>
+          <p:cNvPr id="2" name="タイトル 1">
+            <a:extLst>
+              <a:ext uri="{FF2B5EF4-FFF2-40B4-BE49-F238E27FC236}">
                 <a16:creationId xmlns:a16="http://schemas.microsoft.com/office/drawing/2014/main" id="{BF852493-A577-DAB4-8D69-AD7A54C2F267}"/>
               </a:ext>
             </a:extLst>
@@ -17284,7 +17223,7 @@
           <a:p>
             <a:fld id="{10649E7B-FC1B-418B-9B6A-00859DB1DEE8}" type="slidenum">
               <a:rPr kumimoji="1" lang="ja-JP" altLang="en-US" smtClean="0"/>
-              <a:t>41</a:t>
+              <a:t>40</a:t>
             </a:fld>
             <a:endParaRPr kumimoji="1" lang="ja-JP" altLang="en-US"/>
           </a:p>
@@ -17305,7 +17244,7 @@
           <p:nvPr>
             <p:extLst>
               <p:ext uri="{D42A27DB-BD31-4B8C-83A1-F6EECF244321}">
-                <p14:modId xmlns:p14="http://schemas.microsoft.com/office/powerpoint/2010/main" val="1016511918"/>
+                <p14:modId xmlns:p14="http://schemas.microsoft.com/office/powerpoint/2010/main" val="519493314"/>
               </p:ext>
             </p:extLst>
           </p:nvPr>
@@ -17464,7 +17403,7 @@
                       <a:pPr algn="ctr"/>
                       <a:r>
                         <a:rPr kumimoji="1" lang="en-US" altLang="ja-JP" dirty="0"/>
-                        <a:t>525</a:t>
+                        <a:t>526</a:t>
                       </a:r>
                       <a:endParaRPr kumimoji="1" lang="ja-JP" altLang="en-US" dirty="0"/>
                     </a:p>
@@ -17722,7 +17661,7 @@
 </p:sld>
 </file>
 
-<file path=ppt/slides/slide42.xml><?xml version="1.0" encoding="utf-8"?>
+<file path=ppt/slides/slide41.xml><?xml version="1.0" encoding="utf-8"?>
 <p:sld xmlns:a="http://schemas.openxmlformats.org/drawingml/2006/main" xmlns:r="http://schemas.openxmlformats.org/officeDocument/2006/relationships" xmlns:p="http://schemas.openxmlformats.org/presentationml/2006/main">
   <p:cSld>
     <p:spTree>
@@ -17841,7 +17780,7 @@
           <a:p>
             <a:fld id="{10649E7B-FC1B-418B-9B6A-00859DB1DEE8}" type="slidenum">
               <a:rPr kumimoji="1" lang="ja-JP" altLang="en-US" smtClean="0"/>
-              <a:t>42</a:t>
+              <a:t>41</a:t>
             </a:fld>
             <a:endParaRPr kumimoji="1" lang="ja-JP" altLang="en-US"/>
           </a:p>
@@ -17862,14 +17801,14 @@
           <p:nvPr>
             <p:extLst>
               <p:ext uri="{D42A27DB-BD31-4B8C-83A1-F6EECF244321}">
-                <p14:modId xmlns:p14="http://schemas.microsoft.com/office/powerpoint/2010/main" val="2320985437"/>
+                <p14:modId xmlns:p14="http://schemas.microsoft.com/office/powerpoint/2010/main" val="2160871357"/>
               </p:ext>
             </p:extLst>
           </p:nvPr>
         </p:nvGraphicFramePr>
         <p:xfrm>
-          <a:off x="2032000" y="2442492"/>
-          <a:ext cx="8128000" cy="3243360"/>
+          <a:off x="2032000" y="2268434"/>
+          <a:ext cx="8128000" cy="3420000"/>
         </p:xfrm>
         <a:graphic>
           <a:graphicData uri="http://schemas.openxmlformats.org/drawingml/2006/table">
@@ -17907,7 +17846,7 @@
                   </a:extLst>
                 </a:gridCol>
               </a:tblGrid>
-              <a:tr h="648672">
+              <a:tr h="684000">
                 <a:tc>
                   <a:txBody>
                     <a:bodyPr/>
@@ -17970,7 +17909,7 @@
                   </a:ext>
                 </a:extLst>
               </a:tr>
-              <a:tr h="648672">
+              <a:tr h="684000">
                 <a:tc>
                   <a:txBody>
                     <a:bodyPr/>
@@ -18035,7 +17974,7 @@
                   </a:ext>
                 </a:extLst>
               </a:tr>
-              <a:tr h="648672">
+              <a:tr h="684000">
                 <a:tc>
                   <a:txBody>
                     <a:bodyPr/>
@@ -18101,7 +18040,7 @@
                   </a:ext>
                 </a:extLst>
               </a:tr>
-              <a:tr h="648672">
+              <a:tr h="684000">
                 <a:tc>
                   <a:txBody>
                     <a:bodyPr/>
@@ -18167,7 +18106,7 @@
                   </a:ext>
                 </a:extLst>
               </a:tr>
-              <a:tr h="648672">
+              <a:tr h="684000">
                 <a:tc>
                   <a:txBody>
                     <a:bodyPr/>
@@ -18251,6 +18190,197 @@
 </p:sld>
 </file>
 
+<file path=ppt/slides/slide42.xml><?xml version="1.0" encoding="utf-8"?>
+<p:sld xmlns:a="http://schemas.openxmlformats.org/drawingml/2006/main" xmlns:r="http://schemas.openxmlformats.org/officeDocument/2006/relationships" xmlns:p="http://schemas.openxmlformats.org/presentationml/2006/main">
+  <p:cSld>
+    <p:spTree>
+      <p:nvGrpSpPr>
+        <p:cNvPr id="1" name=""/>
+        <p:cNvGrpSpPr/>
+        <p:nvPr/>
+      </p:nvGrpSpPr>
+      <p:grpSpPr>
+        <a:xfrm>
+          <a:off x="0" y="0"/>
+          <a:ext cx="0" cy="0"/>
+          <a:chOff x="0" y="0"/>
+          <a:chExt cx="0" cy="0"/>
+        </a:xfrm>
+      </p:grpSpPr>
+      <p:sp>
+        <p:nvSpPr>
+          <p:cNvPr id="2" name="タイトル 1">
+            <a:extLst>
+              <a:ext uri="{FF2B5EF4-FFF2-40B4-BE49-F238E27FC236}">
+                <a16:creationId xmlns:a16="http://schemas.microsoft.com/office/drawing/2014/main" id="{658DB990-9728-1947-5450-3C3EC0AF82A0}"/>
+              </a:ext>
+            </a:extLst>
+          </p:cNvPr>
+          <p:cNvSpPr>
+            <a:spLocks noGrp="1"/>
+          </p:cNvSpPr>
+          <p:nvPr>
+            <p:ph type="title"/>
+          </p:nvPr>
+        </p:nvSpPr>
+        <p:spPr/>
+        <p:txBody>
+          <a:bodyPr/>
+          <a:lstStyle/>
+          <a:p>
+            <a:r>
+              <a:rPr lang="ja-JP" altLang="en-US" dirty="0"/>
+              <a:t>答え＋処理過程の</a:t>
+            </a:r>
+            <a:r>
+              <a:rPr lang="en-US" altLang="ja-JP" dirty="0"/>
+              <a:t>SFT</a:t>
+            </a:r>
+            <a:r>
+              <a:rPr lang="ja-JP" altLang="en-US" dirty="0"/>
+              <a:t>の分析</a:t>
+            </a:r>
+            <a:endParaRPr kumimoji="1" lang="ja-JP" altLang="en-US" dirty="0"/>
+          </a:p>
+        </p:txBody>
+      </p:sp>
+      <p:sp>
+        <p:nvSpPr>
+          <p:cNvPr id="3" name="コンテンツ プレースホルダー 2">
+            <a:extLst>
+              <a:ext uri="{FF2B5EF4-FFF2-40B4-BE49-F238E27FC236}">
+                <a16:creationId xmlns:a16="http://schemas.microsoft.com/office/drawing/2014/main" id="{6309AA82-5126-550F-5CF0-9593BDE42A34}"/>
+              </a:ext>
+            </a:extLst>
+          </p:cNvPr>
+          <p:cNvSpPr>
+            <a:spLocks noGrp="1"/>
+          </p:cNvSpPr>
+          <p:nvPr>
+            <p:ph idx="1"/>
+          </p:nvPr>
+        </p:nvSpPr>
+        <p:spPr/>
+        <p:txBody>
+          <a:bodyPr/>
+          <a:lstStyle/>
+          <a:p>
+            <a:r>
+              <a:rPr kumimoji="1" lang="ja-JP" altLang="en-US" dirty="0"/>
+              <a:t>正しいルールを選べた場合、ほぼ「適用できるか」で決まる</a:t>
+            </a:r>
+            <a:endParaRPr kumimoji="1" lang="en-US" altLang="ja-JP" dirty="0"/>
+          </a:p>
+          <a:p>
+            <a:r>
+              <a:rPr kumimoji="1" lang="ja-JP" altLang="en-US" dirty="0"/>
+              <a:t>正しいルールを選択し、正しく適用できた場合、最終回答はすべて正解した。</a:t>
+            </a:r>
+            <a:endParaRPr lang="en-US" altLang="ja-JP" dirty="0"/>
+          </a:p>
+          <a:p>
+            <a:r>
+              <a:rPr kumimoji="1" lang="ja-JP" altLang="en-US" dirty="0"/>
+              <a:t>「正しいルールを選んだのに適用で失敗」が</a:t>
+            </a:r>
+            <a:r>
+              <a:rPr kumimoji="1" lang="en-US" altLang="ja-JP" dirty="0"/>
+              <a:t>27</a:t>
+            </a:r>
+            <a:r>
+              <a:rPr kumimoji="1" lang="ja-JP" altLang="en-US" dirty="0"/>
+              <a:t>問</a:t>
+            </a:r>
+            <a:endParaRPr kumimoji="1" lang="en-US" altLang="ja-JP" dirty="0"/>
+          </a:p>
+          <a:p>
+            <a:r>
+              <a:rPr kumimoji="1" lang="ja-JP" altLang="en-US" dirty="0"/>
+              <a:t>誤ったルールを選んだ場合は、かなり不安定</a:t>
+            </a:r>
+            <a:endParaRPr kumimoji="1" lang="en-US" altLang="ja-JP" dirty="0"/>
+          </a:p>
+          <a:p>
+            <a:r>
+              <a:rPr kumimoji="1" lang="ja-JP" altLang="en-US" dirty="0"/>
+              <a:t>ルール選択を誤った場合、選択したルールを正しく適用できる場合もあるが、それでも最終的な正解にはつながりにくい。</a:t>
+            </a:r>
+            <a:endParaRPr kumimoji="1" lang="en-US" altLang="ja-JP" dirty="0"/>
+          </a:p>
+          <a:p>
+            <a:r>
+              <a:rPr kumimoji="1" lang="ja-JP" altLang="en-US" dirty="0"/>
+              <a:t>「選択</a:t>
+            </a:r>
+            <a:r>
+              <a:rPr kumimoji="1" lang="en-US" altLang="ja-JP" dirty="0"/>
+              <a:t>×</a:t>
+            </a:r>
+            <a:r>
+              <a:rPr kumimoji="1" lang="ja-JP" altLang="en-US" dirty="0"/>
+              <a:t>・適用</a:t>
+            </a:r>
+            <a:r>
+              <a:rPr kumimoji="1" lang="en-US" altLang="ja-JP" dirty="0"/>
+              <a:t>×</a:t>
+            </a:r>
+            <a:r>
+              <a:rPr kumimoji="1" lang="ja-JP" altLang="en-US" dirty="0"/>
+              <a:t>・回答○」が</a:t>
+            </a:r>
+            <a:r>
+              <a:rPr kumimoji="1" lang="en-US" altLang="ja-JP" dirty="0"/>
+              <a:t>25</a:t>
+            </a:r>
+            <a:r>
+              <a:rPr kumimoji="1" lang="ja-JP" altLang="en-US" dirty="0"/>
+              <a:t>件ある</a:t>
+            </a:r>
+          </a:p>
+        </p:txBody>
+      </p:sp>
+      <p:sp>
+        <p:nvSpPr>
+          <p:cNvPr id="4" name="スライド番号プレースホルダー 3">
+            <a:extLst>
+              <a:ext uri="{FF2B5EF4-FFF2-40B4-BE49-F238E27FC236}">
+                <a16:creationId xmlns:a16="http://schemas.microsoft.com/office/drawing/2014/main" id="{CEBC135F-248B-1120-40AD-1F10FDE7CAD1}"/>
+              </a:ext>
+            </a:extLst>
+          </p:cNvPr>
+          <p:cNvSpPr>
+            <a:spLocks noGrp="1"/>
+          </p:cNvSpPr>
+          <p:nvPr>
+            <p:ph type="sldNum" sz="quarter" idx="12"/>
+          </p:nvPr>
+        </p:nvSpPr>
+        <p:spPr/>
+        <p:txBody>
+          <a:bodyPr/>
+          <a:lstStyle/>
+          <a:p>
+            <a:fld id="{10649E7B-FC1B-418B-9B6A-00859DB1DEE8}" type="slidenum">
+              <a:rPr kumimoji="1" lang="ja-JP" altLang="en-US" smtClean="0"/>
+              <a:t>42</a:t>
+            </a:fld>
+            <a:endParaRPr kumimoji="1" lang="ja-JP" altLang="en-US"/>
+          </a:p>
+        </p:txBody>
+      </p:sp>
+    </p:spTree>
+    <p:extLst>
+      <p:ext uri="{BB962C8B-B14F-4D97-AF65-F5344CB8AC3E}">
+        <p14:creationId xmlns:p14="http://schemas.microsoft.com/office/powerpoint/2010/main" val="2192080451"/>
+      </p:ext>
+    </p:extLst>
+  </p:cSld>
+  <p:clrMapOvr>
+    <a:masterClrMapping/>
+  </p:clrMapOvr>
+</p:sld>
+</file>
+
 <file path=ppt/slides/slide43.xml><?xml version="1.0" encoding="utf-8"?>
 <p:sld xmlns:a="http://schemas.openxmlformats.org/drawingml/2006/main" xmlns:r="http://schemas.openxmlformats.org/officeDocument/2006/relationships" xmlns:p="http://schemas.openxmlformats.org/presentationml/2006/main">
   <p:cSld>
@@ -18273,7 +18403,7 @@
           <p:cNvPr id="2" name="タイトル 1">
             <a:extLst>
               <a:ext uri="{FF2B5EF4-FFF2-40B4-BE49-F238E27FC236}">
-                <a16:creationId xmlns:a16="http://schemas.microsoft.com/office/drawing/2014/main" id="{658DB990-9728-1947-5450-3C3EC0AF82A0}"/>
+                <a16:creationId xmlns:a16="http://schemas.microsoft.com/office/drawing/2014/main" id="{65CB6A5B-C2E8-3604-02CB-54123A0F7B53}"/>
               </a:ext>
             </a:extLst>
           </p:cNvPr>
@@ -18310,7 +18440,7 @@
           <p:cNvPr id="3" name="コンテンツ プレースホルダー 2">
             <a:extLst>
               <a:ext uri="{FF2B5EF4-FFF2-40B4-BE49-F238E27FC236}">
-                <a16:creationId xmlns:a16="http://schemas.microsoft.com/office/drawing/2014/main" id="{6309AA82-5126-550F-5CF0-9593BDE42A34}"/>
+                <a16:creationId xmlns:a16="http://schemas.microsoft.com/office/drawing/2014/main" id="{52A53606-3C4C-1C71-A04D-AF818D527974}"/>
               </a:ext>
             </a:extLst>
           </p:cNvPr>
@@ -18326,77 +18456,97 @@
           <a:bodyPr/>
           <a:lstStyle/>
           <a:p>
-            <a:r>
-              <a:rPr kumimoji="1" lang="ja-JP" altLang="en-US" dirty="0"/>
-              <a:t>正しいルールを選べた場合、ほぼ「適用できるか」で決まる</a:t>
-            </a:r>
-            <a:endParaRPr kumimoji="1" lang="en-US" altLang="ja-JP" dirty="0"/>
-          </a:p>
-          <a:p>
-            <a:r>
-              <a:rPr kumimoji="1" lang="ja-JP" altLang="en-US" dirty="0"/>
-              <a:t>正しいルールを選択し、正しく適用できた場合、最終回答はすべて正解した。</a:t>
-            </a:r>
-            <a:endParaRPr lang="en-US" altLang="ja-JP" dirty="0"/>
-          </a:p>
-          <a:p>
-            <a:r>
-              <a:rPr kumimoji="1" lang="ja-JP" altLang="en-US" dirty="0"/>
-              <a:t>「正しいルールを選んだのに適用で失敗」が</a:t>
-            </a:r>
-            <a:r>
-              <a:rPr kumimoji="1" lang="en-US" altLang="ja-JP" dirty="0"/>
-              <a:t>27</a:t>
-            </a:r>
-            <a:r>
-              <a:rPr kumimoji="1" lang="ja-JP" altLang="en-US" dirty="0"/>
-              <a:t>問</a:t>
-            </a:r>
-            <a:endParaRPr kumimoji="1" lang="en-US" altLang="ja-JP" dirty="0"/>
-          </a:p>
-          <a:p>
-            <a:r>
-              <a:rPr kumimoji="1" lang="ja-JP" altLang="en-US" dirty="0"/>
-              <a:t>誤ったルールを選んだ場合は、かなり不安定</a:t>
-            </a:r>
-            <a:endParaRPr kumimoji="1" lang="en-US" altLang="ja-JP" dirty="0"/>
-          </a:p>
-          <a:p>
-            <a:r>
-              <a:rPr kumimoji="1" lang="ja-JP" altLang="en-US" dirty="0"/>
-              <a:t>ルール選択を誤った場合、選択したルールを正しく適用できる場合もあるが、それでも最終的な正解にはつながりにくい。</a:t>
-            </a:r>
-            <a:endParaRPr kumimoji="1" lang="en-US" altLang="ja-JP" dirty="0"/>
-          </a:p>
-          <a:p>
-            <a:r>
-              <a:rPr kumimoji="1" lang="ja-JP" altLang="en-US" dirty="0"/>
-              <a:t>「選択</a:t>
-            </a:r>
-            <a:r>
-              <a:rPr kumimoji="1" lang="en-US" altLang="ja-JP" dirty="0"/>
-              <a:t>×</a:t>
-            </a:r>
-            <a:r>
-              <a:rPr kumimoji="1" lang="ja-JP" altLang="en-US" dirty="0"/>
-              <a:t>・適用</a:t>
-            </a:r>
-            <a:r>
-              <a:rPr kumimoji="1" lang="en-US" altLang="ja-JP" dirty="0"/>
-              <a:t>×</a:t>
-            </a:r>
-            <a:r>
-              <a:rPr kumimoji="1" lang="ja-JP" altLang="en-US" dirty="0"/>
-              <a:t>・回答○」が</a:t>
-            </a:r>
             <a:r>
               <a:rPr kumimoji="1" lang="en-US" altLang="ja-JP" dirty="0"/>
               <a:t>25</a:t>
             </a:r>
             <a:r>
               <a:rPr kumimoji="1" lang="ja-JP" altLang="en-US" dirty="0"/>
-              <a:t>件ある</a:t>
-            </a:r>
+              <a:t>件の</a:t>
+            </a:r>
+            <a:r>
+              <a:rPr lang="ja-JP" altLang="en-US" dirty="0"/>
+              <a:t>「選択</a:t>
+            </a:r>
+            <a:r>
+              <a:rPr lang="en-US" altLang="ja-JP" dirty="0"/>
+              <a:t>×</a:t>
+            </a:r>
+            <a:r>
+              <a:rPr lang="ja-JP" altLang="en-US" dirty="0"/>
+              <a:t>・適用</a:t>
+            </a:r>
+            <a:r>
+              <a:rPr lang="en-US" altLang="ja-JP" dirty="0"/>
+              <a:t>×</a:t>
+            </a:r>
+            <a:r>
+              <a:rPr lang="ja-JP" altLang="en-US" dirty="0"/>
+              <a:t>・回答○」について</a:t>
+            </a:r>
+            <a:endParaRPr lang="en-US" altLang="ja-JP" dirty="0"/>
+          </a:p>
+          <a:p>
+            <a:r>
+              <a:rPr kumimoji="1" lang="ja-JP" altLang="en-US" dirty="0"/>
+              <a:t>パターン①：ルール名の不一致</a:t>
+            </a:r>
+            <a:endParaRPr kumimoji="1" lang="en-US" altLang="ja-JP" dirty="0"/>
+          </a:p>
+          <a:p>
+            <a:pPr lvl="1"/>
+            <a:r>
+              <a:rPr lang="ja-JP" altLang="en-US" dirty="0"/>
+              <a:t>実際の処理は正しい</a:t>
+            </a:r>
+            <a:endParaRPr lang="en-US" altLang="ja-JP" dirty="0"/>
+          </a:p>
+          <a:p>
+            <a:pPr lvl="1"/>
+            <a:r>
+              <a:rPr lang="ja-JP" altLang="en-US" dirty="0"/>
+              <a:t>評価上は選択</a:t>
+            </a:r>
+            <a:r>
+              <a:rPr lang="en-US" altLang="ja-JP" dirty="0"/>
+              <a:t>×</a:t>
+            </a:r>
+            <a:r>
+              <a:rPr lang="ja-JP" altLang="en-US" dirty="0"/>
+              <a:t>・適用</a:t>
+            </a:r>
+            <a:r>
+              <a:rPr lang="en-US" altLang="ja-JP" dirty="0"/>
+              <a:t>×</a:t>
+            </a:r>
+            <a:r>
+              <a:rPr lang="ja-JP" altLang="en-US" dirty="0"/>
+              <a:t>になっている</a:t>
+            </a:r>
+            <a:endParaRPr lang="en-US" altLang="ja-JP" dirty="0"/>
+          </a:p>
+          <a:p>
+            <a:r>
+              <a:rPr kumimoji="1" lang="ja-JP" altLang="en-US" dirty="0"/>
+              <a:t>パターン②：冗長な処理の追加</a:t>
+            </a:r>
+            <a:endParaRPr kumimoji="1" lang="en-US" altLang="ja-JP" dirty="0"/>
+          </a:p>
+          <a:p>
+            <a:pPr lvl="1"/>
+            <a:r>
+              <a:rPr kumimoji="1" lang="ja-JP" altLang="en-US" dirty="0"/>
+              <a:t>正解に必要な処理はできている</a:t>
+            </a:r>
+            <a:endParaRPr kumimoji="1" lang="en-US" altLang="ja-JP" dirty="0"/>
+          </a:p>
+          <a:p>
+            <a:pPr lvl="1"/>
+            <a:r>
+              <a:rPr kumimoji="1" lang="ja-JP" altLang="en-US" dirty="0"/>
+              <a:t>結果に影響しない処理を追加している</a:t>
+            </a:r>
+            <a:endParaRPr kumimoji="1" lang="en-US" altLang="ja-JP" dirty="0"/>
           </a:p>
         </p:txBody>
       </p:sp>
@@ -18405,7 +18555,7 @@
           <p:cNvPr id="4" name="スライド番号プレースホルダー 3">
             <a:extLst>
               <a:ext uri="{FF2B5EF4-FFF2-40B4-BE49-F238E27FC236}">
-                <a16:creationId xmlns:a16="http://schemas.microsoft.com/office/drawing/2014/main" id="{CEBC135F-248B-1120-40AD-1F10FDE7CAD1}"/>
+                <a16:creationId xmlns:a16="http://schemas.microsoft.com/office/drawing/2014/main" id="{7CEBF255-A292-5CCA-EB9C-42930239C1A4}"/>
               </a:ext>
             </a:extLst>
           </p:cNvPr>
@@ -18424,217 +18574,6 @@
             <a:fld id="{10649E7B-FC1B-418B-9B6A-00859DB1DEE8}" type="slidenum">
               <a:rPr kumimoji="1" lang="ja-JP" altLang="en-US" smtClean="0"/>
               <a:t>43</a:t>
-            </a:fld>
-            <a:endParaRPr kumimoji="1" lang="ja-JP" altLang="en-US"/>
-          </a:p>
-        </p:txBody>
-      </p:sp>
-    </p:spTree>
-    <p:extLst>
-      <p:ext uri="{BB962C8B-B14F-4D97-AF65-F5344CB8AC3E}">
-        <p14:creationId xmlns:p14="http://schemas.microsoft.com/office/powerpoint/2010/main" val="2192080451"/>
-      </p:ext>
-    </p:extLst>
-  </p:cSld>
-  <p:clrMapOvr>
-    <a:masterClrMapping/>
-  </p:clrMapOvr>
-</p:sld>
-</file>
-
-<file path=ppt/slides/slide44.xml><?xml version="1.0" encoding="utf-8"?>
-<p:sld xmlns:a="http://schemas.openxmlformats.org/drawingml/2006/main" xmlns:r="http://schemas.openxmlformats.org/officeDocument/2006/relationships" xmlns:p="http://schemas.openxmlformats.org/presentationml/2006/main">
-  <p:cSld>
-    <p:spTree>
-      <p:nvGrpSpPr>
-        <p:cNvPr id="1" name=""/>
-        <p:cNvGrpSpPr/>
-        <p:nvPr/>
-      </p:nvGrpSpPr>
-      <p:grpSpPr>
-        <a:xfrm>
-          <a:off x="0" y="0"/>
-          <a:ext cx="0" cy="0"/>
-          <a:chOff x="0" y="0"/>
-          <a:chExt cx="0" cy="0"/>
-        </a:xfrm>
-      </p:grpSpPr>
-      <p:sp>
-        <p:nvSpPr>
-          <p:cNvPr id="2" name="タイトル 1">
-            <a:extLst>
-              <a:ext uri="{FF2B5EF4-FFF2-40B4-BE49-F238E27FC236}">
-                <a16:creationId xmlns:a16="http://schemas.microsoft.com/office/drawing/2014/main" id="{65CB6A5B-C2E8-3604-02CB-54123A0F7B53}"/>
-              </a:ext>
-            </a:extLst>
-          </p:cNvPr>
-          <p:cNvSpPr>
-            <a:spLocks noGrp="1"/>
-          </p:cNvSpPr>
-          <p:nvPr>
-            <p:ph type="title"/>
-          </p:nvPr>
-        </p:nvSpPr>
-        <p:spPr/>
-        <p:txBody>
-          <a:bodyPr/>
-          <a:lstStyle/>
-          <a:p>
-            <a:r>
-              <a:rPr lang="ja-JP" altLang="en-US" dirty="0"/>
-              <a:t>答え＋処理過程の</a:t>
-            </a:r>
-            <a:r>
-              <a:rPr lang="en-US" altLang="ja-JP" dirty="0"/>
-              <a:t>SFT</a:t>
-            </a:r>
-            <a:r>
-              <a:rPr lang="ja-JP" altLang="en-US" dirty="0"/>
-              <a:t>の分析</a:t>
-            </a:r>
-            <a:endParaRPr kumimoji="1" lang="ja-JP" altLang="en-US" dirty="0"/>
-          </a:p>
-        </p:txBody>
-      </p:sp>
-      <p:sp>
-        <p:nvSpPr>
-          <p:cNvPr id="3" name="コンテンツ プレースホルダー 2">
-            <a:extLst>
-              <a:ext uri="{FF2B5EF4-FFF2-40B4-BE49-F238E27FC236}">
-                <a16:creationId xmlns:a16="http://schemas.microsoft.com/office/drawing/2014/main" id="{52A53606-3C4C-1C71-A04D-AF818D527974}"/>
-              </a:ext>
-            </a:extLst>
-          </p:cNvPr>
-          <p:cNvSpPr>
-            <a:spLocks noGrp="1"/>
-          </p:cNvSpPr>
-          <p:nvPr>
-            <p:ph idx="1"/>
-          </p:nvPr>
-        </p:nvSpPr>
-        <p:spPr/>
-        <p:txBody>
-          <a:bodyPr/>
-          <a:lstStyle/>
-          <a:p>
-            <a:r>
-              <a:rPr kumimoji="1" lang="en-US" altLang="ja-JP" dirty="0"/>
-              <a:t>25</a:t>
-            </a:r>
-            <a:r>
-              <a:rPr kumimoji="1" lang="ja-JP" altLang="en-US" dirty="0"/>
-              <a:t>件の</a:t>
-            </a:r>
-            <a:r>
-              <a:rPr lang="ja-JP" altLang="en-US" dirty="0"/>
-              <a:t>「選択</a:t>
-            </a:r>
-            <a:r>
-              <a:rPr lang="en-US" altLang="ja-JP" dirty="0"/>
-              <a:t>×</a:t>
-            </a:r>
-            <a:r>
-              <a:rPr lang="ja-JP" altLang="en-US" dirty="0"/>
-              <a:t>・適用</a:t>
-            </a:r>
-            <a:r>
-              <a:rPr lang="en-US" altLang="ja-JP" dirty="0"/>
-              <a:t>×</a:t>
-            </a:r>
-            <a:r>
-              <a:rPr lang="ja-JP" altLang="en-US" dirty="0"/>
-              <a:t>・回答○」について</a:t>
-            </a:r>
-            <a:endParaRPr lang="en-US" altLang="ja-JP" dirty="0"/>
-          </a:p>
-          <a:p>
-            <a:r>
-              <a:rPr kumimoji="1" lang="ja-JP" altLang="en-US" dirty="0"/>
-              <a:t>パターン①：ルール名の不一致</a:t>
-            </a:r>
-            <a:endParaRPr kumimoji="1" lang="en-US" altLang="ja-JP" dirty="0"/>
-          </a:p>
-          <a:p>
-            <a:pPr lvl="1"/>
-            <a:r>
-              <a:rPr lang="ja-JP" altLang="en-US" dirty="0"/>
-              <a:t>実際の処理は正しい</a:t>
-            </a:r>
-            <a:endParaRPr lang="en-US" altLang="ja-JP" dirty="0"/>
-          </a:p>
-          <a:p>
-            <a:pPr lvl="1"/>
-            <a:r>
-              <a:rPr lang="ja-JP" altLang="en-US" dirty="0"/>
-              <a:t>評価上は選択</a:t>
-            </a:r>
-            <a:r>
-              <a:rPr lang="en-US" altLang="ja-JP" dirty="0"/>
-              <a:t>×</a:t>
-            </a:r>
-            <a:r>
-              <a:rPr lang="ja-JP" altLang="en-US" dirty="0"/>
-              <a:t>・適用</a:t>
-            </a:r>
-            <a:r>
-              <a:rPr lang="en-US" altLang="ja-JP" dirty="0"/>
-              <a:t>×</a:t>
-            </a:r>
-            <a:r>
-              <a:rPr lang="ja-JP" altLang="en-US" dirty="0"/>
-              <a:t>になっている</a:t>
-            </a:r>
-            <a:endParaRPr lang="en-US" altLang="ja-JP" dirty="0"/>
-          </a:p>
-          <a:p>
-            <a:r>
-              <a:rPr kumimoji="1" lang="ja-JP" altLang="en-US" dirty="0"/>
-              <a:t>パターン②：冗長な処理の追加</a:t>
-            </a:r>
-            <a:endParaRPr kumimoji="1" lang="en-US" altLang="ja-JP" dirty="0"/>
-          </a:p>
-          <a:p>
-            <a:pPr lvl="1"/>
-            <a:r>
-              <a:rPr kumimoji="1" lang="ja-JP" altLang="en-US" dirty="0"/>
-              <a:t>正解に必要な処理はできている</a:t>
-            </a:r>
-            <a:endParaRPr kumimoji="1" lang="en-US" altLang="ja-JP" dirty="0"/>
-          </a:p>
-          <a:p>
-            <a:pPr lvl="1"/>
-            <a:r>
-              <a:rPr kumimoji="1" lang="ja-JP" altLang="en-US" dirty="0"/>
-              <a:t>結果に影響しない処理を追加している</a:t>
-            </a:r>
-            <a:endParaRPr kumimoji="1" lang="en-US" altLang="ja-JP" dirty="0"/>
-          </a:p>
-        </p:txBody>
-      </p:sp>
-      <p:sp>
-        <p:nvSpPr>
-          <p:cNvPr id="4" name="スライド番号プレースホルダー 3">
-            <a:extLst>
-              <a:ext uri="{FF2B5EF4-FFF2-40B4-BE49-F238E27FC236}">
-                <a16:creationId xmlns:a16="http://schemas.microsoft.com/office/drawing/2014/main" id="{7CEBF255-A292-5CCA-EB9C-42930239C1A4}"/>
-              </a:ext>
-            </a:extLst>
-          </p:cNvPr>
-          <p:cNvSpPr>
-            <a:spLocks noGrp="1"/>
-          </p:cNvSpPr>
-          <p:nvPr>
-            <p:ph type="sldNum" sz="quarter" idx="12"/>
-          </p:nvPr>
-        </p:nvSpPr>
-        <p:spPr/>
-        <p:txBody>
-          <a:bodyPr/>
-          <a:lstStyle/>
-          <a:p>
-            <a:fld id="{10649E7B-FC1B-418B-9B6A-00859DB1DEE8}" type="slidenum">
-              <a:rPr kumimoji="1" lang="ja-JP" altLang="en-US" smtClean="0"/>
-              <a:t>44</a:t>
             </a:fld>
             <a:endParaRPr kumimoji="1" lang="ja-JP" altLang="en-US"/>
           </a:p>
@@ -18653,7 +18592,7 @@
 </p:sld>
 </file>
 
-<file path=ppt/slides/slide45.xml><?xml version="1.0" encoding="utf-8"?>
+<file path=ppt/slides/slide44.xml><?xml version="1.0" encoding="utf-8"?>
 <p:sld xmlns:a="http://schemas.openxmlformats.org/drawingml/2006/main" xmlns:r="http://schemas.openxmlformats.org/officeDocument/2006/relationships" xmlns:p="http://schemas.openxmlformats.org/presentationml/2006/main">
   <p:cSld>
     <p:spTree>
@@ -18778,7 +18717,7 @@
           <a:p>
             <a:fld id="{10649E7B-FC1B-418B-9B6A-00859DB1DEE8}" type="slidenum">
               <a:rPr kumimoji="1" lang="ja-JP" altLang="en-US" smtClean="0"/>
-              <a:t>45</a:t>
+              <a:t>44</a:t>
             </a:fld>
             <a:endParaRPr kumimoji="1" lang="ja-JP" altLang="en-US"/>
           </a:p>
@@ -19221,6 +19160,287 @@
 </p:sld>
 </file>
 
+<file path=ppt/slides/slide45.xml><?xml version="1.0" encoding="utf-8"?>
+<p:sld xmlns:a="http://schemas.openxmlformats.org/drawingml/2006/main" xmlns:r="http://schemas.openxmlformats.org/officeDocument/2006/relationships" xmlns:p="http://schemas.openxmlformats.org/presentationml/2006/main">
+  <p:cSld>
+    <p:spTree>
+      <p:nvGrpSpPr>
+        <p:cNvPr id="1" name=""/>
+        <p:cNvGrpSpPr/>
+        <p:nvPr/>
+      </p:nvGrpSpPr>
+      <p:grpSpPr>
+        <a:xfrm>
+          <a:off x="0" y="0"/>
+          <a:ext cx="0" cy="0"/>
+          <a:chOff x="0" y="0"/>
+          <a:chExt cx="0" cy="0"/>
+        </a:xfrm>
+      </p:grpSpPr>
+      <p:sp>
+        <p:nvSpPr>
+          <p:cNvPr id="2" name="タイトル 1">
+            <a:extLst>
+              <a:ext uri="{FF2B5EF4-FFF2-40B4-BE49-F238E27FC236}">
+                <a16:creationId xmlns:a16="http://schemas.microsoft.com/office/drawing/2014/main" id="{4A2B34D3-C78A-A01B-5225-57CB6F9B3590}"/>
+              </a:ext>
+            </a:extLst>
+          </p:cNvPr>
+          <p:cNvSpPr>
+            <a:spLocks noGrp="1"/>
+          </p:cNvSpPr>
+          <p:nvPr>
+            <p:ph type="title"/>
+          </p:nvPr>
+        </p:nvSpPr>
+        <p:spPr/>
+        <p:txBody>
+          <a:bodyPr/>
+          <a:lstStyle/>
+          <a:p>
+            <a:r>
+              <a:rPr lang="ja-JP" altLang="en-US" dirty="0"/>
+              <a:t>答え＋処理過程の</a:t>
+            </a:r>
+            <a:r>
+              <a:rPr lang="en-US" altLang="ja-JP" dirty="0"/>
+              <a:t>SFT</a:t>
+            </a:r>
+            <a:r>
+              <a:rPr lang="ja-JP" altLang="en-US" dirty="0"/>
+              <a:t>の分析</a:t>
+            </a:r>
+            <a:br>
+              <a:rPr lang="en-US" altLang="ja-JP" dirty="0"/>
+            </a:br>
+            <a:r>
+              <a:rPr lang="ja-JP" altLang="en-US" dirty="0"/>
+              <a:t>テストデータその</a:t>
+            </a:r>
+            <a:r>
+              <a:rPr lang="en-US" altLang="ja-JP" dirty="0"/>
+              <a:t>2</a:t>
+            </a:r>
+            <a:endParaRPr kumimoji="1" lang="ja-JP" altLang="en-US" dirty="0"/>
+          </a:p>
+        </p:txBody>
+      </p:sp>
+      <p:sp>
+        <p:nvSpPr>
+          <p:cNvPr id="3" name="コンテンツ プレースホルダー 2">
+            <a:extLst>
+              <a:ext uri="{FF2B5EF4-FFF2-40B4-BE49-F238E27FC236}">
+                <a16:creationId xmlns:a16="http://schemas.microsoft.com/office/drawing/2014/main" id="{0FA241EC-1CB1-BC98-378A-39ACCE0C958B}"/>
+              </a:ext>
+            </a:extLst>
+          </p:cNvPr>
+          <p:cNvSpPr>
+            <a:spLocks noGrp="1"/>
+          </p:cNvSpPr>
+          <p:nvPr>
+            <p:ph idx="1"/>
+          </p:nvPr>
+        </p:nvSpPr>
+        <p:spPr>
+          <a:xfrm>
+            <a:off x="838200" y="1825624"/>
+            <a:ext cx="10515600" cy="4605655"/>
+          </a:xfrm>
+        </p:spPr>
+        <p:txBody>
+          <a:bodyPr/>
+          <a:lstStyle/>
+          <a:p>
+            <a:r>
+              <a:rPr kumimoji="1" lang="ja-JP" altLang="en-US" dirty="0"/>
+              <a:t>正しいルール選択はほとんどできていない</a:t>
+            </a:r>
+            <a:endParaRPr kumimoji="1" lang="en-US" altLang="ja-JP" dirty="0"/>
+          </a:p>
+          <a:p>
+            <a:pPr lvl="1"/>
+            <a:r>
+              <a:rPr kumimoji="1" lang="en-US" altLang="ja-JP" dirty="0"/>
+              <a:t>1 / 432</a:t>
+            </a:r>
+            <a:r>
+              <a:rPr kumimoji="1" lang="ja-JP" altLang="en-US" dirty="0"/>
+              <a:t>件 </a:t>
+            </a:r>
+            <a:r>
+              <a:rPr kumimoji="1" lang="en-US" altLang="ja-JP" dirty="0"/>
+              <a:t>= 0.2%</a:t>
+            </a:r>
+            <a:endParaRPr lang="en-US" altLang="ja-JP" dirty="0"/>
+          </a:p>
+          <a:p>
+            <a:r>
+              <a:rPr kumimoji="1" lang="ja-JP" altLang="en-US" dirty="0"/>
+              <a:t>最も多かったのは「選択</a:t>
+            </a:r>
+            <a:r>
+              <a:rPr kumimoji="1" lang="en-US" altLang="ja-JP" dirty="0"/>
+              <a:t>×</a:t>
+            </a:r>
+            <a:r>
+              <a:rPr kumimoji="1" lang="ja-JP" altLang="en-US" dirty="0"/>
+              <a:t>・適用○・回答</a:t>
+            </a:r>
+            <a:r>
+              <a:rPr kumimoji="1" lang="en-US" altLang="ja-JP" dirty="0"/>
+              <a:t>×</a:t>
+            </a:r>
+            <a:r>
+              <a:rPr kumimoji="1" lang="ja-JP" altLang="en-US" dirty="0"/>
+              <a:t>」</a:t>
+            </a:r>
+            <a:endParaRPr kumimoji="1" lang="en-US" altLang="ja-JP" dirty="0"/>
+          </a:p>
+          <a:p>
+            <a:pPr lvl="1"/>
+            <a:r>
+              <a:rPr kumimoji="1" lang="en-US" altLang="ja-JP" dirty="0"/>
+              <a:t>271 / 432</a:t>
+            </a:r>
+            <a:r>
+              <a:rPr kumimoji="1" lang="ja-JP" altLang="en-US" dirty="0"/>
+              <a:t>件 </a:t>
+            </a:r>
+            <a:r>
+              <a:rPr kumimoji="1" lang="en-US" altLang="ja-JP" dirty="0"/>
+              <a:t>= 62.7%</a:t>
+            </a:r>
+          </a:p>
+          <a:p>
+            <a:pPr lvl="1"/>
+            <a:r>
+              <a:rPr kumimoji="1" lang="ja-JP" altLang="en-US" dirty="0"/>
+              <a:t>選択したルール自体は正しく適用できているが、ルールの組み合わせを正しく選択できず、最終的に不正解となった</a:t>
+            </a:r>
+            <a:endParaRPr kumimoji="1" lang="en-US" altLang="ja-JP" dirty="0"/>
+          </a:p>
+          <a:p>
+            <a:pPr lvl="1"/>
+            <a:r>
+              <a:rPr kumimoji="1" lang="ja-JP" altLang="en-US" dirty="0"/>
+              <a:t>既知の処理を適切に組み合わせることに難しさがある可能性</a:t>
+            </a:r>
+            <a:endParaRPr kumimoji="1" lang="en-US" altLang="ja-JP" dirty="0"/>
+          </a:p>
+          <a:p>
+            <a:r>
+              <a:rPr kumimoji="1" lang="ja-JP" altLang="en-US" dirty="0"/>
+              <a:t>選択を間違えても正解するケースもある</a:t>
+            </a:r>
+            <a:endParaRPr kumimoji="1" lang="en-US" altLang="ja-JP" dirty="0"/>
+          </a:p>
+          <a:p>
+            <a:pPr lvl="1"/>
+            <a:r>
+              <a:rPr kumimoji="1" lang="ja-JP" altLang="en-US" dirty="0"/>
+              <a:t>選択</a:t>
+            </a:r>
+            <a:r>
+              <a:rPr kumimoji="1" lang="en-US" altLang="ja-JP" dirty="0"/>
+              <a:t>×</a:t>
+            </a:r>
+            <a:r>
+              <a:rPr kumimoji="1" lang="ja-JP" altLang="en-US" dirty="0"/>
+              <a:t>・適用○・回答○：</a:t>
+            </a:r>
+            <a:r>
+              <a:rPr kumimoji="1" lang="en-US" altLang="ja-JP" dirty="0"/>
+              <a:t>32</a:t>
+            </a:r>
+            <a:r>
+              <a:rPr kumimoji="1" lang="ja-JP" altLang="en-US" dirty="0"/>
+              <a:t>件</a:t>
+            </a:r>
+            <a:endParaRPr kumimoji="1" lang="en-US" altLang="ja-JP" dirty="0"/>
+          </a:p>
+          <a:p>
+            <a:pPr lvl="1"/>
+            <a:r>
+              <a:rPr kumimoji="1" lang="ja-JP" altLang="en-US" dirty="0"/>
+              <a:t>選択</a:t>
+            </a:r>
+            <a:r>
+              <a:rPr kumimoji="1" lang="en-US" altLang="ja-JP" dirty="0"/>
+              <a:t>×</a:t>
+            </a:r>
+            <a:r>
+              <a:rPr kumimoji="1" lang="ja-JP" altLang="en-US" dirty="0"/>
+              <a:t>・適用</a:t>
+            </a:r>
+            <a:r>
+              <a:rPr kumimoji="1" lang="en-US" altLang="ja-JP" dirty="0"/>
+              <a:t>×</a:t>
+            </a:r>
+            <a:r>
+              <a:rPr kumimoji="1" lang="ja-JP" altLang="en-US" dirty="0"/>
+              <a:t>・回答○：</a:t>
+            </a:r>
+            <a:r>
+              <a:rPr kumimoji="1" lang="en-US" altLang="ja-JP" dirty="0"/>
+              <a:t>40</a:t>
+            </a:r>
+            <a:r>
+              <a:rPr kumimoji="1" lang="ja-JP" altLang="en-US" dirty="0"/>
+              <a:t>件</a:t>
+            </a:r>
+            <a:endParaRPr kumimoji="1" lang="en-US" altLang="ja-JP" dirty="0"/>
+          </a:p>
+          <a:p>
+            <a:endParaRPr kumimoji="1" lang="en-US" altLang="ja-JP" dirty="0"/>
+          </a:p>
+          <a:p>
+            <a:pPr lvl="1"/>
+            <a:endParaRPr kumimoji="1" lang="ja-JP" altLang="en-US" dirty="0"/>
+          </a:p>
+        </p:txBody>
+      </p:sp>
+      <p:sp>
+        <p:nvSpPr>
+          <p:cNvPr id="4" name="スライド番号プレースホルダー 3">
+            <a:extLst>
+              <a:ext uri="{FF2B5EF4-FFF2-40B4-BE49-F238E27FC236}">
+                <a16:creationId xmlns:a16="http://schemas.microsoft.com/office/drawing/2014/main" id="{5754B12B-3969-51BD-5E9E-F5F0CF438854}"/>
+              </a:ext>
+            </a:extLst>
+          </p:cNvPr>
+          <p:cNvSpPr>
+            <a:spLocks noGrp="1"/>
+          </p:cNvSpPr>
+          <p:nvPr>
+            <p:ph type="sldNum" sz="quarter" idx="12"/>
+          </p:nvPr>
+        </p:nvSpPr>
+        <p:spPr/>
+        <p:txBody>
+          <a:bodyPr/>
+          <a:lstStyle/>
+          <a:p>
+            <a:fld id="{10649E7B-FC1B-418B-9B6A-00859DB1DEE8}" type="slidenum">
+              <a:rPr kumimoji="1" lang="ja-JP" altLang="en-US" smtClean="0"/>
+              <a:t>45</a:t>
+            </a:fld>
+            <a:endParaRPr kumimoji="1" lang="ja-JP" altLang="en-US"/>
+          </a:p>
+        </p:txBody>
+      </p:sp>
+    </p:spTree>
+    <p:extLst>
+      <p:ext uri="{BB962C8B-B14F-4D97-AF65-F5344CB8AC3E}">
+        <p14:creationId xmlns:p14="http://schemas.microsoft.com/office/powerpoint/2010/main" val="1102851010"/>
+      </p:ext>
+    </p:extLst>
+  </p:cSld>
+  <p:clrMapOvr>
+    <a:masterClrMapping/>
+  </p:clrMapOvr>
+</p:sld>
+</file>
+
 <file path=ppt/slides/slide46.xml><?xml version="1.0" encoding="utf-8"?>
 <p:sld xmlns:a="http://schemas.openxmlformats.org/drawingml/2006/main" xmlns:r="http://schemas.openxmlformats.org/officeDocument/2006/relationships" xmlns:p="http://schemas.openxmlformats.org/presentationml/2006/main">
   <p:cSld>
@@ -19243,7 +19463,7 @@
           <p:cNvPr id="2" name="タイトル 1">
             <a:extLst>
               <a:ext uri="{FF2B5EF4-FFF2-40B4-BE49-F238E27FC236}">
-                <a16:creationId xmlns:a16="http://schemas.microsoft.com/office/drawing/2014/main" id="{4A2B34D3-C78A-A01B-5225-57CB6F9B3590}"/>
+                <a16:creationId xmlns:a16="http://schemas.microsoft.com/office/drawing/2014/main" id="{8E10F40D-782D-B5FE-7282-5AABBF0929DD}"/>
               </a:ext>
             </a:extLst>
           </p:cNvPr>
@@ -19260,8 +19480,40 @@
           <a:lstStyle/>
           <a:p>
             <a:r>
+              <a:rPr kumimoji="1" lang="ja-JP" altLang="en-US" dirty="0"/>
+              <a:t>考察</a:t>
+            </a:r>
+          </a:p>
+        </p:txBody>
+      </p:sp>
+      <p:sp>
+        <p:nvSpPr>
+          <p:cNvPr id="3" name="コンテンツ プレースホルダー 2">
+            <a:extLst>
+              <a:ext uri="{FF2B5EF4-FFF2-40B4-BE49-F238E27FC236}">
+                <a16:creationId xmlns:a16="http://schemas.microsoft.com/office/drawing/2014/main" id="{C3BE5359-DB32-BD86-4138-E1160900C98C}"/>
+              </a:ext>
+            </a:extLst>
+          </p:cNvPr>
+          <p:cNvSpPr>
+            <a:spLocks noGrp="1"/>
+          </p:cNvSpPr>
+          <p:nvPr>
+            <p:ph idx="1"/>
+          </p:nvPr>
+        </p:nvSpPr>
+        <p:spPr/>
+        <p:txBody>
+          <a:bodyPr/>
+          <a:lstStyle/>
+          <a:p>
+            <a:r>
+              <a:rPr lang="en-US" altLang="ja-JP" dirty="0"/>
+              <a:t>RQ1</a:t>
+            </a:r>
+            <a:r>
               <a:rPr lang="ja-JP" altLang="en-US" dirty="0"/>
-              <a:t>答え＋処理過程の</a:t>
+              <a:t>：</a:t>
             </a:r>
             <a:r>
               <a:rPr lang="en-US" altLang="ja-JP" dirty="0"/>
@@ -19269,198 +19521,69 @@
             </a:r>
             <a:r>
               <a:rPr lang="ja-JP" altLang="en-US" dirty="0"/>
-              <a:t>の分析</a:t>
-            </a:r>
-            <a:br>
+              <a:t>によって、既知の処理を新しい組み合わせで利用する問題解決能力は獲得されるのか？</a:t>
+            </a:r>
+            <a:endParaRPr lang="en-US" altLang="ja-JP" dirty="0"/>
+          </a:p>
+          <a:p>
+            <a:pPr lvl="1"/>
+            <a:r>
+              <a:rPr lang="ja-JP" altLang="en-US" dirty="0"/>
+              <a:t>どちらの</a:t>
+            </a:r>
+            <a:r>
               <a:rPr lang="en-US" altLang="ja-JP" dirty="0"/>
-            </a:br>
+              <a:t>SFT</a:t>
+            </a:r>
             <a:r>
               <a:rPr lang="ja-JP" altLang="en-US" dirty="0"/>
-              <a:t>テストデータその</a:t>
+              <a:t>でもテストデータその</a:t>
             </a:r>
             <a:r>
               <a:rPr lang="en-US" altLang="ja-JP" dirty="0"/>
               <a:t>2</a:t>
             </a:r>
+            <a:r>
+              <a:rPr lang="ja-JP" altLang="en-US" dirty="0"/>
+              <a:t>での性能はベースモデルより向上しているため、</a:t>
+            </a:r>
+            <a:r>
+              <a:rPr lang="en-US" altLang="ja-JP" dirty="0"/>
+              <a:t>SFT</a:t>
+            </a:r>
+            <a:r>
+              <a:rPr lang="ja-JP" altLang="en-US" dirty="0"/>
+              <a:t>によって既知の処理を新しい組み合わせで利用する能力が一定程度獲得されたと考えられる。</a:t>
+            </a:r>
+            <a:endParaRPr lang="en-US" altLang="ja-JP" dirty="0"/>
+          </a:p>
+          <a:p>
+            <a:pPr lvl="1"/>
+            <a:r>
+              <a:rPr lang="ja-JP" altLang="en-US" dirty="0"/>
+              <a:t>テストデータその２での性能はテストデータその</a:t>
+            </a:r>
+            <a:r>
+              <a:rPr lang="en-US" altLang="ja-JP" dirty="0"/>
+              <a:t>1</a:t>
+            </a:r>
+            <a:r>
+              <a:rPr lang="ja-JP" altLang="en-US" dirty="0"/>
+              <a:t>での性能と比較して低く、獲得された能力は限定的である。</a:t>
+            </a:r>
+            <a:endParaRPr lang="en-US" altLang="ja-JP" dirty="0"/>
+          </a:p>
+          <a:p>
             <a:endParaRPr kumimoji="1" lang="ja-JP" altLang="en-US" dirty="0"/>
           </a:p>
         </p:txBody>
       </p:sp>
       <p:sp>
         <p:nvSpPr>
-          <p:cNvPr id="3" name="コンテンツ プレースホルダー 2">
-            <a:extLst>
-              <a:ext uri="{FF2B5EF4-FFF2-40B4-BE49-F238E27FC236}">
-                <a16:creationId xmlns:a16="http://schemas.microsoft.com/office/drawing/2014/main" id="{0FA241EC-1CB1-BC98-378A-39ACCE0C958B}"/>
-              </a:ext>
-            </a:extLst>
-          </p:cNvPr>
-          <p:cNvSpPr>
-            <a:spLocks noGrp="1"/>
-          </p:cNvSpPr>
-          <p:nvPr>
-            <p:ph idx="1"/>
-          </p:nvPr>
-        </p:nvSpPr>
-        <p:spPr/>
-        <p:txBody>
-          <a:bodyPr/>
-          <a:lstStyle/>
-          <a:p>
-            <a:r>
-              <a:rPr kumimoji="1" lang="ja-JP" altLang="en-US" dirty="0"/>
-              <a:t>正しいルール選択はほとんどできていない</a:t>
-            </a:r>
-            <a:endParaRPr kumimoji="1" lang="en-US" altLang="ja-JP" dirty="0"/>
-          </a:p>
-          <a:p>
-            <a:pPr lvl="1"/>
-            <a:r>
-              <a:rPr kumimoji="1" lang="en-US" altLang="ja-JP" dirty="0"/>
-              <a:t>1 / 432</a:t>
-            </a:r>
-            <a:r>
-              <a:rPr kumimoji="1" lang="ja-JP" altLang="en-US" dirty="0"/>
-              <a:t>件 </a:t>
-            </a:r>
-            <a:r>
-              <a:rPr kumimoji="1" lang="en-US" altLang="ja-JP" dirty="0"/>
-              <a:t>= 0.2%</a:t>
-            </a:r>
-            <a:endParaRPr lang="en-US" altLang="ja-JP" dirty="0"/>
-          </a:p>
-          <a:p>
-            <a:r>
-              <a:rPr kumimoji="1" lang="ja-JP" altLang="en-US" dirty="0"/>
-              <a:t>最も多かったのは「選択</a:t>
-            </a:r>
-            <a:r>
-              <a:rPr kumimoji="1" lang="en-US" altLang="ja-JP" dirty="0"/>
-              <a:t>×</a:t>
-            </a:r>
-            <a:r>
-              <a:rPr kumimoji="1" lang="ja-JP" altLang="en-US" dirty="0"/>
-              <a:t>・適用○・回答</a:t>
-            </a:r>
-            <a:r>
-              <a:rPr kumimoji="1" lang="en-US" altLang="ja-JP" dirty="0"/>
-              <a:t>×</a:t>
-            </a:r>
-            <a:r>
-              <a:rPr kumimoji="1" lang="ja-JP" altLang="en-US" dirty="0"/>
-              <a:t>」</a:t>
-            </a:r>
-            <a:endParaRPr kumimoji="1" lang="en-US" altLang="ja-JP" dirty="0"/>
-          </a:p>
-          <a:p>
-            <a:pPr lvl="1"/>
-            <a:r>
-              <a:rPr kumimoji="1" lang="en-US" altLang="ja-JP" dirty="0"/>
-              <a:t>271 / 432</a:t>
-            </a:r>
-            <a:r>
-              <a:rPr kumimoji="1" lang="ja-JP" altLang="en-US" dirty="0"/>
-              <a:t>件 </a:t>
-            </a:r>
-            <a:r>
-              <a:rPr kumimoji="1" lang="en-US" altLang="ja-JP" dirty="0"/>
-              <a:t>= 62.7%</a:t>
-            </a:r>
-          </a:p>
-          <a:p>
-            <a:pPr lvl="1"/>
-            <a:r>
-              <a:rPr kumimoji="1" lang="ja-JP" altLang="en-US" dirty="0"/>
-              <a:t>選択したルール自体は正しく適用できているが、ルールの組み合わせを正しく選択できず、最終的に不正解となった</a:t>
-            </a:r>
-            <a:endParaRPr kumimoji="1" lang="en-US" altLang="ja-JP" dirty="0"/>
-          </a:p>
-          <a:p>
-            <a:pPr lvl="1"/>
-            <a:r>
-              <a:rPr kumimoji="1" lang="ja-JP" altLang="en-US" dirty="0"/>
-              <a:t>既知の処理を適切に組み合わせることに難しさがある可能性</a:t>
-            </a:r>
-            <a:endParaRPr kumimoji="1" lang="en-US" altLang="ja-JP" dirty="0"/>
-          </a:p>
-          <a:p>
-            <a:r>
-              <a:rPr kumimoji="1" lang="ja-JP" altLang="en-US" dirty="0"/>
-              <a:t>選択を間違えても正解するケースもある</a:t>
-            </a:r>
-            <a:endParaRPr kumimoji="1" lang="en-US" altLang="ja-JP" dirty="0"/>
-          </a:p>
-          <a:p>
-            <a:pPr lvl="1"/>
-            <a:r>
-              <a:rPr kumimoji="1" lang="ja-JP" altLang="en-US" dirty="0"/>
-              <a:t>選択</a:t>
-            </a:r>
-            <a:r>
-              <a:rPr kumimoji="1" lang="en-US" altLang="ja-JP" dirty="0"/>
-              <a:t>×</a:t>
-            </a:r>
-            <a:r>
-              <a:rPr kumimoji="1" lang="ja-JP" altLang="en-US" dirty="0"/>
-              <a:t>・適用○・回答○：</a:t>
-            </a:r>
-            <a:r>
-              <a:rPr kumimoji="1" lang="en-US" altLang="ja-JP" dirty="0"/>
-              <a:t>32</a:t>
-            </a:r>
-            <a:r>
-              <a:rPr kumimoji="1" lang="ja-JP" altLang="en-US" dirty="0"/>
-              <a:t>件</a:t>
-            </a:r>
-            <a:endParaRPr kumimoji="1" lang="en-US" altLang="ja-JP" dirty="0"/>
-          </a:p>
-          <a:p>
-            <a:pPr lvl="1"/>
-            <a:r>
-              <a:rPr kumimoji="1" lang="ja-JP" altLang="en-US" dirty="0"/>
-              <a:t>選択</a:t>
-            </a:r>
-            <a:r>
-              <a:rPr kumimoji="1" lang="en-US" altLang="ja-JP" dirty="0"/>
-              <a:t>×</a:t>
-            </a:r>
-            <a:r>
-              <a:rPr kumimoji="1" lang="ja-JP" altLang="en-US" dirty="0"/>
-              <a:t>・適用</a:t>
-            </a:r>
-            <a:r>
-              <a:rPr kumimoji="1" lang="en-US" altLang="ja-JP" dirty="0"/>
-              <a:t>×</a:t>
-            </a:r>
-            <a:r>
-              <a:rPr kumimoji="1" lang="ja-JP" altLang="en-US" dirty="0"/>
-              <a:t>・回答○：</a:t>
-            </a:r>
-            <a:r>
-              <a:rPr kumimoji="1" lang="en-US" altLang="ja-JP" dirty="0"/>
-              <a:t>40</a:t>
-            </a:r>
-            <a:r>
-              <a:rPr kumimoji="1" lang="ja-JP" altLang="en-US" dirty="0"/>
-              <a:t>件</a:t>
-            </a:r>
-            <a:endParaRPr kumimoji="1" lang="en-US" altLang="ja-JP" dirty="0"/>
-          </a:p>
-          <a:p>
-            <a:endParaRPr kumimoji="1" lang="en-US" altLang="ja-JP" dirty="0"/>
-          </a:p>
-          <a:p>
-            <a:pPr lvl="1"/>
-            <a:endParaRPr kumimoji="1" lang="ja-JP" altLang="en-US" dirty="0"/>
-          </a:p>
-        </p:txBody>
-      </p:sp>
-      <p:sp>
-        <p:nvSpPr>
           <p:cNvPr id="4" name="スライド番号プレースホルダー 3">
             <a:extLst>
               <a:ext uri="{FF2B5EF4-FFF2-40B4-BE49-F238E27FC236}">
-                <a16:creationId xmlns:a16="http://schemas.microsoft.com/office/drawing/2014/main" id="{5754B12B-3969-51BD-5E9E-F5F0CF438854}"/>
+                <a16:creationId xmlns:a16="http://schemas.microsoft.com/office/drawing/2014/main" id="{2CB9FA0E-5A0C-E28C-5963-CF6818C9B04B}"/>
               </a:ext>
             </a:extLst>
           </p:cNvPr>
@@ -19479,185 +19602,6 @@
             <a:fld id="{10649E7B-FC1B-418B-9B6A-00859DB1DEE8}" type="slidenum">
               <a:rPr kumimoji="1" lang="ja-JP" altLang="en-US" smtClean="0"/>
               <a:t>46</a:t>
-            </a:fld>
-            <a:endParaRPr kumimoji="1" lang="ja-JP" altLang="en-US"/>
-          </a:p>
-        </p:txBody>
-      </p:sp>
-    </p:spTree>
-    <p:extLst>
-      <p:ext uri="{BB962C8B-B14F-4D97-AF65-F5344CB8AC3E}">
-        <p14:creationId xmlns:p14="http://schemas.microsoft.com/office/powerpoint/2010/main" val="1102851010"/>
-      </p:ext>
-    </p:extLst>
-  </p:cSld>
-  <p:clrMapOvr>
-    <a:masterClrMapping/>
-  </p:clrMapOvr>
-</p:sld>
-</file>
-
-<file path=ppt/slides/slide47.xml><?xml version="1.0" encoding="utf-8"?>
-<p:sld xmlns:a="http://schemas.openxmlformats.org/drawingml/2006/main" xmlns:r="http://schemas.openxmlformats.org/officeDocument/2006/relationships" xmlns:p="http://schemas.openxmlformats.org/presentationml/2006/main">
-  <p:cSld>
-    <p:spTree>
-      <p:nvGrpSpPr>
-        <p:cNvPr id="1" name=""/>
-        <p:cNvGrpSpPr/>
-        <p:nvPr/>
-      </p:nvGrpSpPr>
-      <p:grpSpPr>
-        <a:xfrm>
-          <a:off x="0" y="0"/>
-          <a:ext cx="0" cy="0"/>
-          <a:chOff x="0" y="0"/>
-          <a:chExt cx="0" cy="0"/>
-        </a:xfrm>
-      </p:grpSpPr>
-      <p:sp>
-        <p:nvSpPr>
-          <p:cNvPr id="2" name="タイトル 1">
-            <a:extLst>
-              <a:ext uri="{FF2B5EF4-FFF2-40B4-BE49-F238E27FC236}">
-                <a16:creationId xmlns:a16="http://schemas.microsoft.com/office/drawing/2014/main" id="{8E10F40D-782D-B5FE-7282-5AABBF0929DD}"/>
-              </a:ext>
-            </a:extLst>
-          </p:cNvPr>
-          <p:cNvSpPr>
-            <a:spLocks noGrp="1"/>
-          </p:cNvSpPr>
-          <p:nvPr>
-            <p:ph type="title"/>
-          </p:nvPr>
-        </p:nvSpPr>
-        <p:spPr/>
-        <p:txBody>
-          <a:bodyPr/>
-          <a:lstStyle/>
-          <a:p>
-            <a:r>
-              <a:rPr kumimoji="1" lang="ja-JP" altLang="en-US" dirty="0"/>
-              <a:t>考察</a:t>
-            </a:r>
-          </a:p>
-        </p:txBody>
-      </p:sp>
-      <p:sp>
-        <p:nvSpPr>
-          <p:cNvPr id="3" name="コンテンツ プレースホルダー 2">
-            <a:extLst>
-              <a:ext uri="{FF2B5EF4-FFF2-40B4-BE49-F238E27FC236}">
-                <a16:creationId xmlns:a16="http://schemas.microsoft.com/office/drawing/2014/main" id="{C3BE5359-DB32-BD86-4138-E1160900C98C}"/>
-              </a:ext>
-            </a:extLst>
-          </p:cNvPr>
-          <p:cNvSpPr>
-            <a:spLocks noGrp="1"/>
-          </p:cNvSpPr>
-          <p:nvPr>
-            <p:ph idx="1"/>
-          </p:nvPr>
-        </p:nvSpPr>
-        <p:spPr/>
-        <p:txBody>
-          <a:bodyPr/>
-          <a:lstStyle/>
-          <a:p>
-            <a:r>
-              <a:rPr lang="en-US" altLang="ja-JP" dirty="0"/>
-              <a:t>RQ1</a:t>
-            </a:r>
-            <a:r>
-              <a:rPr lang="ja-JP" altLang="en-US" dirty="0"/>
-              <a:t>：</a:t>
-            </a:r>
-            <a:r>
-              <a:rPr lang="en-US" altLang="ja-JP" dirty="0"/>
-              <a:t>SFT</a:t>
-            </a:r>
-            <a:r>
-              <a:rPr lang="ja-JP" altLang="en-US" dirty="0"/>
-              <a:t>によって、既知の処理を新しい組み合わせで利用する問題解決能力は獲得されるのか？</a:t>
-            </a:r>
-            <a:endParaRPr lang="en-US" altLang="ja-JP" dirty="0"/>
-          </a:p>
-          <a:p>
-            <a:pPr lvl="1"/>
-            <a:r>
-              <a:rPr lang="ja-JP" altLang="en-US" dirty="0"/>
-              <a:t>どちらの</a:t>
-            </a:r>
-            <a:r>
-              <a:rPr lang="en-US" altLang="ja-JP" dirty="0"/>
-              <a:t>SFT</a:t>
-            </a:r>
-            <a:r>
-              <a:rPr lang="ja-JP" altLang="en-US" dirty="0"/>
-              <a:t>でもテストデータその</a:t>
-            </a:r>
-            <a:r>
-              <a:rPr lang="en-US" altLang="ja-JP" dirty="0"/>
-              <a:t>2</a:t>
-            </a:r>
-            <a:r>
-              <a:rPr lang="ja-JP" altLang="en-US" dirty="0"/>
-              <a:t>での性能はベースモデルより向上しているため、</a:t>
-            </a:r>
-            <a:r>
-              <a:rPr lang="en-US" altLang="ja-JP" dirty="0"/>
-              <a:t>SFT</a:t>
-            </a:r>
-            <a:r>
-              <a:rPr lang="ja-JP" altLang="en-US" dirty="0"/>
-              <a:t>によって既知の処理を新しい組み合わせで利用する能力が一定程度獲得されたと考えられる。</a:t>
-            </a:r>
-            <a:endParaRPr lang="en-US" altLang="ja-JP" dirty="0"/>
-          </a:p>
-          <a:p>
-            <a:pPr lvl="1"/>
-            <a:r>
-              <a:rPr lang="ja-JP" altLang="en-US" dirty="0"/>
-              <a:t>テストデータその２での性能はテストデータその</a:t>
-            </a:r>
-            <a:r>
-              <a:rPr lang="en-US" altLang="ja-JP" dirty="0"/>
-              <a:t>1</a:t>
-            </a:r>
-            <a:r>
-              <a:rPr lang="ja-JP" altLang="en-US" dirty="0"/>
-              <a:t>での性能と比較して低く、獲得された能力は限定的である。</a:t>
-            </a:r>
-            <a:endParaRPr lang="en-US" altLang="ja-JP" dirty="0"/>
-          </a:p>
-          <a:p>
-            <a:endParaRPr kumimoji="1" lang="ja-JP" altLang="en-US" dirty="0"/>
-          </a:p>
-        </p:txBody>
-      </p:sp>
-      <p:sp>
-        <p:nvSpPr>
-          <p:cNvPr id="4" name="スライド番号プレースホルダー 3">
-            <a:extLst>
-              <a:ext uri="{FF2B5EF4-FFF2-40B4-BE49-F238E27FC236}">
-                <a16:creationId xmlns:a16="http://schemas.microsoft.com/office/drawing/2014/main" id="{2CB9FA0E-5A0C-E28C-5963-CF6818C9B04B}"/>
-              </a:ext>
-            </a:extLst>
-          </p:cNvPr>
-          <p:cNvSpPr>
-            <a:spLocks noGrp="1"/>
-          </p:cNvSpPr>
-          <p:nvPr>
-            <p:ph type="sldNum" sz="quarter" idx="12"/>
-          </p:nvPr>
-        </p:nvSpPr>
-        <p:spPr/>
-        <p:txBody>
-          <a:bodyPr/>
-          <a:lstStyle/>
-          <a:p>
-            <a:fld id="{10649E7B-FC1B-418B-9B6A-00859DB1DEE8}" type="slidenum">
-              <a:rPr kumimoji="1" lang="ja-JP" altLang="en-US" smtClean="0"/>
-              <a:t>47</a:t>
             </a:fld>
             <a:endParaRPr kumimoji="1" lang="ja-JP" altLang="en-US"/>
           </a:p>
@@ -19676,7 +19620,7 @@
 </p:sld>
 </file>
 
-<file path=ppt/slides/slide48.xml><?xml version="1.0" encoding="utf-8"?>
+<file path=ppt/slides/slide47.xml><?xml version="1.0" encoding="utf-8"?>
 <p:sld xmlns:a="http://schemas.openxmlformats.org/drawingml/2006/main" xmlns:r="http://schemas.openxmlformats.org/officeDocument/2006/relationships" xmlns:p="http://schemas.openxmlformats.org/presentationml/2006/main">
   <p:cSld>
     <p:spTree>
@@ -19866,7 +19810,7 @@
           <a:p>
             <a:fld id="{10649E7B-FC1B-418B-9B6A-00859DB1DEE8}" type="slidenum">
               <a:rPr kumimoji="1" lang="ja-JP" altLang="en-US" smtClean="0"/>
-              <a:t>48</a:t>
+              <a:t>47</a:t>
             </a:fld>
             <a:endParaRPr kumimoji="1" lang="ja-JP" altLang="en-US"/>
           </a:p>
@@ -19876,6 +19820,143 @@
     <p:extLst>
       <p:ext uri="{BB962C8B-B14F-4D97-AF65-F5344CB8AC3E}">
         <p14:creationId xmlns:p14="http://schemas.microsoft.com/office/powerpoint/2010/main" val="2945795507"/>
+      </p:ext>
+    </p:extLst>
+  </p:cSld>
+  <p:clrMapOvr>
+    <a:masterClrMapping/>
+  </p:clrMapOvr>
+</p:sld>
+</file>
+
+<file path=ppt/slides/slide48.xml><?xml version="1.0" encoding="utf-8"?>
+<p:sld xmlns:a="http://schemas.openxmlformats.org/drawingml/2006/main" xmlns:r="http://schemas.openxmlformats.org/officeDocument/2006/relationships" xmlns:p="http://schemas.openxmlformats.org/presentationml/2006/main">
+  <p:cSld>
+    <p:spTree>
+      <p:nvGrpSpPr>
+        <p:cNvPr id="1" name=""/>
+        <p:cNvGrpSpPr/>
+        <p:nvPr/>
+      </p:nvGrpSpPr>
+      <p:grpSpPr>
+        <a:xfrm>
+          <a:off x="0" y="0"/>
+          <a:ext cx="0" cy="0"/>
+          <a:chOff x="0" y="0"/>
+          <a:chExt cx="0" cy="0"/>
+        </a:xfrm>
+      </p:grpSpPr>
+      <p:sp>
+        <p:nvSpPr>
+          <p:cNvPr id="2" name="タイトル 1">
+            <a:extLst>
+              <a:ext uri="{FF2B5EF4-FFF2-40B4-BE49-F238E27FC236}">
+                <a16:creationId xmlns:a16="http://schemas.microsoft.com/office/drawing/2014/main" id="{E6E69329-AF1E-667F-1EA5-4ED2C221D285}"/>
+              </a:ext>
+            </a:extLst>
+          </p:cNvPr>
+          <p:cNvSpPr>
+            <a:spLocks noGrp="1"/>
+          </p:cNvSpPr>
+          <p:nvPr>
+            <p:ph type="title"/>
+          </p:nvPr>
+        </p:nvSpPr>
+        <p:spPr/>
+        <p:txBody>
+          <a:bodyPr/>
+          <a:lstStyle/>
+          <a:p>
+            <a:r>
+              <a:rPr kumimoji="1" lang="ja-JP" altLang="en-US" dirty="0"/>
+              <a:t>今後の課題</a:t>
+            </a:r>
+          </a:p>
+        </p:txBody>
+      </p:sp>
+      <p:sp>
+        <p:nvSpPr>
+          <p:cNvPr id="3" name="コンテンツ プレースホルダー 2">
+            <a:extLst>
+              <a:ext uri="{FF2B5EF4-FFF2-40B4-BE49-F238E27FC236}">
+                <a16:creationId xmlns:a16="http://schemas.microsoft.com/office/drawing/2014/main" id="{36FA4F64-8AB9-3F80-0D97-3E540A81AE53}"/>
+              </a:ext>
+            </a:extLst>
+          </p:cNvPr>
+          <p:cNvSpPr>
+            <a:spLocks noGrp="1"/>
+          </p:cNvSpPr>
+          <p:nvPr>
+            <p:ph idx="1"/>
+          </p:nvPr>
+        </p:nvSpPr>
+        <p:spPr/>
+        <p:txBody>
+          <a:bodyPr/>
+          <a:lstStyle/>
+          <a:p>
+            <a:r>
+              <a:rPr lang="ja-JP" altLang="en-US" dirty="0"/>
+              <a:t>テストデータその</a:t>
+            </a:r>
+            <a:r>
+              <a:rPr lang="en-US" altLang="ja-JP" dirty="0"/>
+              <a:t>2</a:t>
+            </a:r>
+            <a:r>
+              <a:rPr lang="ja-JP" altLang="en-US" dirty="0"/>
+              <a:t>でのルールの選択を間違えても正解するケースを分析</a:t>
+            </a:r>
+            <a:endParaRPr kumimoji="1" lang="en-US" altLang="ja-JP" dirty="0"/>
+          </a:p>
+          <a:p>
+            <a:endParaRPr kumimoji="1" lang="ja-JP" altLang="en-US" dirty="0"/>
+          </a:p>
+          <a:p>
+            <a:r>
+              <a:rPr kumimoji="1" lang="ja-JP" altLang="en-US" dirty="0"/>
+              <a:t>推論過程の最初の誤りが発生する位置・原因を分析</a:t>
+            </a:r>
+            <a:endParaRPr kumimoji="1" lang="en-US" altLang="ja-JP" dirty="0"/>
+          </a:p>
+          <a:p>
+            <a:endParaRPr lang="en-US" altLang="ja-JP" dirty="0"/>
+          </a:p>
+        </p:txBody>
+      </p:sp>
+      <p:sp>
+        <p:nvSpPr>
+          <p:cNvPr id="4" name="スライド番号プレースホルダー 3">
+            <a:extLst>
+              <a:ext uri="{FF2B5EF4-FFF2-40B4-BE49-F238E27FC236}">
+                <a16:creationId xmlns:a16="http://schemas.microsoft.com/office/drawing/2014/main" id="{92CC3E0A-FCC4-6102-0CD1-6E203FE7993E}"/>
+              </a:ext>
+            </a:extLst>
+          </p:cNvPr>
+          <p:cNvSpPr>
+            <a:spLocks noGrp="1"/>
+          </p:cNvSpPr>
+          <p:nvPr>
+            <p:ph type="sldNum" sz="quarter" idx="12"/>
+          </p:nvPr>
+        </p:nvSpPr>
+        <p:spPr/>
+        <p:txBody>
+          <a:bodyPr/>
+          <a:lstStyle/>
+          <a:p>
+            <a:fld id="{10649E7B-FC1B-418B-9B6A-00859DB1DEE8}" type="slidenum">
+              <a:rPr kumimoji="1" lang="ja-JP" altLang="en-US" smtClean="0"/>
+              <a:t>48</a:t>
+            </a:fld>
+            <a:endParaRPr kumimoji="1" lang="ja-JP" altLang="en-US"/>
+          </a:p>
+        </p:txBody>
+      </p:sp>
+    </p:spTree>
+    <p:extLst>
+      <p:ext uri="{BB962C8B-B14F-4D97-AF65-F5344CB8AC3E}">
+        <p14:creationId xmlns:p14="http://schemas.microsoft.com/office/powerpoint/2010/main" val="2055481314"/>
       </p:ext>
     </p:extLst>
   </p:cSld>
@@ -19907,7 +19988,7 @@
           <p:cNvPr id="2" name="タイトル 1">
             <a:extLst>
               <a:ext uri="{FF2B5EF4-FFF2-40B4-BE49-F238E27FC236}">
-                <a16:creationId xmlns:a16="http://schemas.microsoft.com/office/drawing/2014/main" id="{E6E69329-AF1E-667F-1EA5-4ED2C221D285}"/>
+                <a16:creationId xmlns:a16="http://schemas.microsoft.com/office/drawing/2014/main" id="{A5959B89-0CB7-D762-0215-ACF53DC80765}"/>
               </a:ext>
             </a:extLst>
           </p:cNvPr>
@@ -19925,7 +20006,7 @@
           <a:p>
             <a:r>
               <a:rPr kumimoji="1" lang="ja-JP" altLang="en-US" dirty="0"/>
-              <a:t>今後の課題</a:t>
+              <a:t>実験の改善点</a:t>
             </a:r>
           </a:p>
         </p:txBody>
@@ -19935,7 +20016,7 @@
           <p:cNvPr id="3" name="コンテンツ プレースホルダー 2">
             <a:extLst>
               <a:ext uri="{FF2B5EF4-FFF2-40B4-BE49-F238E27FC236}">
-                <a16:creationId xmlns:a16="http://schemas.microsoft.com/office/drawing/2014/main" id="{36FA4F64-8AB9-3F80-0D97-3E540A81AE53}"/>
+                <a16:creationId xmlns:a16="http://schemas.microsoft.com/office/drawing/2014/main" id="{FE690461-7056-8E83-E806-6396C50A43DE}"/>
               </a:ext>
             </a:extLst>
           </p:cNvPr>
@@ -19953,36 +20034,27 @@
           <a:p>
             <a:r>
               <a:rPr lang="ja-JP" altLang="en-US" dirty="0"/>
-              <a:t>テストデータその</a:t>
+              <a:t>問題文の部分も </a:t>
             </a:r>
             <a:r>
               <a:rPr lang="en-US" altLang="ja-JP" dirty="0"/>
-              <a:t>2</a:t>
+              <a:t>loss</a:t>
             </a:r>
             <a:r>
               <a:rPr lang="ja-JP" altLang="en-US" dirty="0"/>
-              <a:t>でのルールの選択を間違えても正解するケースを分析</a:t>
-            </a:r>
-            <a:endParaRPr kumimoji="1" lang="en-US" altLang="ja-JP" dirty="0"/>
-          </a:p>
-          <a:p>
-            <a:endParaRPr kumimoji="1" lang="ja-JP" altLang="en-US" dirty="0"/>
-          </a:p>
-          <a:p>
-            <a:r>
-              <a:rPr kumimoji="1" lang="ja-JP" altLang="en-US" dirty="0"/>
-              <a:t>推論過程の最初の誤りが発生する位置・原因を分析 </a:t>
-            </a:r>
-            <a:endParaRPr kumimoji="1" lang="en-US" altLang="ja-JP" dirty="0"/>
-          </a:p>
-          <a:p>
-            <a:endParaRPr kumimoji="1" lang="ja-JP" altLang="en-US" dirty="0"/>
-          </a:p>
-          <a:p>
-            <a:r>
-              <a:rPr kumimoji="1" lang="ja-JP" altLang="en-US" dirty="0"/>
-              <a:t>学習時に頻出した処理への選択の偏りや未学習処理の生成について分析</a:t>
-            </a:r>
+              <a:t>の計算に含めない</a:t>
+            </a:r>
+            <a:endParaRPr lang="en-US" altLang="ja-JP" dirty="0"/>
+          </a:p>
+          <a:p>
+            <a:endParaRPr lang="en-US" altLang="ja-JP" dirty="0"/>
+          </a:p>
+          <a:p>
+            <a:r>
+              <a:rPr lang="ja-JP" altLang="en-US" dirty="0"/>
+              <a:t>教師データの偏り</a:t>
+            </a:r>
+            <a:endParaRPr lang="en-US" altLang="ja-JP" dirty="0"/>
           </a:p>
         </p:txBody>
       </p:sp>
@@ -19991,7 +20063,7 @@
           <p:cNvPr id="4" name="スライド番号プレースホルダー 3">
             <a:extLst>
               <a:ext uri="{FF2B5EF4-FFF2-40B4-BE49-F238E27FC236}">
-                <a16:creationId xmlns:a16="http://schemas.microsoft.com/office/drawing/2014/main" id="{92CC3E0A-FCC4-6102-0CD1-6E203FE7993E}"/>
+                <a16:creationId xmlns:a16="http://schemas.microsoft.com/office/drawing/2014/main" id="{27DC1D97-E555-A2C1-A739-D33B70FE3928}"/>
               </a:ext>
             </a:extLst>
           </p:cNvPr>
@@ -20018,7 +20090,7 @@
     </p:spTree>
     <p:extLst>
       <p:ext uri="{BB962C8B-B14F-4D97-AF65-F5344CB8AC3E}">
-        <p14:creationId xmlns:p14="http://schemas.microsoft.com/office/powerpoint/2010/main" val="2055481314"/>
+        <p14:creationId xmlns:p14="http://schemas.microsoft.com/office/powerpoint/2010/main" val="3089590952"/>
       </p:ext>
     </p:extLst>
   </p:cSld>

--- a/生成AIの追加学習による問題.pptx
+++ b/生成AIの追加学習による問題.pptx
@@ -5,10 +5,10 @@
     <p:sldMasterId id="2147483648" r:id="rId1"/>
   </p:sldMasterIdLst>
   <p:notesMasterIdLst>
-    <p:notesMasterId r:id="rId52"/>
+    <p:notesMasterId r:id="rId53"/>
   </p:notesMasterIdLst>
   <p:handoutMasterIdLst>
-    <p:handoutMasterId r:id="rId53"/>
+    <p:handoutMasterId r:id="rId54"/>
   </p:handoutMasterIdLst>
   <p:sldIdLst>
     <p:sldId id="256" r:id="rId2"/>
@@ -61,6 +61,7 @@
     <p:sldId id="323" r:id="rId49"/>
     <p:sldId id="331" r:id="rId50"/>
     <p:sldId id="284" r:id="rId51"/>
+    <p:sldId id="332" r:id="rId52"/>
   </p:sldIdLst>
   <p:sldSz cx="12192000" cy="6858000"/>
   <p:notesSz cx="6858000" cy="9144000"/>
@@ -6461,7 +6462,7 @@
             <a:pPr lvl="1"/>
             <a:r>
               <a:rPr kumimoji="1" lang="ja-JP" altLang="en-US" dirty="0"/>
-              <a:t>複雑な指示で学習すると単純な指示にも対応できる一方、単純な指示から複雑な指示への対応は難しいことが示された。</a:t>
+              <a:t>複雑な指示で学習すると単純な指示にも対応できる一方、単純な指示から複雑な指示への対応は難しいことが示された</a:t>
             </a:r>
             <a:endParaRPr kumimoji="1" lang="en-US" altLang="ja-JP" dirty="0"/>
           </a:p>
@@ -6484,7 +6485,7 @@
             </a:r>
             <a:r>
               <a:rPr kumimoji="1" lang="ja-JP" altLang="en-US" dirty="0"/>
-              <a:t>を追加学習した研究。</a:t>
+              <a:t>を追加学習した研究</a:t>
             </a:r>
             <a:endParaRPr kumimoji="1" lang="en-US" altLang="ja-JP" dirty="0"/>
           </a:p>
@@ -6492,7 +6493,7 @@
             <a:pPr lvl="1"/>
             <a:r>
               <a:rPr kumimoji="1" lang="ja-JP" altLang="en-US" dirty="0"/>
-              <a:t>処理の順序を含むデータで追加学習することで、複雑な指示や未知の問題への対応能力が向上した。</a:t>
+              <a:t>処理の順序を含むデータで追加学習することで、複雑な指示や未知の問題への対応能力が向上</a:t>
             </a:r>
             <a:endParaRPr kumimoji="1" lang="en-US" altLang="ja-JP" dirty="0"/>
           </a:p>
@@ -20474,6 +20475,129 @@
     <p:extLst>
       <p:ext uri="{BB962C8B-B14F-4D97-AF65-F5344CB8AC3E}">
         <p14:creationId xmlns:p14="http://schemas.microsoft.com/office/powerpoint/2010/main" val="3091403255"/>
+      </p:ext>
+    </p:extLst>
+  </p:cSld>
+  <p:clrMapOvr>
+    <a:masterClrMapping/>
+  </p:clrMapOvr>
+</p:sld>
+</file>
+
+<file path=ppt/slides/slide51.xml><?xml version="1.0" encoding="utf-8"?>
+<p:sld xmlns:a="http://schemas.openxmlformats.org/drawingml/2006/main" xmlns:r="http://schemas.openxmlformats.org/officeDocument/2006/relationships" xmlns:p="http://schemas.openxmlformats.org/presentationml/2006/main">
+  <p:cSld>
+    <p:spTree>
+      <p:nvGrpSpPr>
+        <p:cNvPr id="1" name=""/>
+        <p:cNvGrpSpPr/>
+        <p:nvPr/>
+      </p:nvGrpSpPr>
+      <p:grpSpPr>
+        <a:xfrm>
+          <a:off x="0" y="0"/>
+          <a:ext cx="0" cy="0"/>
+          <a:chOff x="0" y="0"/>
+          <a:chExt cx="0" cy="0"/>
+        </a:xfrm>
+      </p:grpSpPr>
+      <p:sp>
+        <p:nvSpPr>
+          <p:cNvPr id="2" name="タイトル 1">
+            <a:extLst>
+              <a:ext uri="{FF2B5EF4-FFF2-40B4-BE49-F238E27FC236}">
+                <a16:creationId xmlns:a16="http://schemas.microsoft.com/office/drawing/2014/main" id="{71BC79A2-AA51-8388-6EAA-30FC6DDD4B90}"/>
+              </a:ext>
+            </a:extLst>
+          </p:cNvPr>
+          <p:cNvSpPr>
+            <a:spLocks noGrp="1"/>
+          </p:cNvSpPr>
+          <p:nvPr>
+            <p:ph type="title"/>
+          </p:nvPr>
+        </p:nvSpPr>
+        <p:spPr/>
+        <p:txBody>
+          <a:bodyPr/>
+          <a:lstStyle/>
+          <a:p>
+            <a:endParaRPr kumimoji="1" lang="ja-JP" altLang="en-US"/>
+          </a:p>
+        </p:txBody>
+      </p:sp>
+      <p:pic>
+        <p:nvPicPr>
+          <p:cNvPr id="6" name="コンテンツ プレースホルダー 5">
+            <a:extLst>
+              <a:ext uri="{FF2B5EF4-FFF2-40B4-BE49-F238E27FC236}">
+                <a16:creationId xmlns:a16="http://schemas.microsoft.com/office/drawing/2014/main" id="{50826EF8-D7D1-4B52-AE51-7273359F02B9}"/>
+              </a:ext>
+            </a:extLst>
+          </p:cNvPr>
+          <p:cNvPicPr>
+            <a:picLocks noGrp="1" noChangeAspect="1"/>
+          </p:cNvPicPr>
+          <p:nvPr>
+            <p:ph idx="1"/>
+          </p:nvPr>
+        </p:nvPicPr>
+        <p:blipFill>
+          <a:blip r:embed="rId2">
+            <a:extLst>
+              <a:ext uri="{28A0092B-C50C-407E-A947-70E740481C1C}">
+                <a14:useLocalDpi xmlns:a14="http://schemas.microsoft.com/office/drawing/2010/main" val="0"/>
+              </a:ext>
+            </a:extLst>
+          </a:blip>
+          <a:srcRect l="29314" t="53484" r="53530" b="30901"/>
+          <a:stretch>
+            <a:fillRect/>
+          </a:stretch>
+        </p:blipFill>
+        <p:spPr>
+          <a:xfrm>
+            <a:off x="3187700" y="1940059"/>
+            <a:ext cx="5816600" cy="2977881"/>
+          </a:xfrm>
+          <a:prstGeom prst="rect">
+            <a:avLst/>
+          </a:prstGeom>
+        </p:spPr>
+      </p:pic>
+      <p:sp>
+        <p:nvSpPr>
+          <p:cNvPr id="4" name="スライド番号プレースホルダー 3">
+            <a:extLst>
+              <a:ext uri="{FF2B5EF4-FFF2-40B4-BE49-F238E27FC236}">
+                <a16:creationId xmlns:a16="http://schemas.microsoft.com/office/drawing/2014/main" id="{C1B4E658-4F5B-7147-9B91-D09E7CEB44AF}"/>
+              </a:ext>
+            </a:extLst>
+          </p:cNvPr>
+          <p:cNvSpPr>
+            <a:spLocks noGrp="1"/>
+          </p:cNvSpPr>
+          <p:nvPr>
+            <p:ph type="sldNum" sz="quarter" idx="12"/>
+          </p:nvPr>
+        </p:nvSpPr>
+        <p:spPr/>
+        <p:txBody>
+          <a:bodyPr/>
+          <a:lstStyle/>
+          <a:p>
+            <a:fld id="{10649E7B-FC1B-418B-9B6A-00859DB1DEE8}" type="slidenum">
+              <a:rPr kumimoji="1" lang="ja-JP" altLang="en-US" smtClean="0"/>
+              <a:t>51</a:t>
+            </a:fld>
+            <a:endParaRPr kumimoji="1" lang="ja-JP" altLang="en-US"/>
+          </a:p>
+        </p:txBody>
+      </p:sp>
+    </p:spTree>
+    <p:extLst>
+      <p:ext uri="{BB962C8B-B14F-4D97-AF65-F5344CB8AC3E}">
+        <p14:creationId xmlns:p14="http://schemas.microsoft.com/office/powerpoint/2010/main" val="3357779962"/>
       </p:ext>
     </p:extLst>
   </p:cSld>

--- a/生成AIの追加学習による問題.pptx
+++ b/生成AIの追加学習による問題.pptx
@@ -8380,11 +8380,7 @@
             </a:r>
             <a:r>
               <a:rPr kumimoji="1" lang="en-US" altLang="ja-JP" dirty="0"/>
-              <a:t>5</a:t>
-            </a:r>
-            <a:r>
-              <a:rPr lang="en-US" altLang="ja-JP" dirty="0"/>
-              <a:t>2</a:t>
+              <a:t>50</a:t>
             </a:r>
             <a:r>
               <a:rPr kumimoji="1" lang="ja-JP" altLang="en-US" dirty="0"/>
@@ -8402,7 +8398,7 @@
             </a:r>
             <a:r>
               <a:rPr lang="en-US" altLang="ja-JP" dirty="0"/>
-              <a:t>72</a:t>
+              <a:t>70</a:t>
             </a:r>
             <a:r>
               <a:rPr lang="ja-JP" altLang="en-US" dirty="0"/>
@@ -9724,7 +9720,7 @@
             </a:r>
             <a:r>
               <a:rPr kumimoji="1" lang="en-US" altLang="ja-JP" dirty="0"/>
-              <a:t>72</a:t>
+              <a:t>70</a:t>
             </a:r>
             <a:r>
               <a:rPr kumimoji="1" lang="ja-JP" altLang="en-US" dirty="0"/>
@@ -9760,7 +9756,7 @@
             </a:r>
             <a:r>
               <a:rPr kumimoji="1" lang="en-US" altLang="ja-JP" dirty="0"/>
-              <a:t>3600</a:t>
+              <a:t>3500</a:t>
             </a:r>
             <a:r>
               <a:rPr kumimoji="1" lang="ja-JP" altLang="en-US" dirty="0"/>
@@ -9951,7 +9947,7 @@
             </a:r>
             <a:r>
               <a:rPr lang="en-US" altLang="ja-JP" dirty="0"/>
-              <a:t>720</a:t>
+              <a:t>700</a:t>
             </a:r>
             <a:r>
               <a:rPr lang="ja-JP" altLang="en-US" dirty="0"/>
@@ -9997,7 +9993,7 @@
             </a:r>
             <a:r>
               <a:rPr lang="en-US" altLang="ja-JP" dirty="0"/>
-              <a:t>48</a:t>
+              <a:t>46</a:t>
             </a:r>
             <a:r>
               <a:rPr lang="ja-JP" altLang="en-US" dirty="0"/>
@@ -10029,7 +10025,7 @@
             </a:r>
             <a:r>
               <a:rPr lang="en-US" altLang="ja-JP" dirty="0"/>
-              <a:t>480</a:t>
+              <a:t>460</a:t>
             </a:r>
             <a:r>
               <a:rPr lang="ja-JP" altLang="en-US" dirty="0"/>
@@ -10794,21 +10790,6 @@
             <a:r>
               <a:rPr lang="ja-JP" altLang="en-US" dirty="0"/>
               <a:t>問題解決能力の評価実験</a:t>
-            </a:r>
-            <a:br>
-              <a:rPr lang="en-US" altLang="ja-JP" dirty="0"/>
-            </a:br>
-            <a:r>
-              <a:rPr lang="en-US" altLang="ja-JP" dirty="0"/>
-              <a:t>(</a:t>
-            </a:r>
-            <a:r>
-              <a:rPr lang="ja-JP" altLang="en-US" dirty="0"/>
-              <a:t>やり直しが必要</a:t>
-            </a:r>
-            <a:r>
-              <a:rPr lang="en-US" altLang="ja-JP" dirty="0"/>
-              <a:t>)</a:t>
             </a:r>
             <a:endParaRPr kumimoji="1" lang="ja-JP" altLang="en-US" dirty="0"/>
           </a:p>
@@ -15788,7 +15769,7 @@
           <p:nvPr>
             <p:extLst>
               <p:ext uri="{D42A27DB-BD31-4B8C-83A1-F6EECF244321}">
-                <p14:modId xmlns:p14="http://schemas.microsoft.com/office/powerpoint/2010/main" val="2176279908"/>
+                <p14:modId xmlns:p14="http://schemas.microsoft.com/office/powerpoint/2010/main" val="898504719"/>
               </p:ext>
             </p:extLst>
           </p:nvPr>
@@ -15947,7 +15928,7 @@
                       </a:r>
                       <a:r>
                         <a:rPr lang="en-US" altLang="ja-JP" dirty="0"/>
-                        <a:t>2</a:t>
+                        <a:t>1</a:t>
                       </a:r>
                       <a:r>
                         <a:rPr lang="ja-JP" altLang="ja-JP" dirty="0"/>
@@ -15986,7 +15967,7 @@
                           <a:ea typeface="+mn-ea"/>
                           <a:cs typeface="+mn-cs"/>
                         </a:rPr>
-                        <a:t>6(3.8%)</a:t>
+                        <a:t>6(3.7%)</a:t>
                       </a:r>
                       <a:endParaRPr kumimoji="1" lang="ja-JP" altLang="en-US" dirty="0"/>
                     </a:p>
@@ -16001,7 +15982,7 @@
                       <a:pPr algn="ctr"/>
                       <a:r>
                         <a:rPr kumimoji="1" lang="en-US" altLang="ja-JP" dirty="0"/>
-                        <a:t>554 (79.1%)</a:t>
+                        <a:t>554 (79.9%)</a:t>
                       </a:r>
                       <a:endParaRPr kumimoji="1" lang="ja-JP" altLang="en-US" dirty="0"/>
                     </a:p>
@@ -16058,7 +16039,7 @@
                           <a:ea typeface="+mn-ea"/>
                           <a:cs typeface="+mn-cs"/>
                         </a:rPr>
-                        <a:t>(5.2%)</a:t>
+                        <a:t>(5.1%)</a:t>
                       </a:r>
                       <a:endParaRPr kumimoji="1" lang="ja-JP" altLang="en-US" dirty="0"/>
                     </a:p>
@@ -16093,7 +16074,7 @@
                           <a:ea typeface="+mn-ea"/>
                           <a:cs typeface="+mn-cs"/>
                         </a:rPr>
-                        <a:t>(15.9%)</a:t>
+                        <a:t>(15.8%)</a:t>
                       </a:r>
                       <a:endParaRPr kumimoji="1" lang="ja-JP" altLang="en-US" dirty="0"/>
                     </a:p>
@@ -16108,7 +16089,7 @@
                       <a:pPr algn="ctr"/>
                       <a:r>
                         <a:rPr kumimoji="1" lang="en-US" altLang="ja-JP" dirty="0"/>
-                        <a:t>146 (20.9%)</a:t>
+                        <a:t>146 (21%)</a:t>
                       </a:r>
                       <a:endParaRPr kumimoji="1" lang="ja-JP" altLang="en-US" dirty="0"/>
                     </a:p>
@@ -16149,7 +16130,7 @@
                       </a:r>
                       <a:r>
                         <a:rPr kumimoji="1" lang="en-US" altLang="ja-JP" dirty="0"/>
-                        <a:t>(80.4%)</a:t>
+                        <a:t>(81.2%)</a:t>
                       </a:r>
                       <a:endParaRPr kumimoji="1" lang="ja-JP" altLang="en-US" dirty="0"/>
                     </a:p>
@@ -16164,7 +16145,7 @@
                       <a:pPr algn="ctr"/>
                       <a:r>
                         <a:rPr kumimoji="1" lang="en-US" altLang="ja-JP" dirty="0"/>
-                        <a:t>137(19.6%)</a:t>
+                        <a:t>137(19.7%)</a:t>
                       </a:r>
                       <a:endParaRPr kumimoji="1" lang="ja-JP" altLang="en-US" dirty="0"/>
                     </a:p>
@@ -16290,7 +16271,7 @@
             </a:r>
             <a:r>
               <a:rPr kumimoji="1" lang="en-US" altLang="ja-JP" dirty="0"/>
-              <a:t>521 / 554 = 94%</a:t>
+              <a:t>521 / 557 = 93.5%</a:t>
             </a:r>
           </a:p>
           <a:p>
@@ -16300,7 +16281,7 @@
             </a:r>
             <a:r>
               <a:rPr kumimoji="1" lang="en-US" altLang="ja-JP" dirty="0"/>
-              <a:t>36 / 146 = 24.7% </a:t>
+              <a:t>36 / 146 = 24.6% </a:t>
             </a:r>
           </a:p>
           <a:p>
@@ -16503,7 +16484,7 @@
           <p:nvPr>
             <p:extLst>
               <p:ext uri="{D42A27DB-BD31-4B8C-83A1-F6EECF244321}">
-                <p14:modId xmlns:p14="http://schemas.microsoft.com/office/powerpoint/2010/main" val="4131230018"/>
+                <p14:modId xmlns:p14="http://schemas.microsoft.com/office/powerpoint/2010/main" val="2131085317"/>
               </p:ext>
             </p:extLst>
           </p:nvPr>
@@ -16638,7 +16619,15 @@
                       <a:pPr algn="ctr"/>
                       <a:r>
                         <a:rPr lang="ja-JP" altLang="ja-JP" dirty="0"/>
-                        <a:t>(74.5%)</a:t>
+                        <a:t>(74.</a:t>
+                      </a:r>
+                      <a:r>
+                        <a:rPr lang="en-US" altLang="ja-JP" dirty="0"/>
+                        <a:t>4</a:t>
+                      </a:r>
+                      <a:r>
+                        <a:rPr lang="ja-JP" altLang="ja-JP" dirty="0"/>
+                        <a:t>%)</a:t>
                       </a:r>
                       <a:endParaRPr kumimoji="1" lang="ja-JP" altLang="en-US" dirty="0"/>
                     </a:p>
@@ -16660,7 +16649,15 @@
                       <a:pPr algn="ctr"/>
                       <a:r>
                         <a:rPr lang="ja-JP" altLang="ja-JP" dirty="0"/>
-                        <a:t>(6.6%)</a:t>
+                        <a:t>(6.</a:t>
+                      </a:r>
+                      <a:r>
+                        <a:rPr lang="en-US" altLang="ja-JP" dirty="0"/>
+                        <a:t>5</a:t>
+                      </a:r>
+                      <a:r>
+                        <a:rPr lang="ja-JP" altLang="ja-JP" dirty="0"/>
+                        <a:t>%)</a:t>
                       </a:r>
                       <a:endParaRPr kumimoji="1" lang="ja-JP" altLang="en-US" dirty="0"/>
                     </a:p>
@@ -16682,7 +16679,7 @@
                       <a:pPr algn="ctr"/>
                       <a:r>
                         <a:rPr kumimoji="1" lang="en-US" altLang="ja-JP" dirty="0"/>
-                        <a:t>(81.1%)</a:t>
+                        <a:t>(81%)</a:t>
                       </a:r>
                       <a:endParaRPr kumimoji="1" lang="ja-JP" altLang="en-US" dirty="0"/>
                     </a:p>
@@ -16741,7 +16738,15 @@
                       </a:r>
                       <a:r>
                         <a:rPr lang="ja-JP" altLang="ja-JP" dirty="0"/>
-                        <a:t>(12.9%)</a:t>
+                        <a:t>(12.</a:t>
+                      </a:r>
+                      <a:r>
+                        <a:rPr lang="en-US" altLang="ja-JP" dirty="0"/>
+                        <a:t>8</a:t>
+                      </a:r>
+                      <a:r>
+                        <a:rPr lang="ja-JP" altLang="ja-JP" dirty="0"/>
+                        <a:t>%)</a:t>
                       </a:r>
                       <a:endParaRPr kumimoji="1" lang="ja-JP" altLang="en-US" dirty="0"/>
                     </a:p>
@@ -16807,7 +16812,7 @@
                       <a:pPr algn="ctr"/>
                       <a:r>
                         <a:rPr kumimoji="1" lang="en-US" altLang="ja-JP" dirty="0"/>
-                        <a:t>136 (19.5%)</a:t>
+                        <a:t>136 (19.4%)</a:t>
                       </a:r>
                       <a:endParaRPr kumimoji="1" lang="ja-JP" altLang="en-US" dirty="0"/>
                     </a:p>
@@ -16934,7 +16939,7 @@
             <a:pPr lvl="1"/>
             <a:r>
               <a:rPr lang="ja-JP" altLang="en-US" dirty="0"/>
-              <a:t>ユーザの指示に基づき、文章・画像・プログラムコードなどの新しいコンテンツを生成する</a:t>
+              <a:t>ユーザーの指示に基づき、文章・画像・プログラムコードなどの新しいコンテンツを生成する</a:t>
             </a:r>
             <a:r>
               <a:rPr lang="en-US" altLang="ja-JP" dirty="0"/>
@@ -19723,11 +19728,11 @@
             </a:r>
             <a:r>
               <a:rPr lang="ja-JP" altLang="en-US" dirty="0"/>
-              <a:t>は</a:t>
+              <a:t>はテストデータその</a:t>
             </a:r>
             <a:r>
               <a:rPr lang="en-US" altLang="ja-JP" dirty="0"/>
-              <a:t>IID</a:t>
+              <a:t>1</a:t>
             </a:r>
             <a:r>
               <a:rPr lang="ja-JP" altLang="en-US" dirty="0"/>
@@ -19735,15 +19740,15 @@
             </a:r>
             <a:r>
               <a:rPr lang="en-US" altLang="ja-JP" dirty="0"/>
-              <a:t>80%</a:t>
+              <a:t>80.4%</a:t>
             </a:r>
             <a:r>
               <a:rPr lang="ja-JP" altLang="en-US" dirty="0"/>
-              <a:t>と最も高いが、</a:t>
+              <a:t>と最も高いが、テストデータその</a:t>
             </a:r>
             <a:r>
               <a:rPr lang="en-US" altLang="ja-JP" dirty="0"/>
-              <a:t>OOD</a:t>
+              <a:t>2</a:t>
             </a:r>
             <a:r>
               <a:rPr lang="ja-JP" altLang="en-US" dirty="0"/>
@@ -19751,7 +19756,7 @@
             </a:r>
             <a:r>
               <a:rPr lang="en-US" altLang="ja-JP" dirty="0"/>
-              <a:t>20%</a:t>
+              <a:t>17.7%</a:t>
             </a:r>
             <a:r>
               <a:rPr lang="ja-JP" altLang="en-US" dirty="0"/>
@@ -19767,7 +19772,7 @@
             </a:r>
             <a:r>
               <a:rPr lang="en-US" altLang="ja-JP" dirty="0"/>
-              <a:t>41%</a:t>
+              <a:t>39.7%</a:t>
             </a:r>
             <a:r>
               <a:rPr lang="ja-JP" altLang="en-US" dirty="0"/>
@@ -20522,7 +20527,7 @@
           <a:bodyPr/>
           <a:lstStyle/>
           <a:p>
-            <a:endParaRPr kumimoji="1" lang="ja-JP" altLang="en-US"/>
+            <a:endParaRPr kumimoji="1" lang="ja-JP" altLang="en-US" dirty="0"/>
           </a:p>
         </p:txBody>
       </p:sp>
@@ -20557,7 +20562,7 @@
         </p:blipFill>
         <p:spPr>
           <a:xfrm>
-            <a:off x="3187700" y="1940059"/>
+            <a:off x="179164" y="2173262"/>
             <a:ext cx="5816600" cy="2977881"/>
           </a:xfrm>
           <a:prstGeom prst="rect">
@@ -20594,6 +20599,92 @@
           </a:p>
         </p:txBody>
       </p:sp>
+      <p:sp>
+        <p:nvSpPr>
+          <p:cNvPr id="3" name="フッター プレースホルダー 2">
+            <a:extLst>
+              <a:ext uri="{FF2B5EF4-FFF2-40B4-BE49-F238E27FC236}">
+                <a16:creationId xmlns:a16="http://schemas.microsoft.com/office/drawing/2014/main" id="{EE7BED2A-EC08-EC60-A25A-472E77EBE14F}"/>
+              </a:ext>
+            </a:extLst>
+          </p:cNvPr>
+          <p:cNvSpPr>
+            <a:spLocks noGrp="1"/>
+          </p:cNvSpPr>
+          <p:nvPr>
+            <p:ph type="ftr" sz="quarter" idx="11"/>
+          </p:nvPr>
+        </p:nvSpPr>
+        <p:spPr>
+          <a:xfrm>
+            <a:off x="1067823" y="6356350"/>
+            <a:ext cx="9855882" cy="365125"/>
+          </a:xfrm>
+        </p:spPr>
+        <p:txBody>
+          <a:bodyPr/>
+          <a:lstStyle/>
+          <a:p>
+            <a:r>
+              <a:rPr lang="en-US" altLang="ja-JP" dirty="0"/>
+              <a:t>4. </a:t>
+            </a:r>
+            <a:r>
+              <a:rPr lang="ja-JP" altLang="ja-JP" dirty="0"/>
+              <a:t>Chu, T., Zhai, Y., Yang, J., Tong, S., Xie, S., Schuurmans, D., ... &amp; Ma, Y. (2025). Sft memorizes, rl generalizes: A comparative study of foundation model post-training. </a:t>
+            </a:r>
+            <a:r>
+              <a:rPr lang="ja-JP" altLang="ja-JP" i="1" dirty="0"/>
+              <a:t>arXiv preprint arXiv:2501.17161</a:t>
+            </a:r>
+            <a:r>
+              <a:rPr lang="ja-JP" altLang="ja-JP" dirty="0"/>
+              <a:t>.</a:t>
+            </a:r>
+            <a:endParaRPr lang="en-US" altLang="ja-JP" dirty="0"/>
+          </a:p>
+          <a:p>
+            <a:endParaRPr kumimoji="1" lang="ja-JP" altLang="en-US" dirty="0"/>
+          </a:p>
+        </p:txBody>
+      </p:sp>
+      <p:pic>
+        <p:nvPicPr>
+          <p:cNvPr id="7" name="図 6">
+            <a:extLst>
+              <a:ext uri="{FF2B5EF4-FFF2-40B4-BE49-F238E27FC236}">
+                <a16:creationId xmlns:a16="http://schemas.microsoft.com/office/drawing/2014/main" id="{EEC15A80-A4EA-4929-6AAF-962A87576C78}"/>
+              </a:ext>
+            </a:extLst>
+          </p:cNvPr>
+          <p:cNvPicPr>
+            <a:picLocks noChangeAspect="1"/>
+          </p:cNvPicPr>
+          <p:nvPr/>
+        </p:nvPicPr>
+        <p:blipFill>
+          <a:blip r:embed="rId3">
+            <a:extLst>
+              <a:ext uri="{28A0092B-C50C-407E-A947-70E740481C1C}">
+                <a14:useLocalDpi xmlns:a14="http://schemas.microsoft.com/office/drawing/2010/main" val="0"/>
+              </a:ext>
+            </a:extLst>
+          </a:blip>
+          <a:srcRect l="24619" t="20451" r="26321" b="10777"/>
+          <a:stretch>
+            <a:fillRect/>
+          </a:stretch>
+        </p:blipFill>
+        <p:spPr>
+          <a:xfrm>
+            <a:off x="6895813" y="1949126"/>
+            <a:ext cx="4345119" cy="3426151"/>
+          </a:xfrm>
+          <a:prstGeom prst="rect">
+            <a:avLst/>
+          </a:prstGeom>
+        </p:spPr>
+      </p:pic>
     </p:spTree>
     <p:extLst>
       <p:ext uri="{BB962C8B-B14F-4D97-AF65-F5344CB8AC3E}">

--- a/生成AIの追加学習による問題.pptx
+++ b/生成AIの追加学習による問題.pptx
@@ -5,10 +5,10 @@
     <p:sldMasterId id="2147483648" r:id="rId1"/>
   </p:sldMasterIdLst>
   <p:notesMasterIdLst>
-    <p:notesMasterId r:id="rId53"/>
+    <p:notesMasterId r:id="rId54"/>
   </p:notesMasterIdLst>
   <p:handoutMasterIdLst>
-    <p:handoutMasterId r:id="rId54"/>
+    <p:handoutMasterId r:id="rId55"/>
   </p:handoutMasterIdLst>
   <p:sldIdLst>
     <p:sldId id="256" r:id="rId2"/>
@@ -54,14 +54,15 @@
     <p:sldId id="315" r:id="rId42"/>
     <p:sldId id="316" r:id="rId43"/>
     <p:sldId id="317" r:id="rId44"/>
-    <p:sldId id="319" r:id="rId45"/>
-    <p:sldId id="320" r:id="rId46"/>
-    <p:sldId id="321" r:id="rId47"/>
-    <p:sldId id="322" r:id="rId48"/>
-    <p:sldId id="323" r:id="rId49"/>
-    <p:sldId id="331" r:id="rId50"/>
-    <p:sldId id="332" r:id="rId51"/>
-    <p:sldId id="333" r:id="rId52"/>
+    <p:sldId id="334" r:id="rId45"/>
+    <p:sldId id="319" r:id="rId46"/>
+    <p:sldId id="320" r:id="rId47"/>
+    <p:sldId id="321" r:id="rId48"/>
+    <p:sldId id="322" r:id="rId49"/>
+    <p:sldId id="323" r:id="rId50"/>
+    <p:sldId id="331" r:id="rId51"/>
+    <p:sldId id="332" r:id="rId52"/>
+    <p:sldId id="333" r:id="rId53"/>
   </p:sldIdLst>
   <p:sldSz cx="12192000" cy="6858000"/>
   <p:notesSz cx="6858000" cy="9144000"/>
@@ -3880,10 +3881,40 @@
             </a:r>
           </a:p>
           <a:p>
+            <a:pPr marL="0" marR="0" lvl="0" indent="0" algn="l" defTabSz="914400" rtl="0" eaLnBrk="1" fontAlgn="auto" latinLnBrk="0" hangingPunct="1">
+              <a:lnSpc>
+                <a:spcPct val="100000"/>
+              </a:lnSpc>
+              <a:spcBef>
+                <a:spcPts val="0"/>
+              </a:spcBef>
+              <a:spcAft>
+                <a:spcPts val="0"/>
+              </a:spcAft>
+              <a:buClrTx/>
+              <a:buSzTx/>
+              <a:buFontTx/>
+              <a:buNone/>
+              <a:tabLst/>
+              <a:defRPr/>
+            </a:pPr>
             <a:r>
               <a:rPr lang="ja-JP" altLang="ja-JP" dirty="0"/>
-              <a:t>該当する例は2例と少数ですが、学習した処理を単純に再現するだけではない出力も見られました。</a:t>
-            </a:r>
+              <a:t>該当する例は2例と少数で</a:t>
+            </a:r>
+            <a:r>
+              <a:rPr lang="ja-JP" altLang="en-US" dirty="0"/>
+              <a:t>、</a:t>
+            </a:r>
+            <a:r>
+              <a:rPr lang="ja-JP" altLang="ja-JP" sz="1200" dirty="0"/>
+              <a:t>単なる誤ったルール</a:t>
+            </a:r>
+            <a:r>
+              <a:rPr lang="ja-JP" altLang="en-US" sz="1200" dirty="0"/>
+              <a:t>でした。</a:t>
+            </a:r>
+            <a:endParaRPr lang="en-US" altLang="ja-JP" sz="1200" dirty="0"/>
           </a:p>
           <a:p>
             <a:endParaRPr kumimoji="1" lang="ja-JP" altLang="en-US" dirty="0"/>
@@ -4727,7 +4758,13 @@
   <p:cSld>
     <p:spTree>
       <p:nvGrpSpPr>
-        <p:cNvPr id="1" name=""/>
+        <p:cNvPr id="1" name="">
+          <a:extLst>
+            <a:ext uri="{FF2B5EF4-FFF2-40B4-BE49-F238E27FC236}">
+              <a16:creationId xmlns:a16="http://schemas.microsoft.com/office/drawing/2014/main" id="{EE2975C3-B394-9CEE-D697-434B2DE0D7B0}"/>
+            </a:ext>
+          </a:extLst>
+        </p:cNvPr>
         <p:cNvGrpSpPr/>
         <p:nvPr/>
       </p:nvGrpSpPr>
@@ -4741,7 +4778,13 @@
       </p:grpSpPr>
       <p:sp>
         <p:nvSpPr>
-          <p:cNvPr id="2" name="スライド イメージ プレースホルダー 1"/>
+          <p:cNvPr id="2" name="スライド イメージ プレースホルダー 1">
+            <a:extLst>
+              <a:ext uri="{FF2B5EF4-FFF2-40B4-BE49-F238E27FC236}">
+                <a16:creationId xmlns:a16="http://schemas.microsoft.com/office/drawing/2014/main" id="{AFDC914B-6C52-B401-4D07-3F002D6DBE35}"/>
+              </a:ext>
+            </a:extLst>
+          </p:cNvPr>
           <p:cNvSpPr>
             <a:spLocks noGrp="1" noRot="1" noChangeAspect="1"/>
           </p:cNvSpPr>
@@ -4753,7 +4796,13 @@
       </p:sp>
       <p:sp>
         <p:nvSpPr>
-          <p:cNvPr id="3" name="ノート プレースホルダー 2"/>
+          <p:cNvPr id="3" name="ノート プレースホルダー 2">
+            <a:extLst>
+              <a:ext uri="{FF2B5EF4-FFF2-40B4-BE49-F238E27FC236}">
+                <a16:creationId xmlns:a16="http://schemas.microsoft.com/office/drawing/2014/main" id="{898B7399-5C43-9240-5F05-7C43E9ADDC9B}"/>
+              </a:ext>
+            </a:extLst>
+          </p:cNvPr>
           <p:cNvSpPr>
             <a:spLocks noGrp="1"/>
           </p:cNvSpPr>
@@ -4776,7 +4825,13 @@
       </p:sp>
       <p:sp>
         <p:nvSpPr>
-          <p:cNvPr id="4" name="スライド番号プレースホルダー 3"/>
+          <p:cNvPr id="4" name="スライド番号プレースホルダー 3">
+            <a:extLst>
+              <a:ext uri="{FF2B5EF4-FFF2-40B4-BE49-F238E27FC236}">
+                <a16:creationId xmlns:a16="http://schemas.microsoft.com/office/drawing/2014/main" id="{F49A9CB2-2E0F-013E-75D2-406632F7CBC9}"/>
+              </a:ext>
+            </a:extLst>
+          </p:cNvPr>
           <p:cNvSpPr>
             <a:spLocks noGrp="1"/>
           </p:cNvSpPr>
@@ -4800,7 +4855,7 @@
     </p:spTree>
     <p:extLst>
       <p:ext uri="{BB962C8B-B14F-4D97-AF65-F5344CB8AC3E}">
-        <p14:creationId xmlns:p14="http://schemas.microsoft.com/office/powerpoint/2010/main" val="2412027110"/>
+        <p14:creationId xmlns:p14="http://schemas.microsoft.com/office/powerpoint/2010/main" val="4015592852"/>
       </p:ext>
     </p:extLst>
   </p:cSld>
@@ -4856,7 +4911,7 @@
           <a:p>
             <a:r>
               <a:rPr lang="ja-JP" altLang="ja-JP" dirty="0"/>
-              <a:t>この結果から、未知の組み合わせへの対応では、個々の処理を実行する能力よりも、既知の処理を適切に組み合わせる段階が重要な課題になっていると考えられます</a:t>
+              <a:t>以上は、訓練時と同じルールを用いたテストデータ1の分析でした。</a:t>
             </a:r>
             <a:endParaRPr kumimoji="1" lang="ja-JP" altLang="en-US" dirty="0"/>
           </a:p>
@@ -4888,7 +4943,7 @@
     </p:spTree>
     <p:extLst>
       <p:ext uri="{BB962C8B-B14F-4D97-AF65-F5344CB8AC3E}">
-        <p14:creationId xmlns:p14="http://schemas.microsoft.com/office/powerpoint/2010/main" val="442976831"/>
+        <p14:creationId xmlns:p14="http://schemas.microsoft.com/office/powerpoint/2010/main" val="2412027110"/>
       </p:ext>
     </p:extLst>
   </p:cSld>
@@ -4944,34 +4999,23 @@
           <a:p>
             <a:r>
               <a:rPr lang="ja-JP" altLang="ja-JP" dirty="0"/>
-              <a:t>ここまでの結果を踏まえて、まずRQ1について考察します。</a:t>
-            </a:r>
+              <a:t>個々の処理を正しく適用できても、未知の組み合わせへの対応では、適切な処理の組み合わせを選択できないケースが多く見られ</a:t>
+            </a:r>
+            <a:r>
+              <a:rPr lang="ja-JP" altLang="en-US" dirty="0"/>
+              <a:t>ました。</a:t>
+            </a:r>
+            <a:endParaRPr lang="en-US" altLang="ja-JP" dirty="0"/>
           </a:p>
           <a:p>
             <a:r>
               <a:rPr lang="ja-JP" altLang="ja-JP" dirty="0"/>
-              <a:t>どちらのSFTモデルでも、未知の組み合わせを含むテストデータ2の正解率は、ベースモデルより向上しました。</a:t>
-            </a:r>
-          </a:p>
-          <a:p>
-            <a:r>
-              <a:rPr lang="ja-JP" altLang="ja-JP" dirty="0"/>
-              <a:t>そのため、SFTによって、既知の処理を新しい組み合わせで利用する能力が、一定程度向上した可能性が示されました。</a:t>
-            </a:r>
-          </a:p>
-          <a:p>
-            <a:r>
-              <a:rPr lang="ja-JP" altLang="ja-JP" dirty="0"/>
-              <a:t>ただし、テストデータ2の正解率は、テストデータ1と比べると低くなっています。</a:t>
-            </a:r>
-          </a:p>
-          <a:p>
-            <a:r>
-              <a:rPr lang="ja-JP" altLang="ja-JP" dirty="0"/>
-              <a:t>そのため、獲得された能力は限定的であると考えられます。</a:t>
-            </a:r>
-          </a:p>
-          <a:p>
+              <a:t>このことから、既知の処理を適切に組み合わせることが課題となっている可能性があ</a:t>
+            </a:r>
+            <a:r>
+              <a:rPr lang="ja-JP" altLang="en-US" dirty="0"/>
+              <a:t>ります。</a:t>
+            </a:r>
             <a:endParaRPr kumimoji="1" lang="ja-JP" altLang="en-US" dirty="0"/>
           </a:p>
         </p:txBody>
@@ -5002,7 +5046,7 @@
     </p:spTree>
     <p:extLst>
       <p:ext uri="{BB962C8B-B14F-4D97-AF65-F5344CB8AC3E}">
-        <p14:creationId xmlns:p14="http://schemas.microsoft.com/office/powerpoint/2010/main" val="3015639325"/>
+        <p14:creationId xmlns:p14="http://schemas.microsoft.com/office/powerpoint/2010/main" val="442976831"/>
       </p:ext>
     </p:extLst>
   </p:cSld>
@@ -5058,25 +5102,31 @@
           <a:p>
             <a:r>
               <a:rPr lang="ja-JP" altLang="ja-JP" dirty="0"/>
-              <a:t>次にRQ2です。</a:t>
+              <a:t>ここまでの結果を踏まえて、まずRQ1について考察します。</a:t>
             </a:r>
           </a:p>
           <a:p>
             <a:r>
               <a:rPr lang="ja-JP" altLang="ja-JP" dirty="0"/>
-              <a:t>答え＋処理過程SFTは、訓練時と同じルールを使うテストデータ1では最も高い正解率となりました。</a:t>
+              <a:t>どちらのSFTモデルでも、未知の組み合わせを含むテストデータ2の正解率は、ベースモデルより向上しました。</a:t>
             </a:r>
           </a:p>
           <a:p>
             <a:r>
               <a:rPr lang="ja-JP" altLang="ja-JP" dirty="0"/>
-              <a:t>一方、未知の組み合わせを使うテストデータ2では、答えのみSFTを下回りました。</a:t>
+              <a:t>そのため、SFTによって、既知の処理を新しい組み合わせで利用する能力が、一定程度向上した可能性が示されました。</a:t>
             </a:r>
           </a:p>
           <a:p>
             <a:r>
               <a:rPr lang="ja-JP" altLang="ja-JP" dirty="0"/>
-              <a:t>このことから、処理過程を教師として与えることは、学習した問題への適応には有効である一方、新しい組み合わせへの汎化を必ずしも促進しない可能性が示されました。</a:t>
+              <a:t>ただし、テストデータ2の正解率は、テストデータ1と比べると低くなっています。</a:t>
+            </a:r>
+          </a:p>
+          <a:p>
+            <a:r>
+              <a:rPr lang="ja-JP" altLang="ja-JP" dirty="0"/>
+              <a:t>そのため、獲得された能力は限定的であると考えられます。</a:t>
             </a:r>
           </a:p>
           <a:p>
@@ -5110,7 +5160,7 @@
     </p:spTree>
     <p:extLst>
       <p:ext uri="{BB962C8B-B14F-4D97-AF65-F5344CB8AC3E}">
-        <p14:creationId xmlns:p14="http://schemas.microsoft.com/office/powerpoint/2010/main" val="422898034"/>
+        <p14:creationId xmlns:p14="http://schemas.microsoft.com/office/powerpoint/2010/main" val="3015639325"/>
       </p:ext>
     </p:extLst>
   </p:cSld>
@@ -5166,13 +5216,25 @@
           <a:p>
             <a:r>
               <a:rPr lang="ja-JP" altLang="ja-JP" dirty="0"/>
-              <a:t>今後は、テストデータ2において、分析したいと考えています。</a:t>
+              <a:t>次にRQ2です。</a:t>
             </a:r>
           </a:p>
           <a:p>
             <a:r>
               <a:rPr lang="ja-JP" altLang="ja-JP" dirty="0"/>
-              <a:t>また、推論過程のどの時点で最初の誤りが発生しているのか、その原因についても分析したいと考えています。</a:t>
+              <a:t>答え＋処理過程SFTは、訓練時と同じルールを使うテストデータ1では最も高い正解率となりました。</a:t>
+            </a:r>
+          </a:p>
+          <a:p>
+            <a:r>
+              <a:rPr lang="ja-JP" altLang="ja-JP" dirty="0"/>
+              <a:t>一方、未知の組み合わせを使うテストデータ2では、答えのみSFTを下回りました。</a:t>
+            </a:r>
+          </a:p>
+          <a:p>
+            <a:r>
+              <a:rPr lang="ja-JP" altLang="ja-JP" dirty="0"/>
+              <a:t>このことから、処理過程を教師として与えることは、学習した問題への適応には有効である一方、新しい組み合わせへの汎化を必ずしも促進しない可能性が示されました。</a:t>
             </a:r>
           </a:p>
           <a:p>
@@ -5206,7 +5268,7 @@
     </p:spTree>
     <p:extLst>
       <p:ext uri="{BB962C8B-B14F-4D97-AF65-F5344CB8AC3E}">
-        <p14:creationId xmlns:p14="http://schemas.microsoft.com/office/powerpoint/2010/main" val="3883626773"/>
+        <p14:creationId xmlns:p14="http://schemas.microsoft.com/office/powerpoint/2010/main" val="422898034"/>
       </p:ext>
     </p:extLst>
   </p:cSld>
@@ -5262,35 +5324,13 @@
           <a:p>
             <a:r>
               <a:rPr lang="ja-JP" altLang="ja-JP" dirty="0"/>
-              <a:t>また、実験方法についても改善が必要です。</a:t>
+              <a:t>今後は、テストデータ2において、分析したいと考えています。</a:t>
             </a:r>
           </a:p>
           <a:p>
             <a:r>
               <a:rPr lang="ja-JP" altLang="ja-JP" dirty="0"/>
-              <a:t>例えば、現在は問題文の部分も学習時の</a:t>
-            </a:r>
-            <a:r>
-              <a:rPr lang="ja-JP" altLang="en-US" dirty="0"/>
-              <a:t>モデルの調整</a:t>
-            </a:r>
-            <a:r>
-              <a:rPr lang="ja-JP" altLang="ja-JP" dirty="0"/>
-              <a:t>に含まれているため、今後は問題文を</a:t>
-            </a:r>
-            <a:r>
-              <a:rPr lang="ja-JP" altLang="en-US" dirty="0"/>
-              <a:t>モデルの調整</a:t>
-            </a:r>
-            <a:r>
-              <a:rPr lang="ja-JP" altLang="ja-JP" dirty="0"/>
-              <a:t>の対象から除外することを検討しています。</a:t>
-            </a:r>
-          </a:p>
-          <a:p>
-            <a:r>
-              <a:rPr lang="ja-JP" altLang="ja-JP" dirty="0"/>
-              <a:t>さらに、教師データの偏りについても検討する必要があります。</a:t>
+              <a:t>また、推論過程のどの時点で最初の誤りが発生しているのか、その原因についても分析したいと考えています。</a:t>
             </a:r>
           </a:p>
           <a:p>
@@ -5324,7 +5364,7 @@
     </p:spTree>
     <p:extLst>
       <p:ext uri="{BB962C8B-B14F-4D97-AF65-F5344CB8AC3E}">
-        <p14:creationId xmlns:p14="http://schemas.microsoft.com/office/powerpoint/2010/main" val="549689670"/>
+        <p14:creationId xmlns:p14="http://schemas.microsoft.com/office/powerpoint/2010/main" val="3883626773"/>
       </p:ext>
     </p:extLst>
   </p:cSld>
@@ -5483,7 +5523,41 @@
           <a:bodyPr/>
           <a:lstStyle/>
           <a:p>
-            <a:endParaRPr kumimoji="1" lang="ja-JP" altLang="en-US"/>
+            <a:r>
+              <a:rPr lang="ja-JP" altLang="ja-JP" dirty="0"/>
+              <a:t>また、実験方法についても改善が必要です。</a:t>
+            </a:r>
+          </a:p>
+          <a:p>
+            <a:r>
+              <a:rPr lang="ja-JP" altLang="ja-JP" dirty="0"/>
+              <a:t>例えば、現在は問題文の部分も学習時の</a:t>
+            </a:r>
+            <a:r>
+              <a:rPr lang="ja-JP" altLang="en-US" dirty="0"/>
+              <a:t>モデルの調整</a:t>
+            </a:r>
+            <a:r>
+              <a:rPr lang="ja-JP" altLang="ja-JP" dirty="0"/>
+              <a:t>に含まれているため、今後は問題文を</a:t>
+            </a:r>
+            <a:r>
+              <a:rPr lang="ja-JP" altLang="en-US" dirty="0"/>
+              <a:t>モデルの調整</a:t>
+            </a:r>
+            <a:r>
+              <a:rPr lang="ja-JP" altLang="ja-JP" dirty="0"/>
+              <a:t>の対象から除外することを検討しています。</a:t>
+            </a:r>
+          </a:p>
+          <a:p>
+            <a:r>
+              <a:rPr lang="ja-JP" altLang="ja-JP" dirty="0"/>
+              <a:t>さらに、教師データの偏りについても検討する必要があります。</a:t>
+            </a:r>
+          </a:p>
+          <a:p>
+            <a:endParaRPr kumimoji="1" lang="ja-JP" altLang="en-US" dirty="0"/>
           </a:p>
         </p:txBody>
       </p:sp>
@@ -5505,6 +5579,90 @@
             <a:fld id="{68DA8E0A-CFBF-4245-917B-805B87964056}" type="slidenum">
               <a:rPr kumimoji="1" lang="ja-JP" altLang="en-US" smtClean="0"/>
               <a:t>50</a:t>
+            </a:fld>
+            <a:endParaRPr kumimoji="1" lang="ja-JP" altLang="en-US"/>
+          </a:p>
+        </p:txBody>
+      </p:sp>
+    </p:spTree>
+    <p:extLst>
+      <p:ext uri="{BB962C8B-B14F-4D97-AF65-F5344CB8AC3E}">
+        <p14:creationId xmlns:p14="http://schemas.microsoft.com/office/powerpoint/2010/main" val="549689670"/>
+      </p:ext>
+    </p:extLst>
+  </p:cSld>
+  <p:clrMapOvr>
+    <a:masterClrMapping/>
+  </p:clrMapOvr>
+</p:notes>
+</file>
+
+<file path=ppt/notesSlides/notesSlide51.xml><?xml version="1.0" encoding="utf-8"?>
+<p:notes xmlns:a="http://schemas.openxmlformats.org/drawingml/2006/main" xmlns:r="http://schemas.openxmlformats.org/officeDocument/2006/relationships" xmlns:p="http://schemas.openxmlformats.org/presentationml/2006/main">
+  <p:cSld>
+    <p:spTree>
+      <p:nvGrpSpPr>
+        <p:cNvPr id="1" name=""/>
+        <p:cNvGrpSpPr/>
+        <p:nvPr/>
+      </p:nvGrpSpPr>
+      <p:grpSpPr>
+        <a:xfrm>
+          <a:off x="0" y="0"/>
+          <a:ext cx="0" cy="0"/>
+          <a:chOff x="0" y="0"/>
+          <a:chExt cx="0" cy="0"/>
+        </a:xfrm>
+      </p:grpSpPr>
+      <p:sp>
+        <p:nvSpPr>
+          <p:cNvPr id="2" name="スライド イメージ プレースホルダー 1"/>
+          <p:cNvSpPr>
+            <a:spLocks noGrp="1" noRot="1" noChangeAspect="1"/>
+          </p:cNvSpPr>
+          <p:nvPr>
+            <p:ph type="sldImg"/>
+          </p:nvPr>
+        </p:nvSpPr>
+        <p:spPr/>
+      </p:sp>
+      <p:sp>
+        <p:nvSpPr>
+          <p:cNvPr id="3" name="ノート プレースホルダー 2"/>
+          <p:cNvSpPr>
+            <a:spLocks noGrp="1"/>
+          </p:cNvSpPr>
+          <p:nvPr>
+            <p:ph type="body" idx="1"/>
+          </p:nvPr>
+        </p:nvSpPr>
+        <p:spPr/>
+        <p:txBody>
+          <a:bodyPr/>
+          <a:lstStyle/>
+          <a:p>
+            <a:endParaRPr kumimoji="1" lang="ja-JP" altLang="en-US"/>
+          </a:p>
+        </p:txBody>
+      </p:sp>
+      <p:sp>
+        <p:nvSpPr>
+          <p:cNvPr id="4" name="スライド番号プレースホルダー 3"/>
+          <p:cNvSpPr>
+            <a:spLocks noGrp="1"/>
+          </p:cNvSpPr>
+          <p:nvPr>
+            <p:ph type="sldNum" sz="quarter" idx="5"/>
+          </p:nvPr>
+        </p:nvSpPr>
+        <p:spPr/>
+        <p:txBody>
+          <a:bodyPr/>
+          <a:lstStyle/>
+          <a:p>
+            <a:fld id="{68DA8E0A-CFBF-4245-917B-805B87964056}" type="slidenum">
+              <a:rPr kumimoji="1" lang="ja-JP" altLang="en-US" smtClean="0"/>
+              <a:t>51</a:t>
             </a:fld>
             <a:endParaRPr kumimoji="1" lang="ja-JP" altLang="en-US"/>
           </a:p>
@@ -11508,8 +11666,12 @@
           </a:p>
           <a:p>
             <a:r>
+              <a:rPr lang="ja-JP" altLang="ja-JP" sz="3200" dirty="0"/>
+              <a:t>訓練</a:t>
+            </a:r>
+            <a:r>
               <a:rPr lang="ja-JP" altLang="en-US" sz="3200" dirty="0"/>
-              <a:t>全体で</a:t>
+              <a:t>用データで学習させるのは全体で</a:t>
             </a:r>
             <a:r>
               <a:rPr lang="en-US" altLang="ja-JP" sz="3200" dirty="0"/>
@@ -18427,21 +18589,18 @@
           </a:p>
           <a:p>
             <a:r>
-              <a:rPr lang="ja-JP" altLang="en-US" sz="3200" dirty="0"/>
-              <a:t>処理単体として学習データではそもそも教えてない処理を生成してるものが</a:t>
-            </a:r>
-            <a:r>
-              <a:rPr lang="en-US" altLang="ja-JP" sz="3200" dirty="0"/>
-              <a:t>2</a:t>
-            </a:r>
-            <a:r>
-              <a:rPr lang="ja-JP" altLang="en-US" sz="3200" dirty="0"/>
-              <a:t>例存在した</a:t>
+              <a:rPr lang="ja-JP" altLang="ja-JP" sz="3200" dirty="0"/>
+              <a:t>学習データで使用していない処理名を、モデルが出力する事例も2例確認されました。</a:t>
             </a:r>
             <a:endParaRPr lang="en-US" altLang="ja-JP" sz="3200" dirty="0"/>
           </a:p>
           <a:p>
-            <a:endParaRPr lang="en-US" altLang="ja-JP" sz="3200" dirty="0"/>
+            <a:pPr lvl="1"/>
+            <a:r>
+              <a:rPr lang="ja-JP" altLang="ja-JP" sz="2800" dirty="0"/>
+              <a:t>単なる誤ったルール</a:t>
+            </a:r>
+            <a:endParaRPr lang="en-US" altLang="ja-JP" sz="2800" dirty="0"/>
           </a:p>
           <a:p>
             <a:endParaRPr kumimoji="1" lang="ja-JP" altLang="en-US" sz="3200" dirty="0"/>
@@ -19164,7 +19323,15 @@
             </a:r>
             <a:r>
               <a:rPr kumimoji="1" lang="en-US" altLang="ja-JP" sz="3200" dirty="0"/>
-              <a:t>521 / 557 = 93.5%</a:t>
+              <a:t>527 / 554 = 9</a:t>
+            </a:r>
+            <a:r>
+              <a:rPr lang="en-US" altLang="ja-JP" sz="3200" dirty="0"/>
+              <a:t>5.1</a:t>
+            </a:r>
+            <a:r>
+              <a:rPr kumimoji="1" lang="en-US" altLang="ja-JP" sz="3200" dirty="0"/>
+              <a:t>%</a:t>
             </a:r>
           </a:p>
           <a:p>
@@ -20716,7 +20883,7 @@
           <p:nvPr>
             <p:extLst>
               <p:ext uri="{D42A27DB-BD31-4B8C-83A1-F6EECF244321}">
-                <p14:modId xmlns:p14="http://schemas.microsoft.com/office/powerpoint/2010/main" val="1727409559"/>
+                <p14:modId xmlns:p14="http://schemas.microsoft.com/office/powerpoint/2010/main" val="2142370331"/>
               </p:ext>
             </p:extLst>
           </p:nvPr>
@@ -21008,7 +21175,7 @@
                       <a:pPr algn="ctr"/>
                       <a:r>
                         <a:rPr kumimoji="1" lang="en-US" altLang="ja-JP" sz="2400" dirty="0"/>
-                        <a:t>25</a:t>
+                        <a:t>26</a:t>
                       </a:r>
                       <a:endParaRPr kumimoji="1" lang="ja-JP" altLang="en-US" sz="2400" dirty="0"/>
                     </a:p>
@@ -21075,7 +21242,7 @@
                       <a:pPr algn="ctr"/>
                       <a:r>
                         <a:rPr kumimoji="1" lang="en-US" altLang="ja-JP" sz="2400" dirty="0"/>
-                        <a:t>41</a:t>
+                        <a:t>42</a:t>
                       </a:r>
                       <a:endParaRPr kumimoji="1" lang="ja-JP" altLang="en-US" sz="2400" dirty="0"/>
                     </a:p>
@@ -21252,7 +21419,7 @@
             </a:r>
             <a:r>
               <a:rPr kumimoji="1" lang="en-US" altLang="ja-JP" sz="3200" dirty="0"/>
-              <a:t>25</a:t>
+              <a:t>26</a:t>
             </a:r>
             <a:r>
               <a:rPr kumimoji="1" lang="ja-JP" altLang="en-US" sz="3200" dirty="0"/>
@@ -21382,7 +21549,7 @@
           <a:p>
             <a:r>
               <a:rPr kumimoji="1" lang="en-US" altLang="ja-JP" sz="3600" dirty="0"/>
-              <a:t>25</a:t>
+              <a:t>26</a:t>
             </a:r>
             <a:r>
               <a:rPr kumimoji="1" lang="ja-JP" altLang="en-US" sz="3600" dirty="0"/>
@@ -21517,6 +21684,571 @@
 </file>
 
 <file path=ppt/slides/slide44.xml><?xml version="1.0" encoding="utf-8"?>
+<p:sld xmlns:a="http://schemas.openxmlformats.org/drawingml/2006/main" xmlns:r="http://schemas.openxmlformats.org/officeDocument/2006/relationships" xmlns:p="http://schemas.openxmlformats.org/presentationml/2006/main" show="0">
+  <p:cSld>
+    <p:spTree>
+      <p:nvGrpSpPr>
+        <p:cNvPr id="1" name="">
+          <a:extLst>
+            <a:ext uri="{FF2B5EF4-FFF2-40B4-BE49-F238E27FC236}">
+              <a16:creationId xmlns:a16="http://schemas.microsoft.com/office/drawing/2014/main" id="{403350BD-4A48-7CE3-E6D8-0DA27FC93269}"/>
+            </a:ext>
+          </a:extLst>
+        </p:cNvPr>
+        <p:cNvGrpSpPr/>
+        <p:nvPr/>
+      </p:nvGrpSpPr>
+      <p:grpSpPr>
+        <a:xfrm>
+          <a:off x="0" y="0"/>
+          <a:ext cx="0" cy="0"/>
+          <a:chOff x="0" y="0"/>
+          <a:chExt cx="0" cy="0"/>
+        </a:xfrm>
+      </p:grpSpPr>
+      <p:sp>
+        <p:nvSpPr>
+          <p:cNvPr id="2" name="タイトル 1">
+            <a:extLst>
+              <a:ext uri="{FF2B5EF4-FFF2-40B4-BE49-F238E27FC236}">
+                <a16:creationId xmlns:a16="http://schemas.microsoft.com/office/drawing/2014/main" id="{A8CE033E-92D7-D246-B7F2-6AFA318E7DB1}"/>
+              </a:ext>
+            </a:extLst>
+          </p:cNvPr>
+          <p:cNvSpPr>
+            <a:spLocks noGrp="1"/>
+          </p:cNvSpPr>
+          <p:nvPr>
+            <p:ph type="title"/>
+          </p:nvPr>
+        </p:nvSpPr>
+        <p:spPr/>
+        <p:txBody>
+          <a:bodyPr/>
+          <a:lstStyle/>
+          <a:p>
+            <a:r>
+              <a:rPr lang="ja-JP" altLang="en-US" dirty="0"/>
+              <a:t>答え＋処理過程の</a:t>
+            </a:r>
+            <a:r>
+              <a:rPr lang="en-US" altLang="ja-JP" dirty="0"/>
+              <a:t>SFT</a:t>
+            </a:r>
+            <a:r>
+              <a:rPr lang="ja-JP" altLang="en-US" dirty="0"/>
+              <a:t>の分析</a:t>
+            </a:r>
+            <a:br>
+              <a:rPr lang="en-US" altLang="ja-JP" dirty="0"/>
+            </a:br>
+            <a:r>
+              <a:rPr lang="ja-JP" altLang="en-US" dirty="0"/>
+              <a:t>テストデータその</a:t>
+            </a:r>
+            <a:r>
+              <a:rPr lang="en-US" altLang="ja-JP" dirty="0"/>
+              <a:t>2</a:t>
+            </a:r>
+            <a:endParaRPr kumimoji="1" lang="ja-JP" altLang="en-US" dirty="0"/>
+          </a:p>
+        </p:txBody>
+      </p:sp>
+      <p:sp>
+        <p:nvSpPr>
+          <p:cNvPr id="3" name="コンテンツ プレースホルダー 2">
+            <a:extLst>
+              <a:ext uri="{FF2B5EF4-FFF2-40B4-BE49-F238E27FC236}">
+                <a16:creationId xmlns:a16="http://schemas.microsoft.com/office/drawing/2014/main" id="{34C86527-250E-C0E6-1AEE-A33C0FA1EEDE}"/>
+              </a:ext>
+            </a:extLst>
+          </p:cNvPr>
+          <p:cNvSpPr>
+            <a:spLocks noGrp="1"/>
+          </p:cNvSpPr>
+          <p:nvPr>
+            <p:ph idx="1"/>
+          </p:nvPr>
+        </p:nvSpPr>
+        <p:spPr/>
+        <p:txBody>
+          <a:bodyPr/>
+          <a:lstStyle/>
+          <a:p>
+            <a:r>
+              <a:rPr kumimoji="1" lang="ja-JP" altLang="en-US" dirty="0"/>
+              <a:t>ルールを正しく選べた場合の分析</a:t>
+            </a:r>
+          </a:p>
+          <a:p>
+            <a:endParaRPr kumimoji="1" lang="ja-JP" altLang="en-US" dirty="0"/>
+          </a:p>
+        </p:txBody>
+      </p:sp>
+      <p:sp>
+        <p:nvSpPr>
+          <p:cNvPr id="4" name="スライド番号プレースホルダー 3">
+            <a:extLst>
+              <a:ext uri="{FF2B5EF4-FFF2-40B4-BE49-F238E27FC236}">
+                <a16:creationId xmlns:a16="http://schemas.microsoft.com/office/drawing/2014/main" id="{B0853F57-1B0A-0FB3-4556-AAB1DE33F4A9}"/>
+              </a:ext>
+            </a:extLst>
+          </p:cNvPr>
+          <p:cNvSpPr>
+            <a:spLocks noGrp="1"/>
+          </p:cNvSpPr>
+          <p:nvPr>
+            <p:ph type="sldNum" sz="quarter" idx="12"/>
+          </p:nvPr>
+        </p:nvSpPr>
+        <p:spPr/>
+        <p:txBody>
+          <a:bodyPr/>
+          <a:lstStyle/>
+          <a:p>
+            <a:fld id="{10649E7B-FC1B-418B-9B6A-00859DB1DEE8}" type="slidenum">
+              <a:rPr kumimoji="1" lang="ja-JP" altLang="en-US" smtClean="0"/>
+              <a:t>44</a:t>
+            </a:fld>
+            <a:endParaRPr kumimoji="1" lang="ja-JP" altLang="en-US"/>
+          </a:p>
+        </p:txBody>
+      </p:sp>
+      <p:graphicFrame>
+        <p:nvGraphicFramePr>
+          <p:cNvPr id="6" name="表 5">
+            <a:extLst>
+              <a:ext uri="{FF2B5EF4-FFF2-40B4-BE49-F238E27FC236}">
+                <a16:creationId xmlns:a16="http://schemas.microsoft.com/office/drawing/2014/main" id="{25AFBA60-0A0F-4A61-9363-643FFAEB3B59}"/>
+              </a:ext>
+            </a:extLst>
+          </p:cNvPr>
+          <p:cNvGraphicFramePr>
+            <a:graphicFrameLocks noGrp="1"/>
+          </p:cNvGraphicFramePr>
+          <p:nvPr>
+            <p:extLst>
+              <p:ext uri="{D42A27DB-BD31-4B8C-83A1-F6EECF244321}">
+                <p14:modId xmlns:p14="http://schemas.microsoft.com/office/powerpoint/2010/main" val="2200498173"/>
+              </p:ext>
+            </p:extLst>
+          </p:nvPr>
+        </p:nvGraphicFramePr>
+        <p:xfrm>
+          <a:off x="2032000" y="2434135"/>
+          <a:ext cx="8128000" cy="3453435"/>
+        </p:xfrm>
+        <a:graphic>
+          <a:graphicData uri="http://schemas.openxmlformats.org/drawingml/2006/table">
+            <a:tbl>
+              <a:tblPr firstRow="1" bandRow="1">
+                <a:tableStyleId>{5C22544A-7EE6-4342-B048-85BDC9FD1C3A}</a:tableStyleId>
+              </a:tblPr>
+              <a:tblGrid>
+                <a:gridCol w="2032000">
+                  <a:extLst>
+                    <a:ext uri="{9D8B030D-6E8A-4147-A177-3AD203B41FA5}">
+                      <a16:colId xmlns:a16="http://schemas.microsoft.com/office/drawing/2014/main" val="192408562"/>
+                    </a:ext>
+                  </a:extLst>
+                </a:gridCol>
+                <a:gridCol w="2032000">
+                  <a:extLst>
+                    <a:ext uri="{9D8B030D-6E8A-4147-A177-3AD203B41FA5}">
+                      <a16:colId xmlns:a16="http://schemas.microsoft.com/office/drawing/2014/main" val="3700087380"/>
+                    </a:ext>
+                  </a:extLst>
+                </a:gridCol>
+                <a:gridCol w="2032000">
+                  <a:extLst>
+                    <a:ext uri="{9D8B030D-6E8A-4147-A177-3AD203B41FA5}">
+                      <a16:colId xmlns:a16="http://schemas.microsoft.com/office/drawing/2014/main" val="3243275007"/>
+                    </a:ext>
+                  </a:extLst>
+                </a:gridCol>
+                <a:gridCol w="2032000">
+                  <a:extLst>
+                    <a:ext uri="{9D8B030D-6E8A-4147-A177-3AD203B41FA5}">
+                      <a16:colId xmlns:a16="http://schemas.microsoft.com/office/drawing/2014/main" val="183860539"/>
+                    </a:ext>
+                  </a:extLst>
+                </a:gridCol>
+              </a:tblGrid>
+              <a:tr h="690687">
+                <a:tc>
+                  <a:txBody>
+                    <a:bodyPr/>
+                    <a:lstStyle/>
+                    <a:p>
+                      <a:pPr algn="ctr"/>
+                      <a:r>
+                        <a:rPr kumimoji="1" lang="ja-JP" altLang="en-US" sz="2400" dirty="0"/>
+                        <a:t>ルール選択</a:t>
+                      </a:r>
+                    </a:p>
+                  </a:txBody>
+                  <a:tcPr anchor="ctr"/>
+                </a:tc>
+                <a:tc>
+                  <a:txBody>
+                    <a:bodyPr/>
+                    <a:lstStyle/>
+                    <a:p>
+                      <a:pPr algn="ctr"/>
+                      <a:r>
+                        <a:rPr kumimoji="1" lang="ja-JP" altLang="en-US" sz="2400" dirty="0"/>
+                        <a:t>ルール適用</a:t>
+                      </a:r>
+                    </a:p>
+                  </a:txBody>
+                  <a:tcPr anchor="ctr"/>
+                </a:tc>
+                <a:tc>
+                  <a:txBody>
+                    <a:bodyPr/>
+                    <a:lstStyle/>
+                    <a:p>
+                      <a:pPr algn="ctr"/>
+                      <a:r>
+                        <a:rPr kumimoji="1" lang="ja-JP" altLang="en-US" sz="2400" dirty="0"/>
+                        <a:t>最終回答</a:t>
+                      </a:r>
+                    </a:p>
+                  </a:txBody>
+                  <a:tcPr anchor="ctr"/>
+                </a:tc>
+                <a:tc>
+                  <a:txBody>
+                    <a:bodyPr/>
+                    <a:lstStyle/>
+                    <a:p>
+                      <a:pPr algn="ctr"/>
+                      <a:r>
+                        <a:rPr kumimoji="1" lang="ja-JP" altLang="en-US" sz="2400" dirty="0"/>
+                        <a:t>件数</a:t>
+                      </a:r>
+                    </a:p>
+                  </a:txBody>
+                  <a:tcPr anchor="ctr"/>
+                </a:tc>
+                <a:extLst>
+                  <a:ext uri="{0D108BD9-81ED-4DB2-BD59-A6C34878D82A}">
+                    <a16:rowId xmlns:a16="http://schemas.microsoft.com/office/drawing/2014/main" val="16928691"/>
+                  </a:ext>
+                </a:extLst>
+              </a:tr>
+              <a:tr h="690687">
+                <a:tc>
+                  <a:txBody>
+                    <a:bodyPr/>
+                    <a:lstStyle/>
+                    <a:p>
+                      <a:pPr algn="ctr"/>
+                      <a:r>
+                        <a:rPr kumimoji="1" lang="ja-JP" altLang="en-US" sz="2400" dirty="0"/>
+                        <a:t>〇</a:t>
+                      </a:r>
+                    </a:p>
+                  </a:txBody>
+                  <a:tcPr anchor="ctr"/>
+                </a:tc>
+                <a:tc>
+                  <a:txBody>
+                    <a:bodyPr/>
+                    <a:lstStyle/>
+                    <a:p>
+                      <a:pPr algn="ctr"/>
+                      <a:r>
+                        <a:rPr kumimoji="1" lang="ja-JP" altLang="en-US" sz="2400" dirty="0"/>
+                        <a:t>〇</a:t>
+                      </a:r>
+                    </a:p>
+                  </a:txBody>
+                  <a:tcPr anchor="ctr"/>
+                </a:tc>
+                <a:tc>
+                  <a:txBody>
+                    <a:bodyPr/>
+                    <a:lstStyle/>
+                    <a:p>
+                      <a:pPr algn="ctr"/>
+                      <a:r>
+                        <a:rPr kumimoji="1" lang="ja-JP" altLang="en-US" sz="2400" dirty="0"/>
+                        <a:t>〇</a:t>
+                      </a:r>
+                    </a:p>
+                  </a:txBody>
+                  <a:tcPr anchor="ctr"/>
+                </a:tc>
+                <a:tc>
+                  <a:txBody>
+                    <a:bodyPr/>
+                    <a:lstStyle/>
+                    <a:p>
+                      <a:pPr algn="ctr"/>
+                      <a:r>
+                        <a:rPr lang="en-US" altLang="ja-JP" sz="2400" dirty="0"/>
+                        <a:t>1</a:t>
+                      </a:r>
+                      <a:endParaRPr kumimoji="1" lang="ja-JP" altLang="en-US" sz="2400" dirty="0"/>
+                    </a:p>
+                  </a:txBody>
+                  <a:tcPr anchor="ctr"/>
+                </a:tc>
+                <a:extLst>
+                  <a:ext uri="{0D108BD9-81ED-4DB2-BD59-A6C34878D82A}">
+                    <a16:rowId xmlns:a16="http://schemas.microsoft.com/office/drawing/2014/main" val="380766584"/>
+                  </a:ext>
+                </a:extLst>
+              </a:tr>
+              <a:tr h="690687">
+                <a:tc>
+                  <a:txBody>
+                    <a:bodyPr/>
+                    <a:lstStyle/>
+                    <a:p>
+                      <a:pPr algn="ctr"/>
+                      <a:r>
+                        <a:rPr kumimoji="1" lang="ja-JP" altLang="en-US" sz="2400" dirty="0"/>
+                        <a:t>〇</a:t>
+                      </a:r>
+                    </a:p>
+                  </a:txBody>
+                  <a:tcPr anchor="ctr"/>
+                </a:tc>
+                <a:tc>
+                  <a:txBody>
+                    <a:bodyPr/>
+                    <a:lstStyle/>
+                    <a:p>
+                      <a:pPr algn="ctr"/>
+                      <a:r>
+                        <a:rPr kumimoji="1" lang="ja-JP" altLang="en-US" sz="2400" dirty="0"/>
+                        <a:t>〇</a:t>
+                      </a:r>
+                    </a:p>
+                  </a:txBody>
+                  <a:tcPr anchor="ctr"/>
+                </a:tc>
+                <a:tc>
+                  <a:txBody>
+                    <a:bodyPr/>
+                    <a:lstStyle/>
+                    <a:p>
+                      <a:pPr algn="ctr"/>
+                      <a:r>
+                        <a:rPr kumimoji="1" lang="en-US" altLang="ja-JP" sz="2400" dirty="0"/>
+                        <a:t>×</a:t>
+                      </a:r>
+                      <a:endParaRPr kumimoji="1" lang="ja-JP" altLang="en-US" sz="2400" dirty="0"/>
+                    </a:p>
+                  </a:txBody>
+                  <a:tcPr anchor="ctr"/>
+                </a:tc>
+                <a:tc>
+                  <a:txBody>
+                    <a:bodyPr/>
+                    <a:lstStyle/>
+                    <a:p>
+                      <a:pPr algn="ctr"/>
+                      <a:r>
+                        <a:rPr lang="en-US" altLang="ja-JP" sz="2400" dirty="0"/>
+                        <a:t>0</a:t>
+                      </a:r>
+                      <a:endParaRPr kumimoji="1" lang="ja-JP" altLang="en-US" sz="2400" dirty="0"/>
+                    </a:p>
+                  </a:txBody>
+                  <a:tcPr anchor="ctr"/>
+                </a:tc>
+                <a:extLst>
+                  <a:ext uri="{0D108BD9-81ED-4DB2-BD59-A6C34878D82A}">
+                    <a16:rowId xmlns:a16="http://schemas.microsoft.com/office/drawing/2014/main" val="3754421160"/>
+                  </a:ext>
+                </a:extLst>
+              </a:tr>
+              <a:tr h="690687">
+                <a:tc>
+                  <a:txBody>
+                    <a:bodyPr/>
+                    <a:lstStyle/>
+                    <a:p>
+                      <a:pPr algn="ctr"/>
+                      <a:r>
+                        <a:rPr kumimoji="1" lang="ja-JP" altLang="en-US" sz="2400" dirty="0"/>
+                        <a:t>〇</a:t>
+                      </a:r>
+                    </a:p>
+                  </a:txBody>
+                  <a:tcPr anchor="ctr"/>
+                </a:tc>
+                <a:tc>
+                  <a:txBody>
+                    <a:bodyPr/>
+                    <a:lstStyle/>
+                    <a:p>
+                      <a:pPr algn="ctr"/>
+                      <a:r>
+                        <a:rPr kumimoji="1" lang="en-US" altLang="ja-JP" sz="2400" dirty="0"/>
+                        <a:t>×</a:t>
+                      </a:r>
+                      <a:endParaRPr kumimoji="1" lang="ja-JP" altLang="en-US" sz="2400" dirty="0"/>
+                    </a:p>
+                  </a:txBody>
+                  <a:tcPr anchor="ctr"/>
+                </a:tc>
+                <a:tc>
+                  <a:txBody>
+                    <a:bodyPr/>
+                    <a:lstStyle/>
+                    <a:p>
+                      <a:pPr marL="0" marR="0" lvl="0" indent="0" algn="ctr" defTabSz="914400" rtl="0" eaLnBrk="1" fontAlgn="auto" latinLnBrk="0" hangingPunct="1">
+                        <a:lnSpc>
+                          <a:spcPct val="100000"/>
+                        </a:lnSpc>
+                        <a:spcBef>
+                          <a:spcPts val="0"/>
+                        </a:spcBef>
+                        <a:spcAft>
+                          <a:spcPts val="0"/>
+                        </a:spcAft>
+                        <a:buClrTx/>
+                        <a:buSzTx/>
+                        <a:buFontTx/>
+                        <a:buNone/>
+                        <a:tabLst/>
+                        <a:defRPr/>
+                      </a:pPr>
+                      <a:r>
+                        <a:rPr kumimoji="1" lang="ja-JP" altLang="en-US" sz="2400" dirty="0"/>
+                        <a:t>〇</a:t>
+                      </a:r>
+                    </a:p>
+                  </a:txBody>
+                  <a:tcPr anchor="ctr"/>
+                </a:tc>
+                <a:tc>
+                  <a:txBody>
+                    <a:bodyPr/>
+                    <a:lstStyle/>
+                    <a:p>
+                      <a:pPr algn="ctr">
+                        <a:buNone/>
+                      </a:pPr>
+                      <a:r>
+                        <a:rPr lang="en-US" altLang="ja-JP" sz="2400" dirty="0"/>
+                        <a:t>0</a:t>
+                      </a:r>
+                      <a:endParaRPr lang="ja-JP" sz="2400" dirty="0"/>
+                    </a:p>
+                  </a:txBody>
+                  <a:tcPr anchor="ctr"/>
+                </a:tc>
+                <a:extLst>
+                  <a:ext uri="{0D108BD9-81ED-4DB2-BD59-A6C34878D82A}">
+                    <a16:rowId xmlns:a16="http://schemas.microsoft.com/office/drawing/2014/main" val="2420634431"/>
+                  </a:ext>
+                </a:extLst>
+              </a:tr>
+              <a:tr h="690687">
+                <a:tc>
+                  <a:txBody>
+                    <a:bodyPr/>
+                    <a:lstStyle/>
+                    <a:p>
+                      <a:pPr algn="ctr"/>
+                      <a:r>
+                        <a:rPr kumimoji="1" lang="ja-JP" altLang="en-US" sz="2400" dirty="0"/>
+                        <a:t>〇</a:t>
+                      </a:r>
+                    </a:p>
+                  </a:txBody>
+                  <a:tcPr anchor="ctr"/>
+                </a:tc>
+                <a:tc>
+                  <a:txBody>
+                    <a:bodyPr/>
+                    <a:lstStyle/>
+                    <a:p>
+                      <a:pPr algn="ctr"/>
+                      <a:r>
+                        <a:rPr kumimoji="1" lang="en-US" altLang="ja-JP" sz="2400" dirty="0"/>
+                        <a:t>×</a:t>
+                      </a:r>
+                      <a:endParaRPr kumimoji="1" lang="ja-JP" altLang="en-US" sz="2400" dirty="0"/>
+                    </a:p>
+                  </a:txBody>
+                  <a:tcPr anchor="ctr"/>
+                </a:tc>
+                <a:tc>
+                  <a:txBody>
+                    <a:bodyPr/>
+                    <a:lstStyle/>
+                    <a:p>
+                      <a:pPr algn="ctr"/>
+                      <a:r>
+                        <a:rPr kumimoji="1" lang="en-US" altLang="ja-JP" sz="2400" dirty="0"/>
+                        <a:t>×</a:t>
+                      </a:r>
+                      <a:endParaRPr kumimoji="1" lang="ja-JP" altLang="en-US" sz="2400" dirty="0"/>
+                    </a:p>
+                  </a:txBody>
+                  <a:tcPr anchor="ctr"/>
+                </a:tc>
+                <a:tc>
+                  <a:txBody>
+                    <a:bodyPr/>
+                    <a:lstStyle/>
+                    <a:p>
+                      <a:pPr marL="0" marR="0" lvl="0" indent="0" algn="ctr" defTabSz="914400" rtl="0" eaLnBrk="1" fontAlgn="auto" latinLnBrk="0" hangingPunct="1">
+                        <a:lnSpc>
+                          <a:spcPct val="100000"/>
+                        </a:lnSpc>
+                        <a:spcBef>
+                          <a:spcPts val="0"/>
+                        </a:spcBef>
+                        <a:spcAft>
+                          <a:spcPts val="0"/>
+                        </a:spcAft>
+                        <a:buClrTx/>
+                        <a:buSzTx/>
+                        <a:buFontTx/>
+                        <a:buNone/>
+                        <a:tabLst/>
+                        <a:defRPr/>
+                      </a:pPr>
+                      <a:r>
+                        <a:rPr lang="en-US" altLang="ja-JP" sz="2400" dirty="0"/>
+                        <a:t>0</a:t>
+                      </a:r>
+                      <a:endParaRPr lang="ja-JP" altLang="ja-JP" sz="2400" dirty="0"/>
+                    </a:p>
+                  </a:txBody>
+                  <a:tcPr anchor="ctr"/>
+                </a:tc>
+                <a:extLst>
+                  <a:ext uri="{0D108BD9-81ED-4DB2-BD59-A6C34878D82A}">
+                    <a16:rowId xmlns:a16="http://schemas.microsoft.com/office/drawing/2014/main" val="4098692677"/>
+                  </a:ext>
+                </a:extLst>
+              </a:tr>
+            </a:tbl>
+          </a:graphicData>
+        </a:graphic>
+      </p:graphicFrame>
+    </p:spTree>
+    <p:extLst>
+      <p:ext uri="{BB962C8B-B14F-4D97-AF65-F5344CB8AC3E}">
+        <p14:creationId xmlns:p14="http://schemas.microsoft.com/office/powerpoint/2010/main" val="3789977985"/>
+      </p:ext>
+    </p:extLst>
+  </p:cSld>
+  <p:clrMapOvr>
+    <a:masterClrMapping/>
+  </p:clrMapOvr>
+</p:sld>
+</file>
+
+<file path=ppt/slides/slide45.xml><?xml version="1.0" encoding="utf-8"?>
 <p:sld xmlns:a="http://schemas.openxmlformats.org/drawingml/2006/main" xmlns:r="http://schemas.openxmlformats.org/officeDocument/2006/relationships" xmlns:p="http://schemas.openxmlformats.org/presentationml/2006/main" show="0">
   <p:cSld>
     <p:spTree>
@@ -21641,7 +22373,7 @@
           <a:p>
             <a:fld id="{10649E7B-FC1B-418B-9B6A-00859DB1DEE8}" type="slidenum">
               <a:rPr kumimoji="1" lang="ja-JP" altLang="en-US" smtClean="0"/>
-              <a:t>44</a:t>
+              <a:t>45</a:t>
             </a:fld>
             <a:endParaRPr kumimoji="1" lang="ja-JP" altLang="en-US"/>
           </a:p>
@@ -21662,7 +22394,7 @@
           <p:nvPr>
             <p:extLst>
               <p:ext uri="{D42A27DB-BD31-4B8C-83A1-F6EECF244321}">
-                <p14:modId xmlns:p14="http://schemas.microsoft.com/office/powerpoint/2010/main" val="4247514005"/>
+                <p14:modId xmlns:p14="http://schemas.microsoft.com/office/powerpoint/2010/main" val="3668500996"/>
               </p:ext>
             </p:extLst>
           </p:nvPr>
@@ -21972,7 +22704,7 @@
                       </a:pPr>
                       <a:r>
                         <a:rPr lang="en-US" altLang="ja-JP" sz="2400" dirty="0"/>
-                        <a:t>40</a:t>
+                        <a:t>47</a:t>
                       </a:r>
                       <a:endParaRPr lang="ja-JP" sz="2400" dirty="0"/>
                     </a:p>
@@ -22054,9 +22786,10 @@
                         <a:defRPr/>
                       </a:pPr>
                       <a:r>
-                        <a:rPr lang="ja-JP" altLang="ja-JP" sz="2400" dirty="0"/>
-                        <a:t>88</a:t>
+                        <a:rPr lang="en-US" altLang="ja-JP" sz="2400" dirty="0"/>
+                        <a:t>99</a:t>
                       </a:r>
+                      <a:endParaRPr lang="ja-JP" altLang="ja-JP" sz="2400" dirty="0"/>
                     </a:p>
                   </a:txBody>
                   <a:tcPr anchor="ctr"/>
@@ -22084,7 +22817,7 @@
 </p:sld>
 </file>
 
-<file path=ppt/slides/slide45.xml><?xml version="1.0" encoding="utf-8"?>
+<file path=ppt/slides/slide46.xml><?xml version="1.0" encoding="utf-8"?>
 <p:sld xmlns:a="http://schemas.openxmlformats.org/drawingml/2006/main" xmlns:r="http://schemas.openxmlformats.org/officeDocument/2006/relationships" xmlns:p="http://schemas.openxmlformats.org/presentationml/2006/main" show="0">
   <p:cSld>
     <p:spTree>
@@ -22187,7 +22920,42 @@
             <a:pPr lvl="1"/>
             <a:r>
               <a:rPr kumimoji="1" lang="en-US" altLang="ja-JP" sz="2800" dirty="0"/>
-              <a:t>1 / 432</a:t>
+              <a:t>1 / 450</a:t>
+            </a:r>
+            <a:r>
+              <a:rPr kumimoji="1" lang="ja-JP" altLang="en-US" sz="2800" dirty="0"/>
+              <a:t>件</a:t>
+            </a:r>
+            <a:endParaRPr lang="en-US" altLang="ja-JP" sz="2800" dirty="0"/>
+          </a:p>
+          <a:p>
+            <a:r>
+              <a:rPr kumimoji="1" lang="ja-JP" altLang="en-US" sz="3200" dirty="0"/>
+              <a:t>最も多かったのは「選択</a:t>
+            </a:r>
+            <a:r>
+              <a:rPr kumimoji="1" lang="en-US" altLang="ja-JP" sz="3200" dirty="0"/>
+              <a:t>×</a:t>
+            </a:r>
+            <a:r>
+              <a:rPr kumimoji="1" lang="ja-JP" altLang="en-US" sz="3200" dirty="0"/>
+              <a:t>・適用○・回答</a:t>
+            </a:r>
+            <a:r>
+              <a:rPr kumimoji="1" lang="en-US" altLang="ja-JP" sz="3200" dirty="0"/>
+              <a:t>×</a:t>
+            </a:r>
+            <a:r>
+              <a:rPr kumimoji="1" lang="ja-JP" altLang="en-US" sz="3200" dirty="0"/>
+              <a:t>」</a:t>
+            </a:r>
+            <a:endParaRPr kumimoji="1" lang="en-US" altLang="ja-JP" sz="3200" dirty="0"/>
+          </a:p>
+          <a:p>
+            <a:pPr lvl="1"/>
+            <a:r>
+              <a:rPr kumimoji="1" lang="en-US" altLang="ja-JP" sz="2800" dirty="0"/>
+              <a:t>271 / 450</a:t>
             </a:r>
             <a:r>
               <a:rPr kumimoji="1" lang="ja-JP" altLang="en-US" sz="2800" dirty="0"/>
@@ -22195,46 +22963,7 @@
             </a:r>
             <a:r>
               <a:rPr kumimoji="1" lang="en-US" altLang="ja-JP" sz="2800" dirty="0"/>
-              <a:t>= 0.2%</a:t>
-            </a:r>
-            <a:endParaRPr lang="en-US" altLang="ja-JP" sz="2800" dirty="0"/>
-          </a:p>
-          <a:p>
-            <a:r>
-              <a:rPr kumimoji="1" lang="ja-JP" altLang="en-US" sz="3200" dirty="0"/>
-              <a:t>最も多かったのは「選択</a:t>
-            </a:r>
-            <a:r>
-              <a:rPr kumimoji="1" lang="en-US" altLang="ja-JP" sz="3200" dirty="0"/>
-              <a:t>×</a:t>
-            </a:r>
-            <a:r>
-              <a:rPr kumimoji="1" lang="ja-JP" altLang="en-US" sz="3200" dirty="0"/>
-              <a:t>・適用○・回答</a:t>
-            </a:r>
-            <a:r>
-              <a:rPr kumimoji="1" lang="en-US" altLang="ja-JP" sz="3200" dirty="0"/>
-              <a:t>×</a:t>
-            </a:r>
-            <a:r>
-              <a:rPr kumimoji="1" lang="ja-JP" altLang="en-US" sz="3200" dirty="0"/>
-              <a:t>」</a:t>
-            </a:r>
-            <a:endParaRPr kumimoji="1" lang="en-US" altLang="ja-JP" sz="3200" dirty="0"/>
-          </a:p>
-          <a:p>
-            <a:pPr lvl="1"/>
-            <a:r>
-              <a:rPr kumimoji="1" lang="en-US" altLang="ja-JP" sz="2800" dirty="0"/>
-              <a:t>271 / 432</a:t>
-            </a:r>
-            <a:r>
-              <a:rPr kumimoji="1" lang="ja-JP" altLang="en-US" sz="2800" dirty="0"/>
-              <a:t>件 </a:t>
-            </a:r>
-            <a:r>
-              <a:rPr kumimoji="1" lang="en-US" altLang="ja-JP" sz="2800" dirty="0"/>
-              <a:t>= 62.7%</a:t>
+              <a:t>= 60.2%</a:t>
             </a:r>
           </a:p>
           <a:p>
@@ -22308,7 +23037,7 @@
             </a:r>
             <a:r>
               <a:rPr kumimoji="1" lang="en-US" altLang="ja-JP" sz="2800" dirty="0"/>
-              <a:t>40</a:t>
+              <a:t>47</a:t>
             </a:r>
             <a:r>
               <a:rPr kumimoji="1" lang="ja-JP" altLang="en-US" sz="2800" dirty="0"/>
@@ -22341,7 +23070,7 @@
           <a:p>
             <a:fld id="{10649E7B-FC1B-418B-9B6A-00859DB1DEE8}" type="slidenum">
               <a:rPr kumimoji="1" lang="ja-JP" altLang="en-US" smtClean="0"/>
-              <a:t>45</a:t>
+              <a:t>46</a:t>
             </a:fld>
             <a:endParaRPr kumimoji="1" lang="ja-JP" altLang="en-US"/>
           </a:p>
@@ -22360,7 +23089,7 @@
 </p:sld>
 </file>
 
-<file path=ppt/slides/slide46.xml><?xml version="1.0" encoding="utf-8"?>
+<file path=ppt/slides/slide47.xml><?xml version="1.0" encoding="utf-8"?>
 <p:sld xmlns:a="http://schemas.openxmlformats.org/drawingml/2006/main" xmlns:r="http://schemas.openxmlformats.org/officeDocument/2006/relationships" xmlns:p="http://schemas.openxmlformats.org/presentationml/2006/main">
   <p:cSld>
     <p:spTree>
@@ -22522,7 +23251,7 @@
           <a:p>
             <a:fld id="{10649E7B-FC1B-418B-9B6A-00859DB1DEE8}" type="slidenum">
               <a:rPr kumimoji="1" lang="ja-JP" altLang="en-US" smtClean="0"/>
-              <a:t>46</a:t>
+              <a:t>47</a:t>
             </a:fld>
             <a:endParaRPr kumimoji="1" lang="ja-JP" altLang="en-US"/>
           </a:p>
@@ -22541,7 +23270,7 @@
 </p:sld>
 </file>
 
-<file path=ppt/slides/slide47.xml><?xml version="1.0" encoding="utf-8"?>
+<file path=ppt/slides/slide48.xml><?xml version="1.0" encoding="utf-8"?>
 <p:sld xmlns:a="http://schemas.openxmlformats.org/drawingml/2006/main" xmlns:r="http://schemas.openxmlformats.org/officeDocument/2006/relationships" xmlns:p="http://schemas.openxmlformats.org/presentationml/2006/main">
   <p:cSld>
     <p:spTree>
@@ -22733,7 +23462,7 @@
           <a:p>
             <a:fld id="{10649E7B-FC1B-418B-9B6A-00859DB1DEE8}" type="slidenum">
               <a:rPr kumimoji="1" lang="ja-JP" altLang="en-US" smtClean="0"/>
-              <a:t>47</a:t>
+              <a:t>48</a:t>
             </a:fld>
             <a:endParaRPr kumimoji="1" lang="ja-JP" altLang="en-US"/>
           </a:p>
@@ -22743,145 +23472,6 @@
     <p:extLst>
       <p:ext uri="{BB962C8B-B14F-4D97-AF65-F5344CB8AC3E}">
         <p14:creationId xmlns:p14="http://schemas.microsoft.com/office/powerpoint/2010/main" val="2945795507"/>
-      </p:ext>
-    </p:extLst>
-  </p:cSld>
-  <p:clrMapOvr>
-    <a:masterClrMapping/>
-  </p:clrMapOvr>
-</p:sld>
-</file>
-
-<file path=ppt/slides/slide48.xml><?xml version="1.0" encoding="utf-8"?>
-<p:sld xmlns:a="http://schemas.openxmlformats.org/drawingml/2006/main" xmlns:r="http://schemas.openxmlformats.org/officeDocument/2006/relationships" xmlns:p="http://schemas.openxmlformats.org/presentationml/2006/main">
-  <p:cSld>
-    <p:spTree>
-      <p:nvGrpSpPr>
-        <p:cNvPr id="1" name=""/>
-        <p:cNvGrpSpPr/>
-        <p:nvPr/>
-      </p:nvGrpSpPr>
-      <p:grpSpPr>
-        <a:xfrm>
-          <a:off x="0" y="0"/>
-          <a:ext cx="0" cy="0"/>
-          <a:chOff x="0" y="0"/>
-          <a:chExt cx="0" cy="0"/>
-        </a:xfrm>
-      </p:grpSpPr>
-      <p:sp>
-        <p:nvSpPr>
-          <p:cNvPr id="2" name="タイトル 1">
-            <a:extLst>
-              <a:ext uri="{FF2B5EF4-FFF2-40B4-BE49-F238E27FC236}">
-                <a16:creationId xmlns:a16="http://schemas.microsoft.com/office/drawing/2014/main" id="{E6E69329-AF1E-667F-1EA5-4ED2C221D285}"/>
-              </a:ext>
-            </a:extLst>
-          </p:cNvPr>
-          <p:cNvSpPr>
-            <a:spLocks noGrp="1"/>
-          </p:cNvSpPr>
-          <p:nvPr>
-            <p:ph type="title"/>
-          </p:nvPr>
-        </p:nvSpPr>
-        <p:spPr/>
-        <p:txBody>
-          <a:bodyPr/>
-          <a:lstStyle/>
-          <a:p>
-            <a:r>
-              <a:rPr kumimoji="1" lang="ja-JP" altLang="en-US" dirty="0"/>
-              <a:t>今後の課題</a:t>
-            </a:r>
-          </a:p>
-        </p:txBody>
-      </p:sp>
-      <p:sp>
-        <p:nvSpPr>
-          <p:cNvPr id="3" name="コンテンツ プレースホルダー 2">
-            <a:extLst>
-              <a:ext uri="{FF2B5EF4-FFF2-40B4-BE49-F238E27FC236}">
-                <a16:creationId xmlns:a16="http://schemas.microsoft.com/office/drawing/2014/main" id="{36FA4F64-8AB9-3F80-0D97-3E540A81AE53}"/>
-              </a:ext>
-            </a:extLst>
-          </p:cNvPr>
-          <p:cNvSpPr>
-            <a:spLocks noGrp="1"/>
-          </p:cNvSpPr>
-          <p:nvPr>
-            <p:ph idx="1"/>
-          </p:nvPr>
-        </p:nvSpPr>
-        <p:spPr/>
-        <p:txBody>
-          <a:bodyPr>
-            <a:normAutofit/>
-          </a:bodyPr>
-          <a:lstStyle/>
-          <a:p>
-            <a:r>
-              <a:rPr lang="ja-JP" altLang="en-US" sz="3200" dirty="0"/>
-              <a:t>テストデータその</a:t>
-            </a:r>
-            <a:r>
-              <a:rPr lang="en-US" altLang="ja-JP" sz="3200" dirty="0"/>
-              <a:t>2</a:t>
-            </a:r>
-            <a:r>
-              <a:rPr lang="ja-JP" altLang="en-US" sz="3200" dirty="0"/>
-              <a:t>についての分析</a:t>
-            </a:r>
-            <a:endParaRPr kumimoji="1" lang="en-US" altLang="ja-JP" sz="3200" dirty="0"/>
-          </a:p>
-          <a:p>
-            <a:endParaRPr kumimoji="1" lang="ja-JP" altLang="en-US" sz="3200" dirty="0"/>
-          </a:p>
-          <a:p>
-            <a:r>
-              <a:rPr kumimoji="1" lang="ja-JP" altLang="en-US" sz="3200" dirty="0"/>
-              <a:t>推論過程の最初の誤りが発生する位置・原因を分析</a:t>
-            </a:r>
-            <a:endParaRPr kumimoji="1" lang="en-US" altLang="ja-JP" sz="3200" dirty="0"/>
-          </a:p>
-          <a:p>
-            <a:endParaRPr lang="en-US" altLang="ja-JP" sz="3200" dirty="0"/>
-          </a:p>
-        </p:txBody>
-      </p:sp>
-      <p:sp>
-        <p:nvSpPr>
-          <p:cNvPr id="4" name="スライド番号プレースホルダー 3">
-            <a:extLst>
-              <a:ext uri="{FF2B5EF4-FFF2-40B4-BE49-F238E27FC236}">
-                <a16:creationId xmlns:a16="http://schemas.microsoft.com/office/drawing/2014/main" id="{92CC3E0A-FCC4-6102-0CD1-6E203FE7993E}"/>
-              </a:ext>
-            </a:extLst>
-          </p:cNvPr>
-          <p:cNvSpPr>
-            <a:spLocks noGrp="1"/>
-          </p:cNvSpPr>
-          <p:nvPr>
-            <p:ph type="sldNum" sz="quarter" idx="12"/>
-          </p:nvPr>
-        </p:nvSpPr>
-        <p:spPr/>
-        <p:txBody>
-          <a:bodyPr/>
-          <a:lstStyle/>
-          <a:p>
-            <a:fld id="{10649E7B-FC1B-418B-9B6A-00859DB1DEE8}" type="slidenum">
-              <a:rPr kumimoji="1" lang="ja-JP" altLang="en-US" smtClean="0"/>
-              <a:t>48</a:t>
-            </a:fld>
-            <a:endParaRPr kumimoji="1" lang="ja-JP" altLang="en-US"/>
-          </a:p>
-        </p:txBody>
-      </p:sp>
-    </p:spTree>
-    <p:extLst>
-      <p:ext uri="{BB962C8B-B14F-4D97-AF65-F5344CB8AC3E}">
-        <p14:creationId xmlns:p14="http://schemas.microsoft.com/office/powerpoint/2010/main" val="2055481314"/>
       </p:ext>
     </p:extLst>
   </p:cSld>
@@ -22913,7 +23503,7 @@
           <p:cNvPr id="2" name="タイトル 1">
             <a:extLst>
               <a:ext uri="{FF2B5EF4-FFF2-40B4-BE49-F238E27FC236}">
-                <a16:creationId xmlns:a16="http://schemas.microsoft.com/office/drawing/2014/main" id="{A5959B89-0CB7-D762-0215-ACF53DC80765}"/>
+                <a16:creationId xmlns:a16="http://schemas.microsoft.com/office/drawing/2014/main" id="{E6E69329-AF1E-667F-1EA5-4ED2C221D285}"/>
               </a:ext>
             </a:extLst>
           </p:cNvPr>
@@ -22931,7 +23521,7 @@
           <a:p>
             <a:r>
               <a:rPr kumimoji="1" lang="ja-JP" altLang="en-US" dirty="0"/>
-              <a:t>実験の改善点</a:t>
+              <a:t>今後の課題</a:t>
             </a:r>
           </a:p>
         </p:txBody>
@@ -22941,7 +23531,7 @@
           <p:cNvPr id="3" name="コンテンツ プレースホルダー 2">
             <a:extLst>
               <a:ext uri="{FF2B5EF4-FFF2-40B4-BE49-F238E27FC236}">
-                <a16:creationId xmlns:a16="http://schemas.microsoft.com/office/drawing/2014/main" id="{FE690461-7056-8E83-E806-6396C50A43DE}"/>
+                <a16:creationId xmlns:a16="http://schemas.microsoft.com/office/drawing/2014/main" id="{36FA4F64-8AB9-3F80-0D97-3E540A81AE53}"/>
               </a:ext>
             </a:extLst>
           </p:cNvPr>
@@ -22961,7 +23551,15 @@
           <a:p>
             <a:r>
               <a:rPr lang="ja-JP" altLang="en-US" sz="3200" dirty="0"/>
-              <a:t>問題文の部分もモデルの調整に含めない</a:t>
+              <a:t>答え＋処理過程の</a:t>
+            </a:r>
+            <a:r>
+              <a:rPr lang="en-US" altLang="ja-JP" sz="3200" dirty="0"/>
+              <a:t>SFT</a:t>
+            </a:r>
+            <a:r>
+              <a:rPr lang="ja-JP" altLang="en-US" sz="3200" dirty="0"/>
+              <a:t>の分析をもう少し</a:t>
             </a:r>
             <a:endParaRPr lang="en-US" altLang="ja-JP" sz="3200" dirty="0"/>
           </a:p>
@@ -22971,8 +23569,29 @@
           <a:p>
             <a:r>
               <a:rPr lang="ja-JP" altLang="en-US" sz="3200" dirty="0"/>
-              <a:t>教師データの偏り</a:t>
-            </a:r>
+              <a:t>テストデータその</a:t>
+            </a:r>
+            <a:r>
+              <a:rPr lang="en-US" altLang="ja-JP" sz="3200" dirty="0"/>
+              <a:t>2</a:t>
+            </a:r>
+            <a:r>
+              <a:rPr lang="ja-JP" altLang="en-US" sz="3200" dirty="0"/>
+              <a:t>についての分析</a:t>
+            </a:r>
+            <a:endParaRPr kumimoji="1" lang="en-US" altLang="ja-JP" sz="3200" dirty="0"/>
+          </a:p>
+          <a:p>
+            <a:endParaRPr kumimoji="1" lang="ja-JP" altLang="en-US" sz="3200" dirty="0"/>
+          </a:p>
+          <a:p>
+            <a:r>
+              <a:rPr kumimoji="1" lang="ja-JP" altLang="en-US" sz="3200" dirty="0"/>
+              <a:t>推論過程の最初の誤りが発生する位置・原因を分析</a:t>
+            </a:r>
+            <a:endParaRPr kumimoji="1" lang="en-US" altLang="ja-JP" sz="3200" dirty="0"/>
+          </a:p>
+          <a:p>
             <a:endParaRPr lang="en-US" altLang="ja-JP" sz="3200" dirty="0"/>
           </a:p>
         </p:txBody>
@@ -22982,7 +23601,7 @@
           <p:cNvPr id="4" name="スライド番号プレースホルダー 3">
             <a:extLst>
               <a:ext uri="{FF2B5EF4-FFF2-40B4-BE49-F238E27FC236}">
-                <a16:creationId xmlns:a16="http://schemas.microsoft.com/office/drawing/2014/main" id="{27DC1D97-E555-A2C1-A739-D33B70FE3928}"/>
+                <a16:creationId xmlns:a16="http://schemas.microsoft.com/office/drawing/2014/main" id="{92CC3E0A-FCC4-6102-0CD1-6E203FE7993E}"/>
               </a:ext>
             </a:extLst>
           </p:cNvPr>
@@ -23009,7 +23628,7 @@
     </p:spTree>
     <p:extLst>
       <p:ext uri="{BB962C8B-B14F-4D97-AF65-F5344CB8AC3E}">
-        <p14:creationId xmlns:p14="http://schemas.microsoft.com/office/powerpoint/2010/main" val="3089590952"/>
+        <p14:creationId xmlns:p14="http://schemas.microsoft.com/office/powerpoint/2010/main" val="2055481314"/>
       </p:ext>
     </p:extLst>
   </p:cSld>
@@ -23274,6 +23893,134 @@
           <p:cNvPr id="2" name="タイトル 1">
             <a:extLst>
               <a:ext uri="{FF2B5EF4-FFF2-40B4-BE49-F238E27FC236}">
+                <a16:creationId xmlns:a16="http://schemas.microsoft.com/office/drawing/2014/main" id="{A5959B89-0CB7-D762-0215-ACF53DC80765}"/>
+              </a:ext>
+            </a:extLst>
+          </p:cNvPr>
+          <p:cNvSpPr>
+            <a:spLocks noGrp="1"/>
+          </p:cNvSpPr>
+          <p:nvPr>
+            <p:ph type="title"/>
+          </p:nvPr>
+        </p:nvSpPr>
+        <p:spPr/>
+        <p:txBody>
+          <a:bodyPr/>
+          <a:lstStyle/>
+          <a:p>
+            <a:r>
+              <a:rPr kumimoji="1" lang="ja-JP" altLang="en-US" dirty="0"/>
+              <a:t>実験の改善点</a:t>
+            </a:r>
+          </a:p>
+        </p:txBody>
+      </p:sp>
+      <p:sp>
+        <p:nvSpPr>
+          <p:cNvPr id="3" name="コンテンツ プレースホルダー 2">
+            <a:extLst>
+              <a:ext uri="{FF2B5EF4-FFF2-40B4-BE49-F238E27FC236}">
+                <a16:creationId xmlns:a16="http://schemas.microsoft.com/office/drawing/2014/main" id="{FE690461-7056-8E83-E806-6396C50A43DE}"/>
+              </a:ext>
+            </a:extLst>
+          </p:cNvPr>
+          <p:cNvSpPr>
+            <a:spLocks noGrp="1"/>
+          </p:cNvSpPr>
+          <p:nvPr>
+            <p:ph idx="1"/>
+          </p:nvPr>
+        </p:nvSpPr>
+        <p:spPr/>
+        <p:txBody>
+          <a:bodyPr>
+            <a:normAutofit/>
+          </a:bodyPr>
+          <a:lstStyle/>
+          <a:p>
+            <a:r>
+              <a:rPr lang="ja-JP" altLang="en-US" sz="3200" dirty="0"/>
+              <a:t>問題文の部分もモデルの調整に含めない</a:t>
+            </a:r>
+            <a:endParaRPr lang="en-US" altLang="ja-JP" sz="3200" dirty="0"/>
+          </a:p>
+          <a:p>
+            <a:endParaRPr lang="en-US" altLang="ja-JP" sz="3200" dirty="0"/>
+          </a:p>
+          <a:p>
+            <a:r>
+              <a:rPr lang="ja-JP" altLang="en-US" sz="3200" dirty="0"/>
+              <a:t>教師データの偏り</a:t>
+            </a:r>
+            <a:endParaRPr lang="en-US" altLang="ja-JP" sz="3200" dirty="0"/>
+          </a:p>
+        </p:txBody>
+      </p:sp>
+      <p:sp>
+        <p:nvSpPr>
+          <p:cNvPr id="4" name="スライド番号プレースホルダー 3">
+            <a:extLst>
+              <a:ext uri="{FF2B5EF4-FFF2-40B4-BE49-F238E27FC236}">
+                <a16:creationId xmlns:a16="http://schemas.microsoft.com/office/drawing/2014/main" id="{27DC1D97-E555-A2C1-A739-D33B70FE3928}"/>
+              </a:ext>
+            </a:extLst>
+          </p:cNvPr>
+          <p:cNvSpPr>
+            <a:spLocks noGrp="1"/>
+          </p:cNvSpPr>
+          <p:nvPr>
+            <p:ph type="sldNum" sz="quarter" idx="12"/>
+          </p:nvPr>
+        </p:nvSpPr>
+        <p:spPr/>
+        <p:txBody>
+          <a:bodyPr/>
+          <a:lstStyle/>
+          <a:p>
+            <a:fld id="{10649E7B-FC1B-418B-9B6A-00859DB1DEE8}" type="slidenum">
+              <a:rPr kumimoji="1" lang="ja-JP" altLang="en-US" smtClean="0"/>
+              <a:t>50</a:t>
+            </a:fld>
+            <a:endParaRPr kumimoji="1" lang="ja-JP" altLang="en-US"/>
+          </a:p>
+        </p:txBody>
+      </p:sp>
+    </p:spTree>
+    <p:extLst>
+      <p:ext uri="{BB962C8B-B14F-4D97-AF65-F5344CB8AC3E}">
+        <p14:creationId xmlns:p14="http://schemas.microsoft.com/office/powerpoint/2010/main" val="3089590952"/>
+      </p:ext>
+    </p:extLst>
+  </p:cSld>
+  <p:clrMapOvr>
+    <a:masterClrMapping/>
+  </p:clrMapOvr>
+</p:sld>
+</file>
+
+<file path=ppt/slides/slide51.xml><?xml version="1.0" encoding="utf-8"?>
+<p:sld xmlns:a="http://schemas.openxmlformats.org/drawingml/2006/main" xmlns:r="http://schemas.openxmlformats.org/officeDocument/2006/relationships" xmlns:p="http://schemas.openxmlformats.org/presentationml/2006/main">
+  <p:cSld>
+    <p:spTree>
+      <p:nvGrpSpPr>
+        <p:cNvPr id="1" name=""/>
+        <p:cNvGrpSpPr/>
+        <p:nvPr/>
+      </p:nvGrpSpPr>
+      <p:grpSpPr>
+        <a:xfrm>
+          <a:off x="0" y="0"/>
+          <a:ext cx="0" cy="0"/>
+          <a:chOff x="0" y="0"/>
+          <a:chExt cx="0" cy="0"/>
+        </a:xfrm>
+      </p:grpSpPr>
+      <p:sp>
+        <p:nvSpPr>
+          <p:cNvPr id="2" name="タイトル 1">
+            <a:extLst>
+              <a:ext uri="{FF2B5EF4-FFF2-40B4-BE49-F238E27FC236}">
                 <a16:creationId xmlns:a16="http://schemas.microsoft.com/office/drawing/2014/main" id="{71BC79A2-AA51-8388-6EAA-30FC6DDD4B90}"/>
               </a:ext>
             </a:extLst>
@@ -23356,7 +24103,7 @@
           <a:p>
             <a:fld id="{10649E7B-FC1B-418B-9B6A-00859DB1DEE8}" type="slidenum">
               <a:rPr kumimoji="1" lang="ja-JP" altLang="en-US" smtClean="0"/>
-              <a:t>50</a:t>
+              <a:t>51</a:t>
             </a:fld>
             <a:endParaRPr kumimoji="1" lang="ja-JP" altLang="en-US"/>
           </a:p>
@@ -23461,7 +24208,7 @@
 </p:sld>
 </file>
 
-<file path=ppt/slides/slide51.xml><?xml version="1.0" encoding="utf-8"?>
+<file path=ppt/slides/slide52.xml><?xml version="1.0" encoding="utf-8"?>
 <p:sld xmlns:a="http://schemas.openxmlformats.org/drawingml/2006/main" xmlns:r="http://schemas.openxmlformats.org/officeDocument/2006/relationships" xmlns:p="http://schemas.openxmlformats.org/presentationml/2006/main">
   <p:cSld>
     <p:spTree>
@@ -23565,7 +24312,7 @@
           <a:p>
             <a:fld id="{10649E7B-FC1B-418B-9B6A-00859DB1DEE8}" type="slidenum">
               <a:rPr kumimoji="1" lang="ja-JP" altLang="en-US" smtClean="0"/>
-              <a:t>51</a:t>
+              <a:t>52</a:t>
             </a:fld>
             <a:endParaRPr kumimoji="1" lang="ja-JP" altLang="en-US"/>
           </a:p>

--- a/生成AIの追加学習による問題.pptx
+++ b/生成AIの追加学習による問題.pptx
@@ -1000,7 +1000,7 @@
           <a:p>
             <a:r>
               <a:rPr lang="ja-JP" altLang="ja-JP" dirty="0"/>
-              <a:t>RQ2は、SFTにおける教師データの違いが、この能力の獲得にどのような影響を与えるのか、という問いです。</a:t>
+              <a:t>RQ2は、教師データの違いが、この能力の獲得にどのような影響を与えるのか、という問いです。</a:t>
             </a:r>
           </a:p>
         </p:txBody>
@@ -1091,12 +1091,6 @@
             </a:r>
           </a:p>
           <a:p>
-            <a:r>
-              <a:rPr lang="ja-JP" altLang="ja-JP" dirty="0"/>
-              <a:t>本研究では、数字の配列に対する変換問題を作成し、LLMにその変換ルールを推測させます。</a:t>
-            </a:r>
-          </a:p>
-          <a:p>
             <a:endParaRPr kumimoji="1" lang="ja-JP" altLang="en-US" dirty="0"/>
           </a:p>
         </p:txBody>
@@ -1267,7 +1261,7 @@
           <a:p>
             <a:r>
               <a:rPr lang="ja-JP" altLang="ja-JP" dirty="0"/>
-              <a:t>例えば、このように複数の入力と出力の例をモデルに与えます。</a:t>
+              <a:t>例えば、このように入力と出力の例をモデルに与えます。</a:t>
             </a:r>
           </a:p>
           <a:p>
@@ -1465,13 +1459,25 @@
           <a:p>
             <a:r>
               <a:rPr lang="ja-JP" altLang="ja-JP" dirty="0"/>
-              <a:t>そして、それらの処理を1つだけ適用する問題と、2つの処理を組み合わせて適用する問題を作成しました。</a:t>
-            </a:r>
-          </a:p>
-          <a:p>
+              <a:t>そして</a:t>
+            </a:r>
+            <a:r>
+              <a:rPr lang="ja-JP" altLang="en-US" dirty="0"/>
+              <a:t>訓練用データでは</a:t>
+            </a:r>
             <a:r>
               <a:rPr lang="ja-JP" altLang="ja-JP" dirty="0"/>
-              <a:t>全体では、処理単体と処理の組み合わせを合わせて7</a:t>
+              <a:t>、それらの処理を1つだけ適用する問題と、2つの処理を組み合わせて適用する問題を作成しました。</a:t>
+            </a:r>
+          </a:p>
+          <a:p>
+            <a:r>
+              <a:rPr lang="ja-JP" altLang="en-US" dirty="0"/>
+              <a:t>訓練用データ</a:t>
+            </a:r>
+            <a:r>
+              <a:rPr lang="ja-JP" altLang="ja-JP" dirty="0"/>
+              <a:t>では、処理単体と処理の組み合わせを合わせて7</a:t>
             </a:r>
             <a:r>
               <a:rPr lang="en-US" altLang="ja-JP" dirty="0"/>
@@ -1578,7 +1584,15 @@
           <a:p>
             <a:r>
               <a:rPr lang="ja-JP" altLang="ja-JP" dirty="0"/>
-              <a:t>2つ目は、答えに加えて、問題を解くための処理過程も与えるデータです。</a:t>
+              <a:t>2つ目は、答えに加えて、問題を解くための処理過程も</a:t>
+            </a:r>
+            <a:r>
+              <a:rPr lang="ja-JP" altLang="en-US" dirty="0"/>
+              <a:t>含む</a:t>
+            </a:r>
+            <a:r>
+              <a:rPr lang="ja-JP" altLang="ja-JP" dirty="0"/>
+              <a:t>データです。</a:t>
             </a:r>
           </a:p>
           <a:p>
@@ -1776,7 +1790,15 @@
           <a:p>
             <a:r>
               <a:rPr lang="ja-JP" altLang="ja-JP" dirty="0"/>
-              <a:t>例えば、ここでは「reverse」と「add_1」の順番を入れ替えても、最終的な答えは同じになります。</a:t>
+              <a:t>例えば、ここでは</a:t>
+            </a:r>
+            <a:r>
+              <a:rPr lang="ja-JP" altLang="en-US" dirty="0"/>
+              <a:t>それぞれの処理</a:t>
+            </a:r>
+            <a:r>
+              <a:rPr lang="ja-JP" altLang="ja-JP" dirty="0"/>
+              <a:t>の順番を入れ替えても、最終的な答えは同じになります。</a:t>
             </a:r>
           </a:p>
           <a:p>
@@ -2172,7 +2194,7 @@
           <a:p>
             <a:r>
               <a:rPr lang="ja-JP" altLang="ja-JP" dirty="0"/>
-              <a:t>比較的小規模な4Bパラメータのモデルで、近年の追加学習を用いた研究でも利用されています。</a:t>
+              <a:t>比較的小規模なモデルで、近年の追加学習を用いた研究でも利用されています。</a:t>
             </a:r>
           </a:p>
           <a:p>
@@ -2882,7 +2904,7 @@
           <a:p>
             <a:r>
               <a:rPr lang="ja-JP" altLang="ja-JP" dirty="0"/>
-              <a:t>一方、SFTを行ったモデルでは、複数処理の問題に対する正解率が大きく向上しています。</a:t>
+              <a:t>一方、SFTを行ったモデルでは、複数処理の問題に対する正解率が向上しています。</a:t>
             </a:r>
           </a:p>
           <a:p>
@@ -3457,24 +3479,24 @@
           <a:lstStyle/>
           <a:p>
             <a:r>
-              <a:rPr lang="ja-JP" altLang="ja-JP" dirty="0"/>
-              <a:t>そこで、トークン上限への到達と正解率の関係を調べました。</a:t>
-            </a:r>
-          </a:p>
-          <a:p>
-            <a:r>
-              <a:rPr lang="ja-JP" altLang="ja-JP" dirty="0"/>
-              <a:t>結果として、通常終了した場合には正解が多い一方、トークン上限に到達した場合には不正解が非常に多くなりました。</a:t>
-            </a:r>
-          </a:p>
-          <a:p>
-            <a:r>
-              <a:rPr lang="ja-JP" altLang="ja-JP" dirty="0"/>
-              <a:t>このことから、ベースモデルでは推論が長大化することが、問題解決の失敗につながっている可能性があります。</a:t>
-            </a:r>
-          </a:p>
-          <a:p>
-            <a:endParaRPr kumimoji="1" lang="ja-JP" altLang="en-US" dirty="0"/>
+              <a:rPr lang="ja-JP" altLang="en-US" dirty="0"/>
+              <a:t>そこで、この傾向が他の問題でも見られるのかを確認するため、トークン上限への到達と正解率の関係を調べました。</a:t>
+            </a:r>
+            <a:endParaRPr lang="en-US" altLang="ja-JP" dirty="0"/>
+          </a:p>
+          <a:p>
+            <a:r>
+              <a:rPr lang="ja-JP" altLang="en-US" dirty="0"/>
+              <a:t>結果として、トークン上限に到達した場合は不正解が非常に多くなりました。</a:t>
+            </a:r>
+            <a:endParaRPr lang="en-US" altLang="ja-JP" dirty="0"/>
+          </a:p>
+          <a:p>
+            <a:r>
+              <a:rPr lang="ja-JP" altLang="en-US" dirty="0"/>
+              <a:t>この結果から、ベースモデルでは、推論の途中で仮説を絞り込めず迷走することで推論が長大化し、その結果としてトークン上限に到達するケースが多いと考えられます。</a:t>
+            </a:r>
+            <a:endParaRPr lang="ja-JP" altLang="ja-JP" dirty="0"/>
           </a:p>
         </p:txBody>
       </p:sp>
@@ -4300,7 +4322,7 @@
           <a:p>
             <a:r>
               <a:rPr lang="ja-JP" altLang="ja-JP" dirty="0"/>
-              <a:t>まず、本研究で扱う「生成AI」と「LLM」について説明します。</a:t>
+              <a:t>本研究で扱う「生成AI」と「LLM」について説明します。</a:t>
             </a:r>
           </a:p>
           <a:p>
@@ -5322,9 +5344,45 @@
           <a:bodyPr/>
           <a:lstStyle/>
           <a:p>
+            <a:pPr marL="0" marR="0" lvl="0" indent="0" algn="l" defTabSz="914400" rtl="0" eaLnBrk="1" fontAlgn="auto" latinLnBrk="0" hangingPunct="1">
+              <a:lnSpc>
+                <a:spcPct val="100000"/>
+              </a:lnSpc>
+              <a:spcBef>
+                <a:spcPts val="0"/>
+              </a:spcBef>
+              <a:spcAft>
+                <a:spcPts val="0"/>
+              </a:spcAft>
+              <a:buClrTx/>
+              <a:buSzTx/>
+              <a:buFontTx/>
+              <a:buNone/>
+              <a:tabLst/>
+              <a:defRPr/>
+            </a:pPr>
             <a:r>
               <a:rPr lang="ja-JP" altLang="ja-JP" dirty="0"/>
-              <a:t>今後は、テストデータ2において、分析したいと考えています。</a:t>
+              <a:t>今後は、</a:t>
+            </a:r>
+            <a:r>
+              <a:rPr lang="ja-JP" altLang="en-US" sz="1200" dirty="0"/>
+              <a:t>答え＋処理過程の</a:t>
+            </a:r>
+            <a:r>
+              <a:rPr lang="en-US" altLang="ja-JP" sz="1200" dirty="0"/>
+              <a:t>SFT</a:t>
+            </a:r>
+            <a:r>
+              <a:rPr lang="ja-JP" altLang="en-US" sz="1200" dirty="0"/>
+              <a:t>の分析をもう少し頑張ります</a:t>
+            </a:r>
+            <a:endParaRPr lang="en-US" altLang="ja-JP" dirty="0"/>
+          </a:p>
+          <a:p>
+            <a:r>
+              <a:rPr lang="ja-JP" altLang="ja-JP" dirty="0"/>
+              <a:t>テストデータ2において、分析したいと考えています。</a:t>
             </a:r>
           </a:p>
           <a:p>
@@ -5822,8 +5880,16 @@
           <a:lstStyle/>
           <a:p>
             <a:r>
+              <a:rPr lang="en-US" altLang="ja-JP" dirty="0"/>
+              <a:t>SFT</a:t>
+            </a:r>
+            <a:r>
+              <a:rPr lang="ja-JP" altLang="en-US" dirty="0"/>
+              <a:t>に</a:t>
+            </a:r>
+            <a:r>
               <a:rPr lang="ja-JP" altLang="ja-JP" dirty="0"/>
-              <a:t>この点について、いくつかの先行研究があります。</a:t>
+              <a:t>ついて、いくつかの先行研究があります。</a:t>
             </a:r>
           </a:p>
           <a:p>
@@ -6032,9 +6098,10 @@
           </a:p>
           <a:p>
             <a:r>
-              <a:rPr lang="ja-JP" altLang="ja-JP" dirty="0"/>
-              <a:t>つまり、個々の処理については学習している一方で、それらの組み合わせは学習していない問題を用います。</a:t>
-            </a:r>
+              <a:rPr lang="ja-JP" altLang="en-US" dirty="0"/>
+              <a:t>つまり、個々の処理や、それらの一部の組み合わせについては学習している一方で、別の組み合わせは学習していない問題を用います。</a:t>
+            </a:r>
+            <a:endParaRPr lang="en-US" altLang="ja-JP" dirty="0"/>
           </a:p>
           <a:p>
             <a:r>
@@ -10312,7 +10379,7 @@
 </file>
 
 <file path=ppt/slides/slide13.xml><?xml version="1.0" encoding="utf-8"?>
-<p:sld xmlns:a="http://schemas.openxmlformats.org/drawingml/2006/main" xmlns:r="http://schemas.openxmlformats.org/officeDocument/2006/relationships" xmlns:p="http://schemas.openxmlformats.org/presentationml/2006/main">
+<p:sld xmlns:a="http://schemas.openxmlformats.org/drawingml/2006/main" xmlns:r="http://schemas.openxmlformats.org/officeDocument/2006/relationships" xmlns:p="http://schemas.openxmlformats.org/presentationml/2006/main" show="0">
   <p:cSld>
     <p:spTree>
       <p:nvGrpSpPr>
@@ -13333,12 +13400,8 @@
           <a:p>
             <a:pPr lvl="1"/>
             <a:r>
-              <a:rPr lang="en-US" altLang="ja-JP" sz="2800" dirty="0"/>
-              <a:t>4B</a:t>
-            </a:r>
-            <a:r>
               <a:rPr lang="ja-JP" altLang="en-US" sz="2800" dirty="0"/>
-              <a:t>パラメータの比較的小規模な</a:t>
+              <a:t>比較的小規模な</a:t>
             </a:r>
             <a:r>
               <a:rPr lang="en-US" altLang="ja-JP" sz="2800" dirty="0"/>
@@ -16605,7 +16668,7 @@
         <p:spPr>
           <a:xfrm>
             <a:off x="484816" y="1825625"/>
-            <a:ext cx="10868984" cy="4351338"/>
+            <a:ext cx="10868984" cy="4895850"/>
           </a:xfrm>
         </p:spPr>
         <p:txBody>
@@ -16691,6 +16754,22 @@
             <a:r>
               <a:rPr kumimoji="1" lang="ja-JP" altLang="en-US" sz="2400" dirty="0"/>
               <a:t>ひたすらルールを提示し続ける</a:t>
+            </a:r>
+            <a:endParaRPr kumimoji="1" lang="en-US" altLang="ja-JP" sz="2400" dirty="0"/>
+          </a:p>
+          <a:p>
+            <a:pPr lvl="2"/>
+            <a:r>
+              <a:rPr kumimoji="1" lang="ja-JP" altLang="en-US" sz="2400" dirty="0"/>
+              <a:t>トークン：生成</a:t>
+            </a:r>
+            <a:r>
+              <a:rPr kumimoji="1" lang="en-US" altLang="ja-JP" sz="2400" dirty="0"/>
+              <a:t>AI</a:t>
+            </a:r>
+            <a:r>
+              <a:rPr kumimoji="1" lang="ja-JP" altLang="en-US" sz="2400" dirty="0"/>
+              <a:t>が文章を処理・生成する際の単位</a:t>
             </a:r>
           </a:p>
           <a:p>
@@ -25394,8 +25473,15 @@
           </a:p>
           <a:p>
             <a:r>
+              <a:rPr lang="ja-JP" altLang="ja-JP" dirty="0"/>
+              <a:t>個々の処理や一部の組み合わせは学習済み</a:t>
+            </a:r>
+            <a:endParaRPr lang="en-US" altLang="ja-JP" dirty="0"/>
+          </a:p>
+          <a:p>
+            <a:r>
               <a:rPr lang="ja-JP" altLang="en-US" dirty="0"/>
-              <a:t>そこで、個々の処理は学習済みとし、処理の組み合わせのみを未知とする</a:t>
+              <a:t>学習していない新しい組み合わせの問題を用いる</a:t>
             </a:r>
             <a:endParaRPr lang="en-US" altLang="ja-JP" dirty="0"/>
           </a:p>

--- a/生成AIの追加学習による問題.pptx
+++ b/生成AIの追加学習による問題.pptx
@@ -3002,8 +3002,25 @@
           </a:p>
           <a:p>
             <a:r>
+              <a:rPr lang="ja-JP" altLang="en-US"/>
+              <a:t>これはベースモデルが正解した問題の一例です。</a:t>
+            </a:r>
+            <a:endParaRPr lang="en-US" altLang="ja-JP" dirty="0"/>
+          </a:p>
+          <a:p>
+            <a:r>
+              <a:rPr lang="en-US" altLang="ja-JP" dirty="0"/>
+              <a:t>###</a:t>
+            </a:r>
+          </a:p>
+          <a:p>
+            <a:r>
+              <a:rPr lang="ja-JP" altLang="ja-JP"/>
+              <a:t>この</a:t>
+            </a:r>
+            <a:r>
               <a:rPr lang="ja-JP" altLang="ja-JP" dirty="0"/>
-              <a:t>この例では、モデルは入力と出力の例を比較し、数字の位置関係を確認しています。</a:t>
+              <a:t>例では、モデルは入力と出力の例を比較し、数字の位置関係を確認しています。</a:t>
             </a:r>
           </a:p>
           <a:p>
@@ -3289,7 +3306,10 @@
           <a:bodyPr/>
           <a:lstStyle/>
           <a:p>
-            <a:endParaRPr kumimoji="1" lang="ja-JP" altLang="en-US"/>
+            <a:r>
+              <a:rPr kumimoji="1" lang="ja-JP" altLang="en-US"/>
+              <a:t>こちらが不正解の問題です。</a:t>
+            </a:r>
           </a:p>
         </p:txBody>
       </p:sp>
@@ -3374,8 +3394,16 @@
           <a:lstStyle/>
           <a:p>
             <a:r>
+              <a:rPr lang="ja-JP" altLang="en-US"/>
+              <a:t>この</a:t>
+            </a:r>
+            <a:r>
+              <a:rPr lang="ja-JP" altLang="ja-JP"/>
+              <a:t>失敗例</a:t>
+            </a:r>
+            <a:r>
               <a:rPr lang="ja-JP" altLang="ja-JP" dirty="0"/>
-              <a:t>一方、失敗例では異なる傾向が見られました。</a:t>
+              <a:t>では異なる傾向が見られました。</a:t>
             </a:r>
           </a:p>
           <a:p>
@@ -3393,7 +3421,23 @@
           <a:p>
             <a:r>
               <a:rPr lang="ja-JP" altLang="ja-JP" dirty="0"/>
-              <a:t>最終的には、明確なルールを導出できないままトークン上限に達し、正解できませんでした。</a:t>
+              <a:t>最終的には、明確な</a:t>
+            </a:r>
+            <a:r>
+              <a:rPr lang="ja-JP" altLang="ja-JP"/>
+              <a:t>ルールを</a:t>
+            </a:r>
+            <a:r>
+              <a:rPr lang="ja-JP" altLang="en-US"/>
+              <a:t>導き出せ</a:t>
+            </a:r>
+            <a:r>
+              <a:rPr lang="ja-JP" altLang="ja-JP"/>
+              <a:t>ない</a:t>
+            </a:r>
+            <a:r>
+              <a:rPr lang="ja-JP" altLang="ja-JP" dirty="0"/>
+              <a:t>ままトークン上限に達し、正解できませんでした。</a:t>
             </a:r>
           </a:p>
         </p:txBody>
@@ -3480,14 +3524,30 @@
           <a:p>
             <a:r>
               <a:rPr lang="ja-JP" altLang="en-US" dirty="0"/>
-              <a:t>そこで、この傾向が他の問題でも見られるのかを確認するため、トークン上限への到達と正解率の関係を調べました。</a:t>
+              <a:t>そこで、この傾向が他の問題でも見られるのかを確認するため</a:t>
+            </a:r>
+            <a:r>
+              <a:rPr lang="ja-JP" altLang="en-US"/>
+              <a:t>、トークンの上限</a:t>
+            </a:r>
+            <a:r>
+              <a:rPr lang="ja-JP" altLang="en-US" dirty="0"/>
+              <a:t>への到達と正解率の関係を調べました。</a:t>
             </a:r>
             <a:endParaRPr lang="en-US" altLang="ja-JP" dirty="0"/>
           </a:p>
           <a:p>
             <a:r>
               <a:rPr lang="ja-JP" altLang="en-US" dirty="0"/>
-              <a:t>結果として、トークン上限に到達した場合は不正解が非常に多くなりました。</a:t>
+              <a:t>結果として</a:t>
+            </a:r>
+            <a:r>
+              <a:rPr lang="ja-JP" altLang="en-US"/>
+              <a:t>、トークンの上限</a:t>
+            </a:r>
+            <a:r>
+              <a:rPr lang="ja-JP" altLang="en-US" dirty="0"/>
+              <a:t>に到達した場合は不正解が非常に多くなりました。</a:t>
             </a:r>
             <a:endParaRPr lang="en-US" altLang="ja-JP" dirty="0"/>
           </a:p>
@@ -3669,14 +3729,28 @@
           <a:lstStyle/>
           <a:p>
             <a:r>
+              <a:rPr lang="ja-JP" altLang="ja-JP"/>
+              <a:t>まず</a:t>
+            </a:r>
+            <a:r>
               <a:rPr lang="ja-JP" altLang="ja-JP" dirty="0"/>
-              <a:t>ここから、SFTを行ったモデルの分析です。</a:t>
-            </a:r>
-          </a:p>
-          <a:p>
+              <a:t>、</a:t>
+            </a:r>
+            <a:r>
+              <a:rPr lang="ja-JP" altLang="ja-JP"/>
+              <a:t>答えのみ</a:t>
+            </a:r>
+            <a:r>
+              <a:rPr lang="ja-JP" altLang="en-US"/>
+              <a:t>の</a:t>
+            </a:r>
+            <a:r>
+              <a:rPr lang="ja-JP" altLang="ja-JP"/>
+              <a:t>SFT</a:t>
+            </a:r>
             <a:r>
               <a:rPr lang="ja-JP" altLang="ja-JP" dirty="0"/>
-              <a:t>まず、答えのみSFTでは、テストデータ1だけでなく、テストデータ2でもベースモデルより正解率が大きく向上しました。</a:t>
+              <a:t>では、テストデータ1だけでなく、テストデータ2でもベースモデルより正解率が大きく向上しました。</a:t>
             </a:r>
           </a:p>
           <a:p>
@@ -3692,19 +3766,21 @@
           <a:p>
             <a:r>
               <a:rPr lang="ja-JP" altLang="ja-JP" dirty="0"/>
-              <a:t>一方、答え＋処理過程SFTでは、テストデータ1では最も高い正解率となりました。</a:t>
-            </a:r>
-          </a:p>
-          <a:p>
+              <a:t>一方、答え＋処理過程SFTで</a:t>
+            </a:r>
+            <a:r>
+              <a:rPr lang="ja-JP" altLang="ja-JP"/>
+              <a:t>は、テストデータ2では正解率が大きく低下しています。</a:t>
+            </a:r>
+          </a:p>
+          <a:p>
+            <a:r>
+              <a:rPr lang="ja-JP" altLang="ja-JP"/>
+              <a:t>そこ</a:t>
+            </a:r>
             <a:r>
               <a:rPr lang="ja-JP" altLang="ja-JP" dirty="0"/>
-              <a:t>しかし、テストデータ2では正解率が大きく低下しています。</a:t>
-            </a:r>
-          </a:p>
-          <a:p>
-            <a:r>
-              <a:rPr lang="ja-JP" altLang="ja-JP" dirty="0"/>
-              <a:t>そこで、処理過程を学習させることで、モデルの問題解決過程がどのように変化したのかを分析しました。</a:t>
+              <a:t>で、処理過程を学習させることで、モデルの問題解決過程がどのように変化したのかを分析しました。</a:t>
             </a:r>
           </a:p>
           <a:p>
@@ -3800,13 +3876,50 @@
           <a:p>
             <a:r>
               <a:rPr lang="ja-JP" altLang="ja-JP" dirty="0"/>
-              <a:t>訓練時には教えていない処理の順番を、7例でモデルが自発的に使用していました。</a:t>
-            </a:r>
-          </a:p>
-          <a:p>
+              <a:t>訓練時には教えていない処理の順番</a:t>
+            </a:r>
+            <a:r>
+              <a:rPr lang="ja-JP" altLang="ja-JP"/>
+              <a:t>を、モデル</a:t>
+            </a:r>
             <a:r>
               <a:rPr lang="ja-JP" altLang="ja-JP" dirty="0"/>
-              <a:t>そのうち6例では、最終的な回答まで正解していました。</a:t>
+              <a:t>が自発的に使用</a:t>
+            </a:r>
+            <a:r>
+              <a:rPr lang="ja-JP" altLang="ja-JP"/>
+              <a:t>してい</a:t>
+            </a:r>
+            <a:r>
+              <a:rPr lang="ja-JP" altLang="en-US"/>
+              <a:t>た例が７つありました</a:t>
+            </a:r>
+            <a:r>
+              <a:rPr lang="ja-JP" altLang="ja-JP"/>
+              <a:t>。</a:t>
+            </a:r>
+            <a:endParaRPr lang="ja-JP" altLang="ja-JP" dirty="0"/>
+          </a:p>
+          <a:p>
+            <a:r>
+              <a:rPr lang="ja-JP" altLang="ja-JP" dirty="0"/>
+              <a:t>その</a:t>
+            </a:r>
+            <a:r>
+              <a:rPr lang="ja-JP" altLang="ja-JP"/>
+              <a:t>うち6</a:t>
+            </a:r>
+            <a:r>
+              <a:rPr lang="ja-JP" altLang="en-US"/>
+              <a:t>つの</a:t>
+            </a:r>
+            <a:r>
+              <a:rPr lang="ja-JP" altLang="ja-JP"/>
+              <a:t>例</a:t>
+            </a:r>
+            <a:r>
+              <a:rPr lang="ja-JP" altLang="ja-JP" dirty="0"/>
+              <a:t>では、最終的な回答まで正解していました。</a:t>
             </a:r>
           </a:p>
           <a:p>
@@ -4136,7 +4249,23 @@
           <a:p>
             <a:r>
               <a:rPr lang="ja-JP" altLang="ja-JP" dirty="0"/>
-              <a:t>このことから、答え＋処理過程SFTでは、問題を解く際にどの処理を選択するかが、最終的な正解を左右する重要な段階であると考えられます。</a:t>
+              <a:t>このことから、答え＋</a:t>
+            </a:r>
+            <a:r>
+              <a:rPr lang="ja-JP" altLang="ja-JP"/>
+              <a:t>処理過程</a:t>
+            </a:r>
+            <a:r>
+              <a:rPr lang="ja-JP" altLang="en-US"/>
+              <a:t>の</a:t>
+            </a:r>
+            <a:r>
+              <a:rPr lang="ja-JP" altLang="ja-JP"/>
+              <a:t>SFT</a:t>
+            </a:r>
+            <a:r>
+              <a:rPr lang="ja-JP" altLang="ja-JP" dirty="0"/>
+              <a:t>では、問題を解く際にどの処理を選択するかが、最終的な正解を左右する重要な段階であると考えられます。</a:t>
             </a:r>
           </a:p>
           <a:p>
@@ -5382,13 +5511,23 @@
           <a:p>
             <a:r>
               <a:rPr lang="ja-JP" altLang="ja-JP" dirty="0"/>
-              <a:t>テストデータ2において、分析したいと考えています。</a:t>
-            </a:r>
-          </a:p>
-          <a:p>
+              <a:t>テストデータ</a:t>
+            </a:r>
+            <a:r>
+              <a:rPr lang="ja-JP" altLang="ja-JP"/>
+              <a:t>2に</a:t>
+            </a:r>
+            <a:r>
+              <a:rPr lang="ja-JP" altLang="en-US"/>
+              <a:t>ついても</a:t>
+            </a:r>
+            <a:r>
+              <a:rPr lang="ja-JP" altLang="ja-JP"/>
+              <a:t>、</a:t>
+            </a:r>
             <a:r>
               <a:rPr lang="ja-JP" altLang="ja-JP" dirty="0"/>
-              <a:t>また、推論過程のどの時点で最初の誤りが発生しているのか、その原因についても分析したいと考えています。</a:t>
+              <a:t>分析したいと考えています。</a:t>
             </a:r>
           </a:p>
           <a:p>
@@ -11677,7 +11816,23 @@
             </a:r>
             <a:r>
               <a:rPr kumimoji="1" lang="ja-JP" altLang="en-US" sz="3200" dirty="0"/>
-              <a:t>のような簡単な処理を２０種類用意</a:t>
+              <a:t>のような簡単な</a:t>
+            </a:r>
+            <a:r>
+              <a:rPr kumimoji="1" lang="ja-JP" altLang="en-US" sz="3200"/>
+              <a:t>処理を</a:t>
+            </a:r>
+            <a:r>
+              <a:rPr lang="en-US" altLang="ja-JP" sz="3200" dirty="0"/>
+              <a:t>20</a:t>
+            </a:r>
+            <a:r>
+              <a:rPr kumimoji="1" lang="ja-JP" altLang="en-US" sz="3200"/>
+              <a:t>種類</a:t>
+            </a:r>
+            <a:r>
+              <a:rPr kumimoji="1" lang="ja-JP" altLang="en-US" sz="3200" dirty="0"/>
+              <a:t>用意</a:t>
             </a:r>
             <a:endParaRPr kumimoji="1" lang="en-US" altLang="ja-JP" sz="3200" dirty="0"/>
           </a:p>
@@ -12847,7 +13002,7 @@
 </file>
 
 <file path=ppt/slides/slide20.xml><?xml version="1.0" encoding="utf-8"?>
-<p:sld xmlns:a="http://schemas.openxmlformats.org/drawingml/2006/main" xmlns:r="http://schemas.openxmlformats.org/officeDocument/2006/relationships" xmlns:p="http://schemas.openxmlformats.org/presentationml/2006/main">
+<p:sld xmlns:a="http://schemas.openxmlformats.org/drawingml/2006/main" xmlns:r="http://schemas.openxmlformats.org/officeDocument/2006/relationships" xmlns:p="http://schemas.openxmlformats.org/presentationml/2006/main" show="0">
   <p:cSld>
     <p:spTree>
       <p:nvGrpSpPr>
@@ -14681,61 +14836,21 @@
                   <a:srgbClr val="FF0000"/>
                 </a:solidFill>
               </a:rPr>
-              <a:t>分析と考察</a:t>
+              <a:t>分析</a:t>
+            </a:r>
+            <a:r>
+              <a:rPr kumimoji="1" lang="ja-JP" altLang="en-US" sz="3200">
+                <a:solidFill>
+                  <a:srgbClr val="FF0000"/>
+                </a:solidFill>
+              </a:rPr>
+              <a:t>と考察</a:t>
             </a:r>
             <a:endParaRPr kumimoji="1" lang="en-US" altLang="ja-JP" sz="3200" dirty="0">
               <a:solidFill>
                 <a:srgbClr val="FF0000"/>
               </a:solidFill>
             </a:endParaRPr>
-          </a:p>
-          <a:p>
-            <a:pPr lvl="1"/>
-            <a:r>
-              <a:rPr kumimoji="1" lang="ja-JP" altLang="en-US" sz="3200" dirty="0"/>
-              <a:t>単一処理・複数処理の比較</a:t>
-            </a:r>
-            <a:endParaRPr kumimoji="1" lang="en-US" altLang="ja-JP" sz="3200" dirty="0"/>
-          </a:p>
-          <a:p>
-            <a:pPr lvl="1"/>
-            <a:r>
-              <a:rPr kumimoji="1" lang="ja-JP" altLang="en-US" sz="3200" dirty="0"/>
-              <a:t>ベースモデルの分析</a:t>
-            </a:r>
-            <a:endParaRPr kumimoji="1" lang="en-US" altLang="ja-JP" sz="3200" dirty="0"/>
-          </a:p>
-          <a:p>
-            <a:pPr lvl="1"/>
-            <a:r>
-              <a:rPr lang="ja-JP" altLang="en-US" sz="3200" dirty="0"/>
-              <a:t>答えのみ</a:t>
-            </a:r>
-            <a:r>
-              <a:rPr lang="en-US" altLang="ja-JP" sz="3200" dirty="0"/>
-              <a:t>SFT</a:t>
-            </a:r>
-            <a:r>
-              <a:rPr lang="ja-JP" altLang="en-US" sz="3200" dirty="0"/>
-              <a:t>のモデルの分析</a:t>
-            </a:r>
-            <a:endParaRPr lang="en-US" altLang="ja-JP" sz="3200" dirty="0"/>
-          </a:p>
-          <a:p>
-            <a:pPr lvl="1"/>
-            <a:r>
-              <a:rPr kumimoji="1" lang="ja-JP" altLang="en-US" sz="3200" dirty="0"/>
-              <a:t>答え＋処理過程の</a:t>
-            </a:r>
-            <a:r>
-              <a:rPr kumimoji="1" lang="en-US" altLang="ja-JP" sz="3200" dirty="0"/>
-              <a:t>SFT</a:t>
-            </a:r>
-            <a:r>
-              <a:rPr kumimoji="1" lang="ja-JP" altLang="en-US" sz="3200" dirty="0"/>
-              <a:t>のモデルの分析</a:t>
-            </a:r>
-            <a:endParaRPr kumimoji="1" lang="en-US" altLang="ja-JP" sz="3200" dirty="0"/>
           </a:p>
         </p:txBody>
       </p:sp>
@@ -14782,7 +14897,7 @@
 </file>
 
 <file path=ppt/slides/slide27.xml><?xml version="1.0" encoding="utf-8"?>
-<p:sld xmlns:a="http://schemas.openxmlformats.org/drawingml/2006/main" xmlns:r="http://schemas.openxmlformats.org/officeDocument/2006/relationships" xmlns:p="http://schemas.openxmlformats.org/presentationml/2006/main">
+<p:sld xmlns:a="http://schemas.openxmlformats.org/drawingml/2006/main" xmlns:r="http://schemas.openxmlformats.org/officeDocument/2006/relationships" xmlns:p="http://schemas.openxmlformats.org/presentationml/2006/main" show="0">
   <p:cSld>
     <p:spTree>
       <p:nvGrpSpPr>
@@ -15305,7 +15420,7 @@
 </file>
 
 <file path=ppt/slides/slide28.xml><?xml version="1.0" encoding="utf-8"?>
-<p:sld xmlns:a="http://schemas.openxmlformats.org/drawingml/2006/main" xmlns:r="http://schemas.openxmlformats.org/officeDocument/2006/relationships" xmlns:p="http://schemas.openxmlformats.org/presentationml/2006/main">
+<p:sld xmlns:a="http://schemas.openxmlformats.org/drawingml/2006/main" xmlns:r="http://schemas.openxmlformats.org/officeDocument/2006/relationships" xmlns:p="http://schemas.openxmlformats.org/presentationml/2006/main" show="0">
   <p:cSld>
     <p:spTree>
       <p:nvGrpSpPr>
@@ -15747,7 +15862,7 @@
 </file>
 
 <file path=ppt/slides/slide29.xml><?xml version="1.0" encoding="utf-8"?>
-<p:sld xmlns:a="http://schemas.openxmlformats.org/drawingml/2006/main" xmlns:r="http://schemas.openxmlformats.org/officeDocument/2006/relationships" xmlns:p="http://schemas.openxmlformats.org/presentationml/2006/main">
+<p:sld xmlns:a="http://schemas.openxmlformats.org/drawingml/2006/main" xmlns:r="http://schemas.openxmlformats.org/officeDocument/2006/relationships" xmlns:p="http://schemas.openxmlformats.org/presentationml/2006/main" show="0">
   <p:cSld>
     <p:spTree>
       <p:nvGrpSpPr>
@@ -16208,7 +16323,7 @@
 </file>
 
 <file path=ppt/slides/slide30.xml><?xml version="1.0" encoding="utf-8"?>
-<p:sld xmlns:a="http://schemas.openxmlformats.org/drawingml/2006/main" xmlns:r="http://schemas.openxmlformats.org/officeDocument/2006/relationships" xmlns:p="http://schemas.openxmlformats.org/presentationml/2006/main">
+<p:sld xmlns:a="http://schemas.openxmlformats.org/drawingml/2006/main" xmlns:r="http://schemas.openxmlformats.org/officeDocument/2006/relationships" xmlns:p="http://schemas.openxmlformats.org/presentationml/2006/main" show="0">
   <p:cSld>
     <p:spTree>
       <p:nvGrpSpPr>
@@ -16599,7 +16714,7 @@
 </file>
 
 <file path=ppt/slides/slide31.xml><?xml version="1.0" encoding="utf-8"?>
-<p:sld xmlns:a="http://schemas.openxmlformats.org/drawingml/2006/main" xmlns:r="http://schemas.openxmlformats.org/officeDocument/2006/relationships" xmlns:p="http://schemas.openxmlformats.org/presentationml/2006/main">
+<p:sld xmlns:a="http://schemas.openxmlformats.org/drawingml/2006/main" xmlns:r="http://schemas.openxmlformats.org/officeDocument/2006/relationships" xmlns:p="http://schemas.openxmlformats.org/presentationml/2006/main" show="0">
   <p:cSld>
     <p:spTree>
       <p:nvGrpSpPr>
@@ -16828,7 +16943,7 @@
 </file>
 
 <file path=ppt/slides/slide32.xml><?xml version="1.0" encoding="utf-8"?>
-<p:sld xmlns:a="http://schemas.openxmlformats.org/drawingml/2006/main" xmlns:r="http://schemas.openxmlformats.org/officeDocument/2006/relationships" xmlns:p="http://schemas.openxmlformats.org/presentationml/2006/main">
+<p:sld xmlns:a="http://schemas.openxmlformats.org/drawingml/2006/main" xmlns:r="http://schemas.openxmlformats.org/officeDocument/2006/relationships" xmlns:p="http://schemas.openxmlformats.org/presentationml/2006/main" show="0">
   <p:cSld>
     <p:spTree>
       <p:nvGrpSpPr>
@@ -17610,7 +17725,7 @@
 </file>
 
 <file path=ppt/slides/slide33.xml><?xml version="1.0" encoding="utf-8"?>
-<p:sld xmlns:a="http://schemas.openxmlformats.org/drawingml/2006/main" xmlns:r="http://schemas.openxmlformats.org/officeDocument/2006/relationships" xmlns:p="http://schemas.openxmlformats.org/presentationml/2006/main">
+<p:sld xmlns:a="http://schemas.openxmlformats.org/drawingml/2006/main" xmlns:r="http://schemas.openxmlformats.org/officeDocument/2006/relationships" xmlns:p="http://schemas.openxmlformats.org/presentationml/2006/main" show="0">
   <p:cSld>
     <p:spTree>
       <p:nvGrpSpPr>
@@ -18400,7 +18515,7 @@
 </file>
 
 <file path=ppt/slides/slide35.xml><?xml version="1.0" encoding="utf-8"?>
-<p:sld xmlns:a="http://schemas.openxmlformats.org/drawingml/2006/main" xmlns:r="http://schemas.openxmlformats.org/officeDocument/2006/relationships" xmlns:p="http://schemas.openxmlformats.org/presentationml/2006/main">
+<p:sld xmlns:a="http://schemas.openxmlformats.org/drawingml/2006/main" xmlns:r="http://schemas.openxmlformats.org/officeDocument/2006/relationships" xmlns:p="http://schemas.openxmlformats.org/presentationml/2006/main" show="0">
   <p:cSld>
     <p:spTree>
       <p:nvGrpSpPr>
@@ -18574,7 +18689,7 @@
 </file>
 
 <file path=ppt/slides/slide36.xml><?xml version="1.0" encoding="utf-8"?>
-<p:sld xmlns:a="http://schemas.openxmlformats.org/drawingml/2006/main" xmlns:r="http://schemas.openxmlformats.org/officeDocument/2006/relationships" xmlns:p="http://schemas.openxmlformats.org/presentationml/2006/main">
+<p:sld xmlns:a="http://schemas.openxmlformats.org/drawingml/2006/main" xmlns:r="http://schemas.openxmlformats.org/officeDocument/2006/relationships" xmlns:p="http://schemas.openxmlformats.org/presentationml/2006/main" show="0">
   <p:cSld>
     <p:spTree>
       <p:nvGrpSpPr>
@@ -23661,17 +23776,10 @@
             <a:endParaRPr kumimoji="1" lang="en-US" altLang="ja-JP" sz="3200" dirty="0"/>
           </a:p>
           <a:p>
+            <a:pPr marL="0" indent="0">
+              <a:buNone/>
+            </a:pPr>
             <a:endParaRPr kumimoji="1" lang="ja-JP" altLang="en-US" sz="3200" dirty="0"/>
-          </a:p>
-          <a:p>
-            <a:r>
-              <a:rPr kumimoji="1" lang="ja-JP" altLang="en-US" sz="3200" dirty="0"/>
-              <a:t>推論過程の最初の誤りが発生する位置・原因を分析</a:t>
-            </a:r>
-            <a:endParaRPr kumimoji="1" lang="en-US" altLang="ja-JP" sz="3200" dirty="0"/>
-          </a:p>
-          <a:p>
-            <a:endParaRPr lang="en-US" altLang="ja-JP" sz="3200" dirty="0"/>
           </a:p>
         </p:txBody>
       </p:sp>

--- a/生成AIの追加学習による問題.pptx
+++ b/生成AIの追加学習による問題.pptx
@@ -2616,8 +2616,26 @@
             </a:r>
             <a:r>
               <a:rPr lang="ja-JP" altLang="ja-JP" dirty="0"/>
-              <a:t>過程について分析します。</a:t>
-            </a:r>
+              <a:t>過程について分析</a:t>
+            </a:r>
+            <a:r>
+              <a:rPr lang="ja-JP" altLang="ja-JP"/>
+              <a:t>します。</a:t>
+            </a:r>
+            <a:endParaRPr lang="en-US" altLang="ja-JP" dirty="0"/>
+          </a:p>
+          <a:p>
+            <a:endParaRPr lang="en-US" altLang="ja-JP" dirty="0"/>
+          </a:p>
+          <a:p>
+            <a:endParaRPr lang="en-US" altLang="ja-JP" dirty="0"/>
+          </a:p>
+          <a:p>
+            <a:r>
+              <a:rPr lang="en-US" altLang="ja-JP" dirty="0"/>
+              <a:t>###</a:t>
+            </a:r>
+            <a:endParaRPr lang="ja-JP" altLang="ja-JP" dirty="0"/>
           </a:p>
           <a:p>
             <a:r>
@@ -4136,16 +4154,52 @@
           <a:bodyPr/>
           <a:lstStyle/>
           <a:p>
+            <a:endParaRPr lang="en-US" altLang="ja-JP" dirty="0"/>
+          </a:p>
+          <a:p>
+            <a:r>
+              <a:rPr lang="ja-JP" altLang="ja-JP"/>
+              <a:t>次に、</a:t>
+            </a:r>
+            <a:r>
+              <a:rPr lang="ja-JP" altLang="en-US"/>
+              <a:t>答え＋処理過程の</a:t>
+            </a:r>
+            <a:r>
+              <a:rPr lang="en-US" altLang="ja-JP" dirty="0"/>
+              <a:t>SFT</a:t>
+            </a:r>
+            <a:r>
+              <a:rPr lang="ja-JP" altLang="en-US"/>
+              <a:t>の</a:t>
+            </a:r>
+            <a:r>
+              <a:rPr lang="ja-JP" altLang="ja-JP"/>
+              <a:t>モデルが</a:t>
+            </a:r>
             <a:r>
               <a:rPr lang="ja-JP" altLang="ja-JP" dirty="0"/>
-              <a:t>次に、モデルが正しいルールを選択できていたかを分析しました。</a:t>
+              <a:t>正しいルールを選択できていたかを分析しました。</a:t>
             </a:r>
           </a:p>
           <a:p>
             <a:r>
               <a:rPr lang="ja-JP" altLang="ja-JP" dirty="0"/>
-              <a:t>ここでは、モデルが出力した処理と、正解となる処理を比較しています。</a:t>
-            </a:r>
+              <a:t>ここでは</a:t>
+            </a:r>
+            <a:r>
+              <a:rPr lang="ja-JP" altLang="ja-JP"/>
+              <a:t>、モデルが</a:t>
+            </a:r>
+            <a:r>
+              <a:rPr lang="ja-JP" altLang="en-US"/>
+              <a:t>正しくルールを選べたかと正解率の関係をまとめています</a:t>
+            </a:r>
+            <a:r>
+              <a:rPr lang="ja-JP" altLang="ja-JP"/>
+              <a:t>。</a:t>
+            </a:r>
+            <a:endParaRPr lang="ja-JP" altLang="ja-JP" dirty="0"/>
           </a:p>
           <a:p>
             <a:endParaRPr kumimoji="1" lang="ja-JP" altLang="en-US" dirty="0"/>
